--- a/Python/Lesson 01 - Python Basics/Lesson 1  - Intro to Python.pptx
+++ b/Python/Lesson 01 - Python Basics/Lesson 1  - Intro to Python.pptx
@@ -5,7 +5,7 @@
     <p:sldMasterId id="2147483673" r:id="rId1"/>
   </p:sldMasterIdLst>
   <p:notesMasterIdLst>
-    <p:notesMasterId r:id="rId34"/>
+    <p:notesMasterId r:id="rId44"/>
   </p:notesMasterIdLst>
   <p:sldIdLst>
     <p:sldId id="299" r:id="rId2"/>
@@ -18,28 +18,38 @@
     <p:sldId id="273" r:id="rId9"/>
     <p:sldId id="274" r:id="rId10"/>
     <p:sldId id="275" r:id="rId11"/>
-    <p:sldId id="302" r:id="rId12"/>
-    <p:sldId id="304" r:id="rId13"/>
-    <p:sldId id="276" r:id="rId14"/>
-    <p:sldId id="305" r:id="rId15"/>
-    <p:sldId id="277" r:id="rId16"/>
-    <p:sldId id="300" r:id="rId17"/>
-    <p:sldId id="284" r:id="rId18"/>
-    <p:sldId id="291" r:id="rId19"/>
-    <p:sldId id="292" r:id="rId20"/>
-    <p:sldId id="285" r:id="rId21"/>
-    <p:sldId id="306" r:id="rId22"/>
-    <p:sldId id="301" r:id="rId23"/>
-    <p:sldId id="308" r:id="rId24"/>
-    <p:sldId id="287" r:id="rId25"/>
-    <p:sldId id="307" r:id="rId26"/>
-    <p:sldId id="293" r:id="rId27"/>
-    <p:sldId id="309" r:id="rId28"/>
-    <p:sldId id="289" r:id="rId29"/>
-    <p:sldId id="310" r:id="rId30"/>
-    <p:sldId id="311" r:id="rId31"/>
-    <p:sldId id="312" r:id="rId32"/>
-    <p:sldId id="313" r:id="rId33"/>
+    <p:sldId id="314" r:id="rId12"/>
+    <p:sldId id="315" r:id="rId13"/>
+    <p:sldId id="317" r:id="rId14"/>
+    <p:sldId id="318" r:id="rId15"/>
+    <p:sldId id="319" r:id="rId16"/>
+    <p:sldId id="316" r:id="rId17"/>
+    <p:sldId id="320" r:id="rId18"/>
+    <p:sldId id="322" r:id="rId19"/>
+    <p:sldId id="323" r:id="rId20"/>
+    <p:sldId id="321" r:id="rId21"/>
+    <p:sldId id="302" r:id="rId22"/>
+    <p:sldId id="304" r:id="rId23"/>
+    <p:sldId id="276" r:id="rId24"/>
+    <p:sldId id="305" r:id="rId25"/>
+    <p:sldId id="277" r:id="rId26"/>
+    <p:sldId id="300" r:id="rId27"/>
+    <p:sldId id="284" r:id="rId28"/>
+    <p:sldId id="291" r:id="rId29"/>
+    <p:sldId id="292" r:id="rId30"/>
+    <p:sldId id="285" r:id="rId31"/>
+    <p:sldId id="306" r:id="rId32"/>
+    <p:sldId id="301" r:id="rId33"/>
+    <p:sldId id="308" r:id="rId34"/>
+    <p:sldId id="287" r:id="rId35"/>
+    <p:sldId id="307" r:id="rId36"/>
+    <p:sldId id="293" r:id="rId37"/>
+    <p:sldId id="309" r:id="rId38"/>
+    <p:sldId id="289" r:id="rId39"/>
+    <p:sldId id="310" r:id="rId40"/>
+    <p:sldId id="311" r:id="rId41"/>
+    <p:sldId id="312" r:id="rId42"/>
+    <p:sldId id="313" r:id="rId43"/>
   </p:sldIdLst>
   <p:sldSz cx="9144000" cy="5143500" type="screen16x9"/>
   <p:notesSz cx="6858000" cy="9144000"/>
@@ -859,7 +869,13 @@
   <p:cSld>
     <p:spTree>
       <p:nvGrpSpPr>
-        <p:cNvPr id="1" name="Shape 256"/>
+        <p:cNvPr id="1" name="Shape 244">
+          <a:extLst>
+            <a:ext uri="{FF2B5EF4-FFF2-40B4-BE49-F238E27FC236}">
+              <a16:creationId xmlns:a16="http://schemas.microsoft.com/office/drawing/2014/main" id="{BF7CD58D-AA99-2D4E-418D-F448130B9785}"/>
+            </a:ext>
+          </a:extLst>
+        </p:cNvPr>
         <p:cNvGrpSpPr/>
         <p:nvPr/>
       </p:nvGrpSpPr>
@@ -873,293 +889,13 @@
       </p:grpSpPr>
       <p:sp>
         <p:nvSpPr>
-          <p:cNvPr id="257" name="Google Shape;257;g364a009736c_2_187:notes"/>
-          <p:cNvSpPr txBox="1">
-            <a:spLocks noGrp="1"/>
-          </p:cNvSpPr>
-          <p:nvPr>
-            <p:ph type="body" idx="1"/>
-          </p:nvPr>
-        </p:nvSpPr>
-        <p:spPr>
-          <a:xfrm>
-            <a:off x="685800" y="4343400"/>
-            <a:ext cx="5486400" cy="4114800"/>
-          </a:xfrm>
-          <a:prstGeom prst="rect">
-            <a:avLst/>
-          </a:prstGeom>
-        </p:spPr>
-        <p:txBody>
-          <a:bodyPr spcFirstLastPara="1" wrap="square" lIns="91425" tIns="91425" rIns="91425" bIns="91425" anchor="t" anchorCtr="0">
-            <a:noAutofit/>
-          </a:bodyPr>
-          <a:lstStyle/>
-          <a:p>
-            <a:pPr marL="0" lvl="0" indent="0" algn="l" rtl="0">
-              <a:spcBef>
-                <a:spcPts val="0"/>
-              </a:spcBef>
-              <a:spcAft>
-                <a:spcPts val="0"/>
-              </a:spcAft>
-              <a:buNone/>
-            </a:pPr>
-            <a:endParaRPr/>
-          </a:p>
-        </p:txBody>
-      </p:sp>
-      <p:sp>
-        <p:nvSpPr>
-          <p:cNvPr id="258" name="Google Shape;258;g364a009736c_2_187:notes"/>
-          <p:cNvSpPr>
-            <a:spLocks noGrp="1" noRot="1" noChangeAspect="1"/>
-          </p:cNvSpPr>
-          <p:nvPr>
-            <p:ph type="sldImg" idx="2"/>
-          </p:nvPr>
-        </p:nvSpPr>
-        <p:spPr>
-          <a:xfrm>
-            <a:off x="381000" y="685800"/>
-            <a:ext cx="6096000" cy="3429000"/>
-          </a:xfrm>
-          <a:custGeom>
-            <a:avLst/>
-            <a:gdLst/>
-            <a:ahLst/>
-            <a:cxnLst/>
-            <a:rect l="l" t="t" r="r" b="b"/>
-            <a:pathLst>
-              <a:path w="120000" h="120000" extrusionOk="0">
-                <a:moveTo>
-                  <a:pt x="0" y="0"/>
-                </a:moveTo>
-                <a:lnTo>
-                  <a:pt x="120000" y="0"/>
-                </a:lnTo>
-                <a:lnTo>
-                  <a:pt x="120000" y="120000"/>
-                </a:lnTo>
-                <a:lnTo>
-                  <a:pt x="0" y="120000"/>
-                </a:lnTo>
-                <a:close/>
-              </a:path>
-            </a:pathLst>
-          </a:custGeom>
-        </p:spPr>
-      </p:sp>
-    </p:spTree>
-  </p:cSld>
-  <p:clrMapOvr>
-    <a:masterClrMapping/>
-  </p:clrMapOvr>
-</p:notes>
-</file>
-
-<file path=ppt/notesSlides/notesSlide11.xml><?xml version="1.0" encoding="utf-8"?>
-<p:notes xmlns:a="http://schemas.openxmlformats.org/drawingml/2006/main" xmlns:r="http://schemas.openxmlformats.org/officeDocument/2006/relationships" xmlns:p="http://schemas.openxmlformats.org/presentationml/2006/main" showMasterSp="0" showMasterPhAnim="0">
-  <p:cSld>
-    <p:spTree>
-      <p:nvGrpSpPr>
-        <p:cNvPr id="1" name="Shape 262"/>
-        <p:cNvGrpSpPr/>
-        <p:nvPr/>
-      </p:nvGrpSpPr>
-      <p:grpSpPr>
-        <a:xfrm>
-          <a:off x="0" y="0"/>
-          <a:ext cx="0" cy="0"/>
-          <a:chOff x="0" y="0"/>
-          <a:chExt cx="0" cy="0"/>
-        </a:xfrm>
-      </p:grpSpPr>
-      <p:sp>
-        <p:nvSpPr>
-          <p:cNvPr id="263" name="Google Shape;263;g364a009736c_2_192:notes"/>
-          <p:cNvSpPr txBox="1">
-            <a:spLocks noGrp="1"/>
-          </p:cNvSpPr>
-          <p:nvPr>
-            <p:ph type="body" idx="1"/>
-          </p:nvPr>
-        </p:nvSpPr>
-        <p:spPr>
-          <a:xfrm>
-            <a:off x="685800" y="4343400"/>
-            <a:ext cx="5486400" cy="4114800"/>
-          </a:xfrm>
-          <a:prstGeom prst="rect">
-            <a:avLst/>
-          </a:prstGeom>
-        </p:spPr>
-        <p:txBody>
-          <a:bodyPr spcFirstLastPara="1" wrap="square" lIns="91425" tIns="91425" rIns="91425" bIns="91425" anchor="t" anchorCtr="0">
-            <a:noAutofit/>
-          </a:bodyPr>
-          <a:lstStyle/>
-          <a:p>
-            <a:pPr marL="0" lvl="0" indent="0" algn="l" rtl="0">
-              <a:spcBef>
-                <a:spcPts val="0"/>
-              </a:spcBef>
-              <a:spcAft>
-                <a:spcPts val="0"/>
-              </a:spcAft>
-              <a:buNone/>
-            </a:pPr>
-            <a:endParaRPr/>
-          </a:p>
-        </p:txBody>
-      </p:sp>
-      <p:sp>
-        <p:nvSpPr>
-          <p:cNvPr id="264" name="Google Shape;264;g364a009736c_2_192:notes"/>
-          <p:cNvSpPr>
-            <a:spLocks noGrp="1" noRot="1" noChangeAspect="1"/>
-          </p:cNvSpPr>
-          <p:nvPr>
-            <p:ph type="sldImg" idx="2"/>
-          </p:nvPr>
-        </p:nvSpPr>
-        <p:spPr>
-          <a:xfrm>
-            <a:off x="381000" y="685800"/>
-            <a:ext cx="6096000" cy="3429000"/>
-          </a:xfrm>
-          <a:custGeom>
-            <a:avLst/>
-            <a:gdLst/>
-            <a:ahLst/>
-            <a:cxnLst/>
-            <a:rect l="l" t="t" r="r" b="b"/>
-            <a:pathLst>
-              <a:path w="120000" h="120000" extrusionOk="0">
-                <a:moveTo>
-                  <a:pt x="0" y="0"/>
-                </a:moveTo>
-                <a:lnTo>
-                  <a:pt x="120000" y="0"/>
-                </a:lnTo>
-                <a:lnTo>
-                  <a:pt x="120000" y="120000"/>
-                </a:lnTo>
-                <a:lnTo>
-                  <a:pt x="0" y="120000"/>
-                </a:lnTo>
-                <a:close/>
-              </a:path>
-            </a:pathLst>
-          </a:custGeom>
-        </p:spPr>
-      </p:sp>
-    </p:spTree>
-  </p:cSld>
-  <p:clrMapOvr>
-    <a:masterClrMapping/>
-  </p:clrMapOvr>
-</p:notes>
-</file>
-
-<file path=ppt/notesSlides/notesSlide12.xml><?xml version="1.0" encoding="utf-8"?>
-<p:notes xmlns:a="http://schemas.openxmlformats.org/drawingml/2006/main" xmlns:r="http://schemas.openxmlformats.org/officeDocument/2006/relationships" xmlns:p="http://schemas.openxmlformats.org/presentationml/2006/main">
-  <p:cSld>
-    <p:spTree>
-      <p:nvGrpSpPr>
-        <p:cNvPr id="1" name=""/>
-        <p:cNvGrpSpPr/>
-        <p:nvPr/>
-      </p:nvGrpSpPr>
-      <p:grpSpPr>
-        <a:xfrm>
-          <a:off x="0" y="0"/>
-          <a:ext cx="0" cy="0"/>
-          <a:chOff x="0" y="0"/>
-          <a:chExt cx="0" cy="0"/>
-        </a:xfrm>
-      </p:grpSpPr>
-      <p:sp>
-        <p:nvSpPr>
-          <p:cNvPr id="2" name="Slide Image Placeholder 1"/>
-          <p:cNvSpPr>
-            <a:spLocks noGrp="1" noRot="1" noChangeAspect="1"/>
-          </p:cNvSpPr>
-          <p:nvPr>
-            <p:ph type="sldImg"/>
-          </p:nvPr>
-        </p:nvSpPr>
-        <p:spPr>
-          <a:xfrm>
-            <a:off x="381000" y="685800"/>
-            <a:ext cx="6096000" cy="3429000"/>
-          </a:xfrm>
-        </p:spPr>
-      </p:sp>
-      <p:sp>
-        <p:nvSpPr>
-          <p:cNvPr id="3" name="Notes Placeholder 2"/>
-          <p:cNvSpPr>
-            <a:spLocks noGrp="1"/>
-          </p:cNvSpPr>
-          <p:nvPr>
-            <p:ph type="body" idx="1"/>
-          </p:nvPr>
-        </p:nvSpPr>
-        <p:spPr/>
-        <p:txBody>
-          <a:bodyPr/>
-          <a:lstStyle/>
-          <a:p>
-            <a:pPr marL="158750" indent="0">
-              <a:buNone/>
-            </a:pPr>
-            <a:r>
-              <a:rPr lang="en-US" dirty="0"/>
-              <a:t>binary_demo.py</a:t>
-            </a:r>
-          </a:p>
-          <a:p>
-            <a:pPr marL="158750" indent="0">
-              <a:buNone/>
-            </a:pPr>
-            <a:endParaRPr lang="en-US" dirty="0"/>
-          </a:p>
-        </p:txBody>
-      </p:sp>
-    </p:spTree>
-    <p:extLst>
-      <p:ext uri="{BB962C8B-B14F-4D97-AF65-F5344CB8AC3E}">
-        <p14:creationId xmlns:p14="http://schemas.microsoft.com/office/powerpoint/2010/main" val="1372288377"/>
-      </p:ext>
-    </p:extLst>
-  </p:cSld>
-  <p:clrMapOvr>
-    <a:masterClrMapping/>
-  </p:clrMapOvr>
-</p:notes>
-</file>
-
-<file path=ppt/notesSlides/notesSlide13.xml><?xml version="1.0" encoding="utf-8"?>
-<p:notes xmlns:a="http://schemas.openxmlformats.org/drawingml/2006/main" xmlns:r="http://schemas.openxmlformats.org/officeDocument/2006/relationships" xmlns:p="http://schemas.openxmlformats.org/presentationml/2006/main" showMasterSp="0" showMasterPhAnim="0">
-  <p:cSld>
-    <p:spTree>
-      <p:nvGrpSpPr>
-        <p:cNvPr id="1" name="Shape 307"/>
-        <p:cNvGrpSpPr/>
-        <p:nvPr/>
-      </p:nvGrpSpPr>
-      <p:grpSpPr>
-        <a:xfrm>
-          <a:off x="0" y="0"/>
-          <a:ext cx="0" cy="0"/>
-          <a:chOff x="0" y="0"/>
-          <a:chExt cx="0" cy="0"/>
-        </a:xfrm>
-      </p:grpSpPr>
-      <p:sp>
-        <p:nvSpPr>
-          <p:cNvPr id="308" name="Google Shape;308;g364a009736c_2_230:notes"/>
+          <p:cNvPr id="245" name="Google Shape;245;g364a009736c_2_177:notes">
+            <a:extLst>
+              <a:ext uri="{FF2B5EF4-FFF2-40B4-BE49-F238E27FC236}">
+                <a16:creationId xmlns:a16="http://schemas.microsoft.com/office/drawing/2014/main" id="{E624D76C-265A-699E-4ABA-59E8264174D0}"/>
+              </a:ext>
+            </a:extLst>
+          </p:cNvPr>
           <p:cNvSpPr>
             <a:spLocks noGrp="1" noRot="1" noChangeAspect="1"/>
           </p:cNvSpPr>
@@ -1210,7 +946,13 @@
       </p:sp>
       <p:sp>
         <p:nvSpPr>
-          <p:cNvPr id="309" name="Google Shape;309;g364a009736c_2_230:notes"/>
+          <p:cNvPr id="246" name="Google Shape;246;g364a009736c_2_177:notes">
+            <a:extLst>
+              <a:ext uri="{FF2B5EF4-FFF2-40B4-BE49-F238E27FC236}">
+                <a16:creationId xmlns:a16="http://schemas.microsoft.com/office/drawing/2014/main" id="{7FD124F8-F1DC-6CA1-8F51-38D352F63E26}"/>
+              </a:ext>
+            </a:extLst>
+          </p:cNvPr>
           <p:cNvSpPr txBox="1">
             <a:spLocks noGrp="1"/>
           </p:cNvSpPr>
@@ -1237,146 +979,6 @@
           </a:bodyPr>
           <a:lstStyle/>
           <a:p>
-            <a:pPr marL="457200" lvl="0" indent="-298450" algn="l" rtl="0">
-              <a:lnSpc>
-                <a:spcPct val="100000"/>
-              </a:lnSpc>
-              <a:spcBef>
-                <a:spcPts val="0"/>
-              </a:spcBef>
-              <a:spcAft>
-                <a:spcPts val="0"/>
-              </a:spcAft>
-              <a:buSzPts val="1100"/>
-              <a:buChar char="●"/>
-            </a:pPr>
-            <a:r>
-              <a:rPr lang="en"/>
-              <a:t>Age1 = “18”</a:t>
-            </a:r>
-            <a:endParaRPr/>
-          </a:p>
-          <a:p>
-            <a:pPr marL="457200" lvl="0" indent="-298450" algn="l" rtl="0">
-              <a:lnSpc>
-                <a:spcPct val="100000"/>
-              </a:lnSpc>
-              <a:spcBef>
-                <a:spcPts val="0"/>
-              </a:spcBef>
-              <a:spcAft>
-                <a:spcPts val="0"/>
-              </a:spcAft>
-              <a:buSzPts val="1100"/>
-              <a:buChar char="●"/>
-            </a:pPr>
-            <a:r>
-              <a:rPr lang="en"/>
-              <a:t>Age2 = “19”</a:t>
-            </a:r>
-            <a:endParaRPr/>
-          </a:p>
-          <a:p>
-            <a:pPr marL="457200" lvl="0" indent="-298450" algn="l" rtl="0">
-              <a:lnSpc>
-                <a:spcPct val="100000"/>
-              </a:lnSpc>
-              <a:spcBef>
-                <a:spcPts val="0"/>
-              </a:spcBef>
-              <a:spcAft>
-                <a:spcPts val="0"/>
-              </a:spcAft>
-              <a:buSzPts val="1100"/>
-              <a:buChar char="●"/>
-            </a:pPr>
-            <a:r>
-              <a:rPr lang="en"/>
-              <a:t>Sum_of_ages = age1 + age2</a:t>
-            </a:r>
-            <a:endParaRPr/>
-          </a:p>
-          <a:p>
-            <a:pPr marL="457200" lvl="0" indent="-298450" algn="l" rtl="0">
-              <a:lnSpc>
-                <a:spcPct val="100000"/>
-              </a:lnSpc>
-              <a:spcBef>
-                <a:spcPts val="0"/>
-              </a:spcBef>
-              <a:spcAft>
-                <a:spcPts val="0"/>
-              </a:spcAft>
-              <a:buSzPts val="1100"/>
-              <a:buChar char="●"/>
-            </a:pPr>
-            <a:r>
-              <a:rPr lang="en"/>
-              <a:t>Print(sum_of_ages) --🡪 1819</a:t>
-            </a:r>
-            <a:endParaRPr/>
-          </a:p>
-          <a:p>
-            <a:pPr marL="457200" lvl="0" indent="-298450" algn="l" rtl="0">
-              <a:lnSpc>
-                <a:spcPct val="100000"/>
-              </a:lnSpc>
-              <a:spcBef>
-                <a:spcPts val="0"/>
-              </a:spcBef>
-              <a:spcAft>
-                <a:spcPts val="0"/>
-              </a:spcAft>
-              <a:buSzPts val="1100"/>
-              <a:buChar char="●"/>
-            </a:pPr>
-            <a:r>
-              <a:rPr lang="en"/>
-              <a:t>Let’s say I want to use how old you will be in 4 years.  </a:t>
-            </a:r>
-            <a:endParaRPr/>
-          </a:p>
-          <a:p>
-            <a:pPr marL="457200" lvl="0" indent="-298450" algn="l" rtl="0">
-              <a:lnSpc>
-                <a:spcPct val="100000"/>
-              </a:lnSpc>
-              <a:spcBef>
-                <a:spcPts val="0"/>
-              </a:spcBef>
-              <a:spcAft>
-                <a:spcPts val="0"/>
-              </a:spcAft>
-              <a:buSzPts val="1100"/>
-              <a:buChar char="●"/>
-            </a:pPr>
-            <a:r>
-              <a:rPr lang="en"/>
-              <a:t>Num = int(age1) + int(age2)</a:t>
-            </a:r>
-            <a:endParaRPr/>
-          </a:p>
-          <a:p>
-            <a:pPr marL="457200" lvl="0" indent="-298450" algn="l" rtl="0">
-              <a:lnSpc>
-                <a:spcPct val="100000"/>
-              </a:lnSpc>
-              <a:spcBef>
-                <a:spcPts val="0"/>
-              </a:spcBef>
-              <a:spcAft>
-                <a:spcPts val="0"/>
-              </a:spcAft>
-              <a:buSzPts val="1100"/>
-              <a:buChar char="●"/>
-            </a:pPr>
-            <a:r>
-              <a:rPr lang="en"/>
-              <a:t>Print(num) --🡪 37</a:t>
-            </a:r>
-            <a:endParaRPr/>
-          </a:p>
-          <a:p>
             <a:pPr marL="457200" lvl="0" indent="-228600" algn="l" rtl="0">
               <a:lnSpc>
                 <a:spcPct val="100000"/>
@@ -1392,111 +994,14 @@
             </a:pPr>
             <a:endParaRPr/>
           </a:p>
-          <a:p>
-            <a:pPr marL="457200" lvl="0" indent="-298450" algn="l" rtl="0">
-              <a:lnSpc>
-                <a:spcPct val="100000"/>
-              </a:lnSpc>
-              <a:spcBef>
-                <a:spcPts val="0"/>
-              </a:spcBef>
-              <a:spcAft>
-                <a:spcPts val="0"/>
-              </a:spcAft>
-              <a:buSzPts val="1100"/>
-              <a:buChar char="●"/>
-            </a:pPr>
-            <a:r>
-              <a:rPr lang="en"/>
-              <a:t>Print(type(num1))</a:t>
-            </a:r>
-            <a:endParaRPr/>
-          </a:p>
-          <a:p>
-            <a:pPr marL="457200" lvl="0" indent="-298450" algn="l" rtl="0">
-              <a:lnSpc>
-                <a:spcPct val="100000"/>
-              </a:lnSpc>
-              <a:spcBef>
-                <a:spcPts val="0"/>
-              </a:spcBef>
-              <a:spcAft>
-                <a:spcPts val="0"/>
-              </a:spcAft>
-              <a:buSzPts val="1100"/>
-              <a:buChar char="●"/>
-            </a:pPr>
-            <a:r>
-              <a:rPr lang="en"/>
-              <a:t>Age1 = int(age1)  &lt;&lt;&lt; now age1 is an integer because we overwrote it.</a:t>
-            </a:r>
-            <a:endParaRPr/>
-          </a:p>
-        </p:txBody>
-      </p:sp>
-      <p:sp>
-        <p:nvSpPr>
-          <p:cNvPr id="310" name="Google Shape;310;g364a009736c_2_230:notes"/>
-          <p:cNvSpPr txBox="1">
-            <a:spLocks noGrp="1"/>
-          </p:cNvSpPr>
-          <p:nvPr>
-            <p:ph type="sldNum" idx="12"/>
-          </p:nvPr>
-        </p:nvSpPr>
-        <p:spPr>
-          <a:xfrm>
-            <a:off x="0" y="0"/>
-            <a:ext cx="3000000" cy="3000000"/>
-          </a:xfrm>
-          <a:prstGeom prst="rect">
-            <a:avLst/>
-          </a:prstGeom>
-          <a:noFill/>
-          <a:ln>
-            <a:noFill/>
-          </a:ln>
-        </p:spPr>
-        <p:txBody>
-          <a:bodyPr spcFirstLastPara="1" wrap="square" lIns="91425" tIns="45700" rIns="91425" bIns="45700" anchor="t" anchorCtr="0">
-            <a:noAutofit/>
-          </a:bodyPr>
-          <a:lstStyle/>
-          <a:p>
-            <a:pPr marL="0" marR="0" lvl="0" indent="0" algn="l" rtl="0">
-              <a:spcBef>
-                <a:spcPts val="0"/>
-              </a:spcBef>
-              <a:spcAft>
-                <a:spcPts val="0"/>
-              </a:spcAft>
-              <a:buNone/>
-            </a:pPr>
-            <a:fld id="{00000000-1234-1234-1234-123412341234}" type="slidenum">
-              <a:rPr lang="en" sz="1800">
-                <a:solidFill>
-                  <a:schemeClr val="dk1"/>
-                </a:solidFill>
-                <a:latin typeface="Arial"/>
-                <a:ea typeface="Arial"/>
-                <a:cs typeface="Arial"/>
-                <a:sym typeface="Arial"/>
-              </a:rPr>
-              <a:t>17</a:t>
-            </a:fld>
-            <a:endParaRPr sz="1800">
-              <a:solidFill>
-                <a:schemeClr val="dk1"/>
-              </a:solidFill>
-              <a:latin typeface="Arial"/>
-              <a:ea typeface="Arial"/>
-              <a:cs typeface="Arial"/>
-              <a:sym typeface="Arial"/>
-            </a:endParaRPr>
-          </a:p>
         </p:txBody>
       </p:sp>
     </p:spTree>
+    <p:extLst>
+      <p:ext uri="{BB962C8B-B14F-4D97-AF65-F5344CB8AC3E}">
+        <p14:creationId xmlns:p14="http://schemas.microsoft.com/office/powerpoint/2010/main" val="181595069"/>
+      </p:ext>
+    </p:extLst>
   </p:cSld>
   <p:clrMapOvr>
     <a:masterClrMapping/>
@@ -1504,12 +1009,18 @@
 </p:notes>
 </file>
 
-<file path=ppt/notesSlides/notesSlide14.xml><?xml version="1.0" encoding="utf-8"?>
+<file path=ppt/notesSlides/notesSlide11.xml><?xml version="1.0" encoding="utf-8"?>
 <p:notes xmlns:a="http://schemas.openxmlformats.org/drawingml/2006/main" xmlns:r="http://schemas.openxmlformats.org/officeDocument/2006/relationships" xmlns:p="http://schemas.openxmlformats.org/presentationml/2006/main" showMasterSp="0" showMasterPhAnim="0">
   <p:cSld>
     <p:spTree>
       <p:nvGrpSpPr>
-        <p:cNvPr id="1" name="Shape 351"/>
+        <p:cNvPr id="1" name="Shape 244">
+          <a:extLst>
+            <a:ext uri="{FF2B5EF4-FFF2-40B4-BE49-F238E27FC236}">
+              <a16:creationId xmlns:a16="http://schemas.microsoft.com/office/drawing/2014/main" id="{6D92B1AD-7EBD-AF94-FD01-F243CFBB4B29}"/>
+            </a:ext>
+          </a:extLst>
+        </p:cNvPr>
         <p:cNvGrpSpPr/>
         <p:nvPr/>
       </p:nvGrpSpPr>
@@ -1523,111 +1034,13 @@
       </p:grpSpPr>
       <p:sp>
         <p:nvSpPr>
-          <p:cNvPr id="352" name="Google Shape;352;g364a009736c_2_267:notes"/>
-          <p:cNvSpPr txBox="1">
-            <a:spLocks noGrp="1"/>
-          </p:cNvSpPr>
-          <p:nvPr>
-            <p:ph type="body" idx="1"/>
-          </p:nvPr>
-        </p:nvSpPr>
-        <p:spPr>
-          <a:xfrm>
-            <a:off x="685800" y="4343400"/>
-            <a:ext cx="5486400" cy="4114800"/>
-          </a:xfrm>
-          <a:prstGeom prst="rect">
-            <a:avLst/>
-          </a:prstGeom>
-        </p:spPr>
-        <p:txBody>
-          <a:bodyPr spcFirstLastPara="1" wrap="square" lIns="91425" tIns="91425" rIns="91425" bIns="91425" anchor="t" anchorCtr="0">
-            <a:noAutofit/>
-          </a:bodyPr>
-          <a:lstStyle/>
-          <a:p>
-            <a:pPr marL="0" lvl="0" indent="0" algn="l" rtl="0">
-              <a:spcBef>
-                <a:spcPts val="0"/>
-              </a:spcBef>
-              <a:spcAft>
-                <a:spcPts val="0"/>
-              </a:spcAft>
-              <a:buNone/>
-            </a:pPr>
-            <a:endParaRPr/>
-          </a:p>
-        </p:txBody>
-      </p:sp>
-      <p:sp>
-        <p:nvSpPr>
-          <p:cNvPr id="353" name="Google Shape;353;g364a009736c_2_267:notes"/>
-          <p:cNvSpPr>
-            <a:spLocks noGrp="1" noRot="1" noChangeAspect="1"/>
-          </p:cNvSpPr>
-          <p:nvPr>
-            <p:ph type="sldImg" idx="2"/>
-          </p:nvPr>
-        </p:nvSpPr>
-        <p:spPr>
-          <a:xfrm>
-            <a:off x="381000" y="685800"/>
-            <a:ext cx="6096000" cy="3429000"/>
-          </a:xfrm>
-          <a:custGeom>
-            <a:avLst/>
-            <a:gdLst/>
-            <a:ahLst/>
-            <a:cxnLst/>
-            <a:rect l="l" t="t" r="r" b="b"/>
-            <a:pathLst>
-              <a:path w="120000" h="120000" extrusionOk="0">
-                <a:moveTo>
-                  <a:pt x="0" y="0"/>
-                </a:moveTo>
-                <a:lnTo>
-                  <a:pt x="120000" y="0"/>
-                </a:lnTo>
-                <a:lnTo>
-                  <a:pt x="120000" y="120000"/>
-                </a:lnTo>
-                <a:lnTo>
-                  <a:pt x="0" y="120000"/>
-                </a:lnTo>
-                <a:close/>
-              </a:path>
-            </a:pathLst>
-          </a:custGeom>
-        </p:spPr>
-      </p:sp>
-    </p:spTree>
-  </p:cSld>
-  <p:clrMapOvr>
-    <a:masterClrMapping/>
-  </p:clrMapOvr>
-</p:notes>
-</file>
-
-<file path=ppt/notesSlides/notesSlide15.xml><?xml version="1.0" encoding="utf-8"?>
-<p:notes xmlns:a="http://schemas.openxmlformats.org/drawingml/2006/main" xmlns:r="http://schemas.openxmlformats.org/officeDocument/2006/relationships" xmlns:p="http://schemas.openxmlformats.org/presentationml/2006/main" showMasterSp="0" showMasterPhAnim="0">
-  <p:cSld>
-    <p:spTree>
-      <p:nvGrpSpPr>
-        <p:cNvPr id="1" name="Shape 366"/>
-        <p:cNvGrpSpPr/>
-        <p:nvPr/>
-      </p:nvGrpSpPr>
-      <p:grpSpPr>
-        <a:xfrm>
-          <a:off x="0" y="0"/>
-          <a:ext cx="0" cy="0"/>
-          <a:chOff x="0" y="0"/>
-          <a:chExt cx="0" cy="0"/>
-        </a:xfrm>
-      </p:grpSpPr>
-      <p:sp>
-        <p:nvSpPr>
-          <p:cNvPr id="367" name="Google Shape;367;g364a009736c_2_281:notes"/>
+          <p:cNvPr id="245" name="Google Shape;245;g364a009736c_2_177:notes">
+            <a:extLst>
+              <a:ext uri="{FF2B5EF4-FFF2-40B4-BE49-F238E27FC236}">
+                <a16:creationId xmlns:a16="http://schemas.microsoft.com/office/drawing/2014/main" id="{D923C959-1751-241C-F26A-EEBDB4D2AD30}"/>
+              </a:ext>
+            </a:extLst>
+          </p:cNvPr>
           <p:cNvSpPr>
             <a:spLocks noGrp="1" noRot="1" noChangeAspect="1"/>
           </p:cNvSpPr>
@@ -1678,7 +1091,13 @@
       </p:sp>
       <p:sp>
         <p:nvSpPr>
-          <p:cNvPr id="368" name="Google Shape;368;g364a009736c_2_281:notes"/>
+          <p:cNvPr id="246" name="Google Shape;246;g364a009736c_2_177:notes">
+            <a:extLst>
+              <a:ext uri="{FF2B5EF4-FFF2-40B4-BE49-F238E27FC236}">
+                <a16:creationId xmlns:a16="http://schemas.microsoft.com/office/drawing/2014/main" id="{C58F478C-9E38-5705-19CE-532B7C73AC81}"/>
+              </a:ext>
+            </a:extLst>
+          </p:cNvPr>
           <p:cNvSpPr txBox="1">
             <a:spLocks noGrp="1"/>
           </p:cNvSpPr>
@@ -1705,66 +1124,6 @@
           </a:bodyPr>
           <a:lstStyle/>
           <a:p>
-            <a:pPr marL="457200" lvl="0" indent="-298450" algn="l" rtl="0">
-              <a:lnSpc>
-                <a:spcPct val="100000"/>
-              </a:lnSpc>
-              <a:spcBef>
-                <a:spcPts val="0"/>
-              </a:spcBef>
-              <a:spcAft>
-                <a:spcPts val="0"/>
-              </a:spcAft>
-              <a:buSzPts val="1100"/>
-              <a:buChar char="●"/>
-            </a:pPr>
-            <a:r>
-              <a:rPr lang="en"/>
-              <a:t>PEMDAS</a:t>
-            </a:r>
-            <a:endParaRPr/>
-          </a:p>
-          <a:p>
-            <a:pPr marL="457200" lvl="0" indent="-298450" algn="l" rtl="0">
-              <a:lnSpc>
-                <a:spcPct val="100000"/>
-              </a:lnSpc>
-              <a:spcBef>
-                <a:spcPts val="0"/>
-              </a:spcBef>
-              <a:spcAft>
-                <a:spcPts val="0"/>
-              </a:spcAft>
-              <a:buSzPts val="1100"/>
-              <a:buChar char="●"/>
-            </a:pPr>
-            <a:r>
-              <a:rPr lang="en"/>
-              <a:t>Please Excuse My Dear Aunt Sally</a:t>
-            </a:r>
-            <a:endParaRPr/>
-          </a:p>
-          <a:p>
-            <a:pPr marL="457200" lvl="0" indent="-298450" algn="l" rtl="0">
-              <a:lnSpc>
-                <a:spcPct val="100000"/>
-              </a:lnSpc>
-              <a:spcBef>
-                <a:spcPts val="0"/>
-              </a:spcBef>
-              <a:spcAft>
-                <a:spcPts val="0"/>
-              </a:spcAft>
-              <a:buSzPts val="1100"/>
-              <a:buChar char="●"/>
-            </a:pPr>
-            <a:r>
-              <a:rPr lang="en"/>
-              <a:t>Parentheses, Exponent, Multiply/Divide, Add/Subtract</a:t>
-            </a:r>
-            <a:endParaRPr/>
-          </a:p>
-          <a:p>
             <a:pPr marL="457200" lvl="0" indent="-228600" algn="l" rtl="0">
               <a:lnSpc>
                 <a:spcPct val="100000"/>
@@ -1782,69 +1141,12 @@
           </a:p>
         </p:txBody>
       </p:sp>
-      <p:sp>
-        <p:nvSpPr>
-          <p:cNvPr id="369" name="Google Shape;369;g364a009736c_2_281:notes"/>
-          <p:cNvSpPr txBox="1">
-            <a:spLocks noGrp="1"/>
-          </p:cNvSpPr>
-          <p:nvPr>
-            <p:ph type="sldNum" idx="12"/>
-          </p:nvPr>
-        </p:nvSpPr>
-        <p:spPr>
-          <a:xfrm>
-            <a:off x="0" y="0"/>
-            <a:ext cx="3000000" cy="3000000"/>
-          </a:xfrm>
-          <a:prstGeom prst="rect">
-            <a:avLst/>
-          </a:prstGeom>
-          <a:noFill/>
-          <a:ln>
-            <a:noFill/>
-          </a:ln>
-        </p:spPr>
-        <p:txBody>
-          <a:bodyPr spcFirstLastPara="1" wrap="square" lIns="91425" tIns="45700" rIns="91425" bIns="45700" anchor="t" anchorCtr="0">
-            <a:noAutofit/>
-          </a:bodyPr>
-          <a:lstStyle/>
-          <a:p>
-            <a:pPr marL="0" marR="0" lvl="0" indent="0" algn="l" rtl="0">
-              <a:spcBef>
-                <a:spcPts val="0"/>
-              </a:spcBef>
-              <a:spcAft>
-                <a:spcPts val="0"/>
-              </a:spcAft>
-              <a:buNone/>
-            </a:pPr>
-            <a:fld id="{00000000-1234-1234-1234-123412341234}" type="slidenum">
-              <a:rPr lang="en" sz="1800">
-                <a:solidFill>
-                  <a:schemeClr val="dk1"/>
-                </a:solidFill>
-                <a:latin typeface="Arial"/>
-                <a:ea typeface="Arial"/>
-                <a:cs typeface="Arial"/>
-                <a:sym typeface="Arial"/>
-              </a:rPr>
-              <a:t>19</a:t>
-            </a:fld>
-            <a:endParaRPr sz="1800">
-              <a:solidFill>
-                <a:schemeClr val="dk1"/>
-              </a:solidFill>
-              <a:latin typeface="Arial"/>
-              <a:ea typeface="Arial"/>
-              <a:cs typeface="Arial"/>
-              <a:sym typeface="Arial"/>
-            </a:endParaRPr>
-          </a:p>
-        </p:txBody>
-      </p:sp>
     </p:spTree>
+    <p:extLst>
+      <p:ext uri="{BB962C8B-B14F-4D97-AF65-F5344CB8AC3E}">
+        <p14:creationId xmlns:p14="http://schemas.microsoft.com/office/powerpoint/2010/main" val="3016479774"/>
+      </p:ext>
+    </p:extLst>
   </p:cSld>
   <p:clrMapOvr>
     <a:masterClrMapping/>
@@ -1852,12 +1154,18 @@
 </p:notes>
 </file>
 
-<file path=ppt/notesSlides/notesSlide16.xml><?xml version="1.0" encoding="utf-8"?>
+<file path=ppt/notesSlides/notesSlide12.xml><?xml version="1.0" encoding="utf-8"?>
 <p:notes xmlns:a="http://schemas.openxmlformats.org/drawingml/2006/main" xmlns:r="http://schemas.openxmlformats.org/officeDocument/2006/relationships" xmlns:p="http://schemas.openxmlformats.org/presentationml/2006/main" showMasterSp="0" showMasterPhAnim="0">
   <p:cSld>
     <p:spTree>
       <p:nvGrpSpPr>
-        <p:cNvPr id="1" name="Shape 314"/>
+        <p:cNvPr id="1" name="Shape 244">
+          <a:extLst>
+            <a:ext uri="{FF2B5EF4-FFF2-40B4-BE49-F238E27FC236}">
+              <a16:creationId xmlns:a16="http://schemas.microsoft.com/office/drawing/2014/main" id="{3779FBA9-C2C0-FDE2-2607-507A1F14C653}"/>
+            </a:ext>
+          </a:extLst>
+        </p:cNvPr>
         <p:cNvGrpSpPr/>
         <p:nvPr/>
       </p:nvGrpSpPr>
@@ -1871,7 +1179,13 @@
       </p:grpSpPr>
       <p:sp>
         <p:nvSpPr>
-          <p:cNvPr id="315" name="Google Shape;315;g364a009736c_2_236:notes"/>
+          <p:cNvPr id="245" name="Google Shape;245;g364a009736c_2_177:notes">
+            <a:extLst>
+              <a:ext uri="{FF2B5EF4-FFF2-40B4-BE49-F238E27FC236}">
+                <a16:creationId xmlns:a16="http://schemas.microsoft.com/office/drawing/2014/main" id="{F28A3232-8720-D270-4C79-4A806EB242D1}"/>
+              </a:ext>
+            </a:extLst>
+          </p:cNvPr>
           <p:cNvSpPr>
             <a:spLocks noGrp="1" noRot="1" noChangeAspect="1"/>
           </p:cNvSpPr>
@@ -1922,7 +1236,13 @@
       </p:sp>
       <p:sp>
         <p:nvSpPr>
-          <p:cNvPr id="316" name="Google Shape;316;g364a009736c_2_236:notes"/>
+          <p:cNvPr id="246" name="Google Shape;246;g364a009736c_2_177:notes">
+            <a:extLst>
+              <a:ext uri="{FF2B5EF4-FFF2-40B4-BE49-F238E27FC236}">
+                <a16:creationId xmlns:a16="http://schemas.microsoft.com/office/drawing/2014/main" id="{33F639CC-982A-19E5-FF77-11852B19F86A}"/>
+              </a:ext>
+            </a:extLst>
+          </p:cNvPr>
           <p:cNvSpPr txBox="1">
             <a:spLocks noGrp="1"/>
           </p:cNvSpPr>
@@ -1962,73 +1282,16 @@
               <a:buSzPts val="1100"/>
               <a:buNone/>
             </a:pPr>
-            <a:endParaRPr dirty="0"/>
-          </a:p>
-        </p:txBody>
-      </p:sp>
-      <p:sp>
-        <p:nvSpPr>
-          <p:cNvPr id="317" name="Google Shape;317;g364a009736c_2_236:notes"/>
-          <p:cNvSpPr txBox="1">
-            <a:spLocks noGrp="1"/>
-          </p:cNvSpPr>
-          <p:nvPr>
-            <p:ph type="sldNum" idx="12"/>
-          </p:nvPr>
-        </p:nvSpPr>
-        <p:spPr>
-          <a:xfrm>
-            <a:off x="0" y="0"/>
-            <a:ext cx="3000000" cy="3000000"/>
-          </a:xfrm>
-          <a:prstGeom prst="rect">
-            <a:avLst/>
-          </a:prstGeom>
-          <a:noFill/>
-          <a:ln>
-            <a:noFill/>
-          </a:ln>
-        </p:spPr>
-        <p:txBody>
-          <a:bodyPr spcFirstLastPara="1" wrap="square" lIns="91425" tIns="45700" rIns="91425" bIns="45700" anchor="t" anchorCtr="0">
-            <a:noAutofit/>
-          </a:bodyPr>
-          <a:lstStyle/>
-          <a:p>
-            <a:pPr marL="0" marR="0" lvl="0" indent="0" algn="l" rtl="0">
-              <a:spcBef>
-                <a:spcPts val="0"/>
-              </a:spcBef>
-              <a:spcAft>
-                <a:spcPts val="0"/>
-              </a:spcAft>
-              <a:buNone/>
-            </a:pPr>
-            <a:fld id="{00000000-1234-1234-1234-123412341234}" type="slidenum">
-              <a:rPr lang="en" sz="1800">
-                <a:solidFill>
-                  <a:schemeClr val="dk1"/>
-                </a:solidFill>
-                <a:latin typeface="Arial"/>
-                <a:ea typeface="Arial"/>
-                <a:cs typeface="Arial"/>
-                <a:sym typeface="Arial"/>
-              </a:rPr>
-              <a:t>20</a:t>
-            </a:fld>
-            <a:endParaRPr sz="1800">
-              <a:solidFill>
-                <a:schemeClr val="dk1"/>
-              </a:solidFill>
-              <a:latin typeface="Arial"/>
-              <a:ea typeface="Arial"/>
-              <a:cs typeface="Arial"/>
-              <a:sym typeface="Arial"/>
-            </a:endParaRPr>
+            <a:endParaRPr/>
           </a:p>
         </p:txBody>
       </p:sp>
     </p:spTree>
+    <p:extLst>
+      <p:ext uri="{BB962C8B-B14F-4D97-AF65-F5344CB8AC3E}">
+        <p14:creationId xmlns:p14="http://schemas.microsoft.com/office/powerpoint/2010/main" val="756448880"/>
+      </p:ext>
+    </p:extLst>
   </p:cSld>
   <p:clrMapOvr>
     <a:masterClrMapping/>
@@ -2036,119 +1299,15 @@
 </p:notes>
 </file>
 
-<file path=ppt/notesSlides/notesSlide17.xml><?xml version="1.0" encoding="utf-8"?>
+<file path=ppt/notesSlides/notesSlide13.xml><?xml version="1.0" encoding="utf-8"?>
 <p:notes xmlns:a="http://schemas.openxmlformats.org/drawingml/2006/main" xmlns:r="http://schemas.openxmlformats.org/officeDocument/2006/relationships" xmlns:p="http://schemas.openxmlformats.org/presentationml/2006/main" showMasterSp="0" showMasterPhAnim="0">
   <p:cSld>
     <p:spTree>
       <p:nvGrpSpPr>
-        <p:cNvPr id="1" name="Shape 327"/>
-        <p:cNvGrpSpPr/>
-        <p:nvPr/>
-      </p:nvGrpSpPr>
-      <p:grpSpPr>
-        <a:xfrm>
-          <a:off x="0" y="0"/>
-          <a:ext cx="0" cy="0"/>
-          <a:chOff x="0" y="0"/>
-          <a:chExt cx="0" cy="0"/>
-        </a:xfrm>
-      </p:grpSpPr>
-      <p:sp>
-        <p:nvSpPr>
-          <p:cNvPr id="328" name="Google Shape;328;g364a009736c_2_247:notes"/>
-          <p:cNvSpPr txBox="1">
-            <a:spLocks noGrp="1"/>
-          </p:cNvSpPr>
-          <p:nvPr>
-            <p:ph type="body" idx="1"/>
-          </p:nvPr>
-        </p:nvSpPr>
-        <p:spPr>
-          <a:xfrm>
-            <a:off x="685800" y="4343400"/>
-            <a:ext cx="5486400" cy="4114800"/>
-          </a:xfrm>
-          <a:prstGeom prst="rect">
-            <a:avLst/>
-          </a:prstGeom>
-        </p:spPr>
-        <p:txBody>
-          <a:bodyPr spcFirstLastPara="1" wrap="square" lIns="91425" tIns="91425" rIns="91425" bIns="91425" anchor="t" anchorCtr="0">
-            <a:noAutofit/>
-          </a:bodyPr>
-          <a:lstStyle/>
-          <a:p>
-            <a:pPr marL="0" lvl="0" indent="0" algn="l" rtl="0">
-              <a:spcBef>
-                <a:spcPts val="0"/>
-              </a:spcBef>
-              <a:spcAft>
-                <a:spcPts val="0"/>
-              </a:spcAft>
-              <a:buNone/>
-            </a:pPr>
-            <a:endParaRPr/>
-          </a:p>
-        </p:txBody>
-      </p:sp>
-      <p:sp>
-        <p:nvSpPr>
-          <p:cNvPr id="329" name="Google Shape;329;g364a009736c_2_247:notes"/>
-          <p:cNvSpPr>
-            <a:spLocks noGrp="1" noRot="1" noChangeAspect="1"/>
-          </p:cNvSpPr>
-          <p:nvPr>
-            <p:ph type="sldImg" idx="2"/>
-          </p:nvPr>
-        </p:nvSpPr>
-        <p:spPr>
-          <a:xfrm>
-            <a:off x="381000" y="685800"/>
-            <a:ext cx="6096000" cy="3429000"/>
-          </a:xfrm>
-          <a:custGeom>
-            <a:avLst/>
-            <a:gdLst/>
-            <a:ahLst/>
-            <a:cxnLst/>
-            <a:rect l="l" t="t" r="r" b="b"/>
-            <a:pathLst>
-              <a:path w="120000" h="120000" extrusionOk="0">
-                <a:moveTo>
-                  <a:pt x="0" y="0"/>
-                </a:moveTo>
-                <a:lnTo>
-                  <a:pt x="120000" y="0"/>
-                </a:lnTo>
-                <a:lnTo>
-                  <a:pt x="120000" y="120000"/>
-                </a:lnTo>
-                <a:lnTo>
-                  <a:pt x="0" y="120000"/>
-                </a:lnTo>
-                <a:close/>
-              </a:path>
-            </a:pathLst>
-          </a:custGeom>
-        </p:spPr>
-      </p:sp>
-    </p:spTree>
-  </p:cSld>
-  <p:clrMapOvr>
-    <a:masterClrMapping/>
-  </p:clrMapOvr>
-</p:notes>
-</file>
-
-<file path=ppt/notesSlides/notesSlide18.xml><?xml version="1.0" encoding="utf-8"?>
-<p:notes xmlns:a="http://schemas.openxmlformats.org/drawingml/2006/main" xmlns:r="http://schemas.openxmlformats.org/officeDocument/2006/relationships" xmlns:p="http://schemas.openxmlformats.org/presentationml/2006/main" showMasterSp="0" showMasterPhAnim="0">
-  <p:cSld>
-    <p:spTree>
-      <p:nvGrpSpPr>
-        <p:cNvPr id="1" name="Shape 314">
+        <p:cNvPr id="1" name="Shape 244">
           <a:extLst>
             <a:ext uri="{FF2B5EF4-FFF2-40B4-BE49-F238E27FC236}">
-              <a16:creationId xmlns:a16="http://schemas.microsoft.com/office/drawing/2014/main" id="{3AD028B9-EF2E-39CC-8555-E5F64A55D450}"/>
+              <a16:creationId xmlns:a16="http://schemas.microsoft.com/office/drawing/2014/main" id="{D3F6B0E8-BC63-2F74-3659-05F57ABB4097}"/>
             </a:ext>
           </a:extLst>
         </p:cNvPr>
@@ -2165,10 +1324,10 @@
       </p:grpSpPr>
       <p:sp>
         <p:nvSpPr>
-          <p:cNvPr id="315" name="Google Shape;315;g364a009736c_2_236:notes">
+          <p:cNvPr id="245" name="Google Shape;245;g364a009736c_2_177:notes">
             <a:extLst>
               <a:ext uri="{FF2B5EF4-FFF2-40B4-BE49-F238E27FC236}">
-                <a16:creationId xmlns:a16="http://schemas.microsoft.com/office/drawing/2014/main" id="{FBFC26D6-1573-BE95-405B-F3C7BB10ED97}"/>
+                <a16:creationId xmlns:a16="http://schemas.microsoft.com/office/drawing/2014/main" id="{E821C97D-38B9-2361-C29A-7A7538768B65}"/>
               </a:ext>
             </a:extLst>
           </p:cNvPr>
@@ -2222,10 +1381,10 @@
       </p:sp>
       <p:sp>
         <p:nvSpPr>
-          <p:cNvPr id="316" name="Google Shape;316;g364a009736c_2_236:notes">
+          <p:cNvPr id="246" name="Google Shape;246;g364a009736c_2_177:notes">
             <a:extLst>
               <a:ext uri="{FF2B5EF4-FFF2-40B4-BE49-F238E27FC236}">
-                <a16:creationId xmlns:a16="http://schemas.microsoft.com/office/drawing/2014/main" id="{E548D4FE-6C3E-078F-0EAE-CD7ACC04C0BA}"/>
+                <a16:creationId xmlns:a16="http://schemas.microsoft.com/office/drawing/2014/main" id="{7CCB4817-B745-D82E-9704-7AAA0E07EF73}"/>
               </a:ext>
             </a:extLst>
           </p:cNvPr>
@@ -2268,82 +1427,14 @@
               <a:buSzPts val="1100"/>
               <a:buNone/>
             </a:pPr>
-            <a:endParaRPr dirty="0"/>
-          </a:p>
-        </p:txBody>
-      </p:sp>
-      <p:sp>
-        <p:nvSpPr>
-          <p:cNvPr id="317" name="Google Shape;317;g364a009736c_2_236:notes">
-            <a:extLst>
-              <a:ext uri="{FF2B5EF4-FFF2-40B4-BE49-F238E27FC236}">
-                <a16:creationId xmlns:a16="http://schemas.microsoft.com/office/drawing/2014/main" id="{6EF7C67B-0491-C73F-72D3-D4A8999C7EC1}"/>
-              </a:ext>
-            </a:extLst>
-          </p:cNvPr>
-          <p:cNvSpPr txBox="1">
-            <a:spLocks noGrp="1"/>
-          </p:cNvSpPr>
-          <p:nvPr>
-            <p:ph type="sldNum" idx="12"/>
-          </p:nvPr>
-        </p:nvSpPr>
-        <p:spPr>
-          <a:xfrm>
-            <a:off x="0" y="0"/>
-            <a:ext cx="3000000" cy="3000000"/>
-          </a:xfrm>
-          <a:prstGeom prst="rect">
-            <a:avLst/>
-          </a:prstGeom>
-          <a:noFill/>
-          <a:ln>
-            <a:noFill/>
-          </a:ln>
-        </p:spPr>
-        <p:txBody>
-          <a:bodyPr spcFirstLastPara="1" wrap="square" lIns="91425" tIns="45700" rIns="91425" bIns="45700" anchor="t" anchorCtr="0">
-            <a:noAutofit/>
-          </a:bodyPr>
-          <a:lstStyle/>
-          <a:p>
-            <a:pPr marL="0" marR="0" lvl="0" indent="0" algn="l" rtl="0">
-              <a:spcBef>
-                <a:spcPts val="0"/>
-              </a:spcBef>
-              <a:spcAft>
-                <a:spcPts val="0"/>
-              </a:spcAft>
-              <a:buNone/>
-            </a:pPr>
-            <a:fld id="{00000000-1234-1234-1234-123412341234}" type="slidenum">
-              <a:rPr lang="en" sz="1800">
-                <a:solidFill>
-                  <a:schemeClr val="dk1"/>
-                </a:solidFill>
-                <a:latin typeface="Arial"/>
-                <a:ea typeface="Arial"/>
-                <a:cs typeface="Arial"/>
-                <a:sym typeface="Arial"/>
-              </a:rPr>
-              <a:t>25</a:t>
-            </a:fld>
-            <a:endParaRPr sz="1800">
-              <a:solidFill>
-                <a:schemeClr val="dk1"/>
-              </a:solidFill>
-              <a:latin typeface="Arial"/>
-              <a:ea typeface="Arial"/>
-              <a:cs typeface="Arial"/>
-              <a:sym typeface="Arial"/>
-            </a:endParaRPr>
+            <a:endParaRPr/>
           </a:p>
         </p:txBody>
       </p:sp>
     </p:spTree>
     <p:extLst>
       <p:ext uri="{BB962C8B-B14F-4D97-AF65-F5344CB8AC3E}">
-        <p14:creationId xmlns:p14="http://schemas.microsoft.com/office/powerpoint/2010/main" val="2968394695"/>
+        <p14:creationId xmlns:p14="http://schemas.microsoft.com/office/powerpoint/2010/main" val="24263813"/>
       </p:ext>
     </p:extLst>
   </p:cSld>
@@ -2353,12 +1444,18 @@
 </p:notes>
 </file>
 
-<file path=ppt/notesSlides/notesSlide19.xml><?xml version="1.0" encoding="utf-8"?>
+<file path=ppt/notesSlides/notesSlide14.xml><?xml version="1.0" encoding="utf-8"?>
 <p:notes xmlns:a="http://schemas.openxmlformats.org/drawingml/2006/main" xmlns:r="http://schemas.openxmlformats.org/officeDocument/2006/relationships" xmlns:p="http://schemas.openxmlformats.org/presentationml/2006/main" showMasterSp="0" showMasterPhAnim="0">
   <p:cSld>
     <p:spTree>
       <p:nvGrpSpPr>
-        <p:cNvPr id="1" name="Shape 373"/>
+        <p:cNvPr id="1" name="Shape 244">
+          <a:extLst>
+            <a:ext uri="{FF2B5EF4-FFF2-40B4-BE49-F238E27FC236}">
+              <a16:creationId xmlns:a16="http://schemas.microsoft.com/office/drawing/2014/main" id="{F8028C3B-253C-B182-F567-7DD57F8E884A}"/>
+            </a:ext>
+          </a:extLst>
+        </p:cNvPr>
         <p:cNvGrpSpPr/>
         <p:nvPr/>
       </p:nvGrpSpPr>
@@ -2372,7 +1469,13 @@
       </p:grpSpPr>
       <p:sp>
         <p:nvSpPr>
-          <p:cNvPr id="374" name="Google Shape;374;g364a009736c_2_287:notes"/>
+          <p:cNvPr id="245" name="Google Shape;245;g364a009736c_2_177:notes">
+            <a:extLst>
+              <a:ext uri="{FF2B5EF4-FFF2-40B4-BE49-F238E27FC236}">
+                <a16:creationId xmlns:a16="http://schemas.microsoft.com/office/drawing/2014/main" id="{A42A95B1-C817-03C1-E236-6919306AF8D4}"/>
+              </a:ext>
+            </a:extLst>
+          </p:cNvPr>
           <p:cNvSpPr>
             <a:spLocks noGrp="1" noRot="1" noChangeAspect="1"/>
           </p:cNvSpPr>
@@ -2423,7 +1526,13 @@
       </p:sp>
       <p:sp>
         <p:nvSpPr>
-          <p:cNvPr id="375" name="Google Shape;375;g364a009736c_2_287:notes"/>
+          <p:cNvPr id="246" name="Google Shape;246;g364a009736c_2_177:notes">
+            <a:extLst>
+              <a:ext uri="{FF2B5EF4-FFF2-40B4-BE49-F238E27FC236}">
+                <a16:creationId xmlns:a16="http://schemas.microsoft.com/office/drawing/2014/main" id="{ED415392-6612-E393-5C14-46785F7ADF88}"/>
+              </a:ext>
+            </a:extLst>
+          </p:cNvPr>
           <p:cNvSpPr txBox="1">
             <a:spLocks noGrp="1"/>
           </p:cNvSpPr>
@@ -2467,69 +1576,12 @@
           </a:p>
         </p:txBody>
       </p:sp>
-      <p:sp>
-        <p:nvSpPr>
-          <p:cNvPr id="376" name="Google Shape;376;g364a009736c_2_287:notes"/>
-          <p:cNvSpPr txBox="1">
-            <a:spLocks noGrp="1"/>
-          </p:cNvSpPr>
-          <p:nvPr>
-            <p:ph type="sldNum" idx="12"/>
-          </p:nvPr>
-        </p:nvSpPr>
-        <p:spPr>
-          <a:xfrm>
-            <a:off x="0" y="0"/>
-            <a:ext cx="3000000" cy="3000000"/>
-          </a:xfrm>
-          <a:prstGeom prst="rect">
-            <a:avLst/>
-          </a:prstGeom>
-          <a:noFill/>
-          <a:ln>
-            <a:noFill/>
-          </a:ln>
-        </p:spPr>
-        <p:txBody>
-          <a:bodyPr spcFirstLastPara="1" wrap="square" lIns="91425" tIns="45700" rIns="91425" bIns="45700" anchor="t" anchorCtr="0">
-            <a:noAutofit/>
-          </a:bodyPr>
-          <a:lstStyle/>
-          <a:p>
-            <a:pPr marL="0" marR="0" lvl="0" indent="0" algn="l" rtl="0">
-              <a:spcBef>
-                <a:spcPts val="0"/>
-              </a:spcBef>
-              <a:spcAft>
-                <a:spcPts val="0"/>
-              </a:spcAft>
-              <a:buNone/>
-            </a:pPr>
-            <a:fld id="{00000000-1234-1234-1234-123412341234}" type="slidenum">
-              <a:rPr lang="en" sz="1800">
-                <a:solidFill>
-                  <a:schemeClr val="dk1"/>
-                </a:solidFill>
-                <a:latin typeface="Arial"/>
-                <a:ea typeface="Arial"/>
-                <a:cs typeface="Arial"/>
-                <a:sym typeface="Arial"/>
-              </a:rPr>
-              <a:t>26</a:t>
-            </a:fld>
-            <a:endParaRPr sz="1800">
-              <a:solidFill>
-                <a:schemeClr val="dk1"/>
-              </a:solidFill>
-              <a:latin typeface="Arial"/>
-              <a:ea typeface="Arial"/>
-              <a:cs typeface="Arial"/>
-              <a:sym typeface="Arial"/>
-            </a:endParaRPr>
-          </a:p>
-        </p:txBody>
-      </p:sp>
     </p:spTree>
+    <p:extLst>
+      <p:ext uri="{BB962C8B-B14F-4D97-AF65-F5344CB8AC3E}">
+        <p14:creationId xmlns:p14="http://schemas.microsoft.com/office/powerpoint/2010/main" val="2379848439"/>
+      </p:ext>
+    </p:extLst>
   </p:cSld>
   <p:clrMapOvr>
     <a:masterClrMapping/>
@@ -2537,12 +1589,18 @@
 </p:notes>
 </file>
 
-<file path=ppt/notesSlides/notesSlide2.xml><?xml version="1.0" encoding="utf-8"?>
+<file path=ppt/notesSlides/notesSlide15.xml><?xml version="1.0" encoding="utf-8"?>
 <p:notes xmlns:a="http://schemas.openxmlformats.org/drawingml/2006/main" xmlns:r="http://schemas.openxmlformats.org/officeDocument/2006/relationships" xmlns:p="http://schemas.openxmlformats.org/presentationml/2006/main" showMasterSp="0" showMasterPhAnim="0">
   <p:cSld>
     <p:spTree>
       <p:nvGrpSpPr>
-        <p:cNvPr id="1" name="Shape 206"/>
+        <p:cNvPr id="1" name="Shape 244">
+          <a:extLst>
+            <a:ext uri="{FF2B5EF4-FFF2-40B4-BE49-F238E27FC236}">
+              <a16:creationId xmlns:a16="http://schemas.microsoft.com/office/drawing/2014/main" id="{24BFAA10-D4F3-876C-85B5-07519BC7025A}"/>
+            </a:ext>
+          </a:extLst>
+        </p:cNvPr>
         <p:cNvGrpSpPr/>
         <p:nvPr/>
       </p:nvGrpSpPr>
@@ -2556,7 +1614,13 @@
       </p:grpSpPr>
       <p:sp>
         <p:nvSpPr>
-          <p:cNvPr id="207" name="Google Shape;207;g364a009736c_2_144:notes"/>
+          <p:cNvPr id="245" name="Google Shape;245;g364a009736c_2_177:notes">
+            <a:extLst>
+              <a:ext uri="{FF2B5EF4-FFF2-40B4-BE49-F238E27FC236}">
+                <a16:creationId xmlns:a16="http://schemas.microsoft.com/office/drawing/2014/main" id="{23B12004-ABA3-917A-8855-9D1E3D7F9E77}"/>
+              </a:ext>
+            </a:extLst>
+          </p:cNvPr>
           <p:cNvSpPr>
             <a:spLocks noGrp="1" noRot="1" noChangeAspect="1"/>
           </p:cNvSpPr>
@@ -2607,7 +1671,13 @@
       </p:sp>
       <p:sp>
         <p:nvSpPr>
-          <p:cNvPr id="208" name="Google Shape;208;g364a009736c_2_144:notes"/>
+          <p:cNvPr id="246" name="Google Shape;246;g364a009736c_2_177:notes">
+            <a:extLst>
+              <a:ext uri="{FF2B5EF4-FFF2-40B4-BE49-F238E27FC236}">
+                <a16:creationId xmlns:a16="http://schemas.microsoft.com/office/drawing/2014/main" id="{B5994286-8906-C05C-6C96-E9128B31D618}"/>
+              </a:ext>
+            </a:extLst>
+          </p:cNvPr>
           <p:cNvSpPr txBox="1">
             <a:spLocks noGrp="1"/>
           </p:cNvSpPr>
@@ -2634,7 +1704,7 @@
           </a:bodyPr>
           <a:lstStyle/>
           <a:p>
-            <a:pPr marL="457200" lvl="0" indent="-298450" algn="l" rtl="0">
+            <a:pPr marL="457200" lvl="0" indent="-228600" algn="l" rtl="0">
               <a:lnSpc>
                 <a:spcPct val="100000"/>
               </a:lnSpc>
@@ -2645,17 +1715,18 @@
                 <a:spcPts val="0"/>
               </a:spcAft>
               <a:buSzPts val="1100"/>
-              <a:buChar char="●"/>
+              <a:buNone/>
             </a:pPr>
-            <a:r>
-              <a:rPr lang="en"/>
-              <a:t>Take 3-5 minutes to let people download Python</a:t>
-            </a:r>
             <a:endParaRPr/>
           </a:p>
         </p:txBody>
       </p:sp>
     </p:spTree>
+    <p:extLst>
+      <p:ext uri="{BB962C8B-B14F-4D97-AF65-F5344CB8AC3E}">
+        <p14:creationId xmlns:p14="http://schemas.microsoft.com/office/powerpoint/2010/main" val="4191522633"/>
+      </p:ext>
+    </p:extLst>
   </p:cSld>
   <p:clrMapOvr>
     <a:masterClrMapping/>
@@ -2663,15 +1734,15 @@
 </p:notes>
 </file>
 
-<file path=ppt/notesSlides/notesSlide20.xml><?xml version="1.0" encoding="utf-8"?>
+<file path=ppt/notesSlides/notesSlide16.xml><?xml version="1.0" encoding="utf-8"?>
 <p:notes xmlns:a="http://schemas.openxmlformats.org/drawingml/2006/main" xmlns:r="http://schemas.openxmlformats.org/officeDocument/2006/relationships" xmlns:p="http://schemas.openxmlformats.org/presentationml/2006/main" showMasterSp="0" showMasterPhAnim="0">
   <p:cSld>
     <p:spTree>
       <p:nvGrpSpPr>
-        <p:cNvPr id="1" name="Shape 373">
+        <p:cNvPr id="1" name="Shape 244">
           <a:extLst>
             <a:ext uri="{FF2B5EF4-FFF2-40B4-BE49-F238E27FC236}">
-              <a16:creationId xmlns:a16="http://schemas.microsoft.com/office/drawing/2014/main" id="{EFAE6C7F-0239-263C-40F0-4409AE397822}"/>
+              <a16:creationId xmlns:a16="http://schemas.microsoft.com/office/drawing/2014/main" id="{308DBC9B-3C2D-687B-860E-280AA97B6E05}"/>
             </a:ext>
           </a:extLst>
         </p:cNvPr>
@@ -2688,10 +1759,10 @@
       </p:grpSpPr>
       <p:sp>
         <p:nvSpPr>
-          <p:cNvPr id="374" name="Google Shape;374;g364a009736c_2_287:notes">
+          <p:cNvPr id="245" name="Google Shape;245;g364a009736c_2_177:notes">
             <a:extLst>
               <a:ext uri="{FF2B5EF4-FFF2-40B4-BE49-F238E27FC236}">
-                <a16:creationId xmlns:a16="http://schemas.microsoft.com/office/drawing/2014/main" id="{A7F07626-F769-63ED-A8C5-D934B2163733}"/>
+                <a16:creationId xmlns:a16="http://schemas.microsoft.com/office/drawing/2014/main" id="{191916EF-D68F-32FF-FFF7-7161239FB8DA}"/>
               </a:ext>
             </a:extLst>
           </p:cNvPr>
@@ -2745,10 +1816,10 @@
       </p:sp>
       <p:sp>
         <p:nvSpPr>
-          <p:cNvPr id="375" name="Google Shape;375;g364a009736c_2_287:notes">
+          <p:cNvPr id="246" name="Google Shape;246;g364a009736c_2_177:notes">
             <a:extLst>
               <a:ext uri="{FF2B5EF4-FFF2-40B4-BE49-F238E27FC236}">
-                <a16:creationId xmlns:a16="http://schemas.microsoft.com/office/drawing/2014/main" id="{3A56F53B-8AFE-75CA-FB1B-B69C1DE075F5}"/>
+                <a16:creationId xmlns:a16="http://schemas.microsoft.com/office/drawing/2014/main" id="{4AE1BAD8-782A-BCA3-D6B7-267B81265936}"/>
               </a:ext>
             </a:extLst>
           </p:cNvPr>
@@ -2795,78 +1866,10 @@
           </a:p>
         </p:txBody>
       </p:sp>
-      <p:sp>
-        <p:nvSpPr>
-          <p:cNvPr id="376" name="Google Shape;376;g364a009736c_2_287:notes">
-            <a:extLst>
-              <a:ext uri="{FF2B5EF4-FFF2-40B4-BE49-F238E27FC236}">
-                <a16:creationId xmlns:a16="http://schemas.microsoft.com/office/drawing/2014/main" id="{E4C97AA2-01B3-E850-B0A7-96445DCBC72E}"/>
-              </a:ext>
-            </a:extLst>
-          </p:cNvPr>
-          <p:cNvSpPr txBox="1">
-            <a:spLocks noGrp="1"/>
-          </p:cNvSpPr>
-          <p:nvPr>
-            <p:ph type="sldNum" idx="12"/>
-          </p:nvPr>
-        </p:nvSpPr>
-        <p:spPr>
-          <a:xfrm>
-            <a:off x="0" y="0"/>
-            <a:ext cx="3000000" cy="3000000"/>
-          </a:xfrm>
-          <a:prstGeom prst="rect">
-            <a:avLst/>
-          </a:prstGeom>
-          <a:noFill/>
-          <a:ln>
-            <a:noFill/>
-          </a:ln>
-        </p:spPr>
-        <p:txBody>
-          <a:bodyPr spcFirstLastPara="1" wrap="square" lIns="91425" tIns="45700" rIns="91425" bIns="45700" anchor="t" anchorCtr="0">
-            <a:noAutofit/>
-          </a:bodyPr>
-          <a:lstStyle/>
-          <a:p>
-            <a:pPr marL="0" marR="0" lvl="0" indent="0" algn="l" rtl="0">
-              <a:spcBef>
-                <a:spcPts val="0"/>
-              </a:spcBef>
-              <a:spcAft>
-                <a:spcPts val="0"/>
-              </a:spcAft>
-              <a:buNone/>
-            </a:pPr>
-            <a:fld id="{00000000-1234-1234-1234-123412341234}" type="slidenum">
-              <a:rPr lang="en" sz="1800">
-                <a:solidFill>
-                  <a:schemeClr val="dk1"/>
-                </a:solidFill>
-                <a:latin typeface="Arial"/>
-                <a:ea typeface="Arial"/>
-                <a:cs typeface="Arial"/>
-                <a:sym typeface="Arial"/>
-              </a:rPr>
-              <a:t>27</a:t>
-            </a:fld>
-            <a:endParaRPr sz="1800">
-              <a:solidFill>
-                <a:schemeClr val="dk1"/>
-              </a:solidFill>
-              <a:latin typeface="Arial"/>
-              <a:ea typeface="Arial"/>
-              <a:cs typeface="Arial"/>
-              <a:sym typeface="Arial"/>
-            </a:endParaRPr>
-          </a:p>
-        </p:txBody>
-      </p:sp>
     </p:spTree>
     <p:extLst>
       <p:ext uri="{BB962C8B-B14F-4D97-AF65-F5344CB8AC3E}">
-        <p14:creationId xmlns:p14="http://schemas.microsoft.com/office/powerpoint/2010/main" val="1210229669"/>
+        <p14:creationId xmlns:p14="http://schemas.microsoft.com/office/powerpoint/2010/main" val="853922361"/>
       </p:ext>
     </p:extLst>
   </p:cSld>
@@ -2876,119 +1879,15 @@
 </p:notes>
 </file>
 
-<file path=ppt/notesSlides/notesSlide21.xml><?xml version="1.0" encoding="utf-8"?>
+<file path=ppt/notesSlides/notesSlide17.xml><?xml version="1.0" encoding="utf-8"?>
 <p:notes xmlns:a="http://schemas.openxmlformats.org/drawingml/2006/main" xmlns:r="http://schemas.openxmlformats.org/officeDocument/2006/relationships" xmlns:p="http://schemas.openxmlformats.org/presentationml/2006/main" showMasterSp="0" showMasterPhAnim="0">
   <p:cSld>
     <p:spTree>
       <p:nvGrpSpPr>
-        <p:cNvPr id="1" name="Shape 339"/>
-        <p:cNvGrpSpPr/>
-        <p:nvPr/>
-      </p:nvGrpSpPr>
-      <p:grpSpPr>
-        <a:xfrm>
-          <a:off x="0" y="0"/>
-          <a:ext cx="0" cy="0"/>
-          <a:chOff x="0" y="0"/>
-          <a:chExt cx="0" cy="0"/>
-        </a:xfrm>
-      </p:grpSpPr>
-      <p:sp>
-        <p:nvSpPr>
-          <p:cNvPr id="340" name="Google Shape;340;g364a009736c_2_257:notes"/>
-          <p:cNvSpPr txBox="1">
-            <a:spLocks noGrp="1"/>
-          </p:cNvSpPr>
-          <p:nvPr>
-            <p:ph type="body" idx="1"/>
-          </p:nvPr>
-        </p:nvSpPr>
-        <p:spPr>
-          <a:xfrm>
-            <a:off x="685800" y="4343400"/>
-            <a:ext cx="5486400" cy="4114800"/>
-          </a:xfrm>
-          <a:prstGeom prst="rect">
-            <a:avLst/>
-          </a:prstGeom>
-        </p:spPr>
-        <p:txBody>
-          <a:bodyPr spcFirstLastPara="1" wrap="square" lIns="91425" tIns="91425" rIns="91425" bIns="91425" anchor="t" anchorCtr="0">
-            <a:noAutofit/>
-          </a:bodyPr>
-          <a:lstStyle/>
-          <a:p>
-            <a:pPr marL="0" lvl="0" indent="0" algn="l" rtl="0">
-              <a:spcBef>
-                <a:spcPts val="0"/>
-              </a:spcBef>
-              <a:spcAft>
-                <a:spcPts val="0"/>
-              </a:spcAft>
-              <a:buNone/>
-            </a:pPr>
-            <a:endParaRPr/>
-          </a:p>
-        </p:txBody>
-      </p:sp>
-      <p:sp>
-        <p:nvSpPr>
-          <p:cNvPr id="341" name="Google Shape;341;g364a009736c_2_257:notes"/>
-          <p:cNvSpPr>
-            <a:spLocks noGrp="1" noRot="1" noChangeAspect="1"/>
-          </p:cNvSpPr>
-          <p:nvPr>
-            <p:ph type="sldImg" idx="2"/>
-          </p:nvPr>
-        </p:nvSpPr>
-        <p:spPr>
-          <a:xfrm>
-            <a:off x="381000" y="685800"/>
-            <a:ext cx="6096000" cy="3429000"/>
-          </a:xfrm>
-          <a:custGeom>
-            <a:avLst/>
-            <a:gdLst/>
-            <a:ahLst/>
-            <a:cxnLst/>
-            <a:rect l="l" t="t" r="r" b="b"/>
-            <a:pathLst>
-              <a:path w="120000" h="120000" extrusionOk="0">
-                <a:moveTo>
-                  <a:pt x="0" y="0"/>
-                </a:moveTo>
-                <a:lnTo>
-                  <a:pt x="120000" y="0"/>
-                </a:lnTo>
-                <a:lnTo>
-                  <a:pt x="120000" y="120000"/>
-                </a:lnTo>
-                <a:lnTo>
-                  <a:pt x="0" y="120000"/>
-                </a:lnTo>
-                <a:close/>
-              </a:path>
-            </a:pathLst>
-          </a:custGeom>
-        </p:spPr>
-      </p:sp>
-    </p:spTree>
-  </p:cSld>
-  <p:clrMapOvr>
-    <a:masterClrMapping/>
-  </p:clrMapOvr>
-</p:notes>
-</file>
-
-<file path=ppt/notesSlides/notesSlide22.xml><?xml version="1.0" encoding="utf-8"?>
-<p:notes xmlns:a="http://schemas.openxmlformats.org/drawingml/2006/main" xmlns:r="http://schemas.openxmlformats.org/officeDocument/2006/relationships" xmlns:p="http://schemas.openxmlformats.org/presentationml/2006/main" showMasterSp="0" showMasterPhAnim="0">
-  <p:cSld>
-    <p:spTree>
-      <p:nvGrpSpPr>
-        <p:cNvPr id="1" name="Shape 339">
+        <p:cNvPr id="1" name="Shape 244">
           <a:extLst>
             <a:ext uri="{FF2B5EF4-FFF2-40B4-BE49-F238E27FC236}">
-              <a16:creationId xmlns:a16="http://schemas.microsoft.com/office/drawing/2014/main" id="{59A83625-484F-5D61-8522-8B0BB15B97D4}"/>
+              <a16:creationId xmlns:a16="http://schemas.microsoft.com/office/drawing/2014/main" id="{04716DC9-C8B4-9F73-7003-3B7D8CA8DB3A}"/>
             </a:ext>
           </a:extLst>
         </p:cNvPr>
@@ -3005,137 +1904,10 @@
       </p:grpSpPr>
       <p:sp>
         <p:nvSpPr>
-          <p:cNvPr id="340" name="Google Shape;340;g364a009736c_2_257:notes">
+          <p:cNvPr id="245" name="Google Shape;245;g364a009736c_2_177:notes">
             <a:extLst>
               <a:ext uri="{FF2B5EF4-FFF2-40B4-BE49-F238E27FC236}">
-                <a16:creationId xmlns:a16="http://schemas.microsoft.com/office/drawing/2014/main" id="{5675A772-7D01-1B11-A419-3EDB6C5CA3FC}"/>
-              </a:ext>
-            </a:extLst>
-          </p:cNvPr>
-          <p:cNvSpPr txBox="1">
-            <a:spLocks noGrp="1"/>
-          </p:cNvSpPr>
-          <p:nvPr>
-            <p:ph type="body" idx="1"/>
-          </p:nvPr>
-        </p:nvSpPr>
-        <p:spPr>
-          <a:xfrm>
-            <a:off x="685800" y="4343400"/>
-            <a:ext cx="5486400" cy="4114800"/>
-          </a:xfrm>
-          <a:prstGeom prst="rect">
-            <a:avLst/>
-          </a:prstGeom>
-        </p:spPr>
-        <p:txBody>
-          <a:bodyPr spcFirstLastPara="1" wrap="square" lIns="91425" tIns="91425" rIns="91425" bIns="91425" anchor="t" anchorCtr="0">
-            <a:noAutofit/>
-          </a:bodyPr>
-          <a:lstStyle/>
-          <a:p>
-            <a:pPr marL="0" lvl="0" indent="0" algn="l" rtl="0">
-              <a:spcBef>
-                <a:spcPts val="0"/>
-              </a:spcBef>
-              <a:spcAft>
-                <a:spcPts val="0"/>
-              </a:spcAft>
-              <a:buNone/>
-            </a:pPr>
-            <a:endParaRPr dirty="0"/>
-          </a:p>
-        </p:txBody>
-      </p:sp>
-      <p:sp>
-        <p:nvSpPr>
-          <p:cNvPr id="341" name="Google Shape;341;g364a009736c_2_257:notes">
-            <a:extLst>
-              <a:ext uri="{FF2B5EF4-FFF2-40B4-BE49-F238E27FC236}">
-                <a16:creationId xmlns:a16="http://schemas.microsoft.com/office/drawing/2014/main" id="{19FEA6A7-605F-6E9C-6CDE-918C2FC3D54C}"/>
-              </a:ext>
-            </a:extLst>
-          </p:cNvPr>
-          <p:cNvSpPr>
-            <a:spLocks noGrp="1" noRot="1" noChangeAspect="1"/>
-          </p:cNvSpPr>
-          <p:nvPr>
-            <p:ph type="sldImg" idx="2"/>
-          </p:nvPr>
-        </p:nvSpPr>
-        <p:spPr>
-          <a:xfrm>
-            <a:off x="381000" y="685800"/>
-            <a:ext cx="6096000" cy="3429000"/>
-          </a:xfrm>
-          <a:custGeom>
-            <a:avLst/>
-            <a:gdLst/>
-            <a:ahLst/>
-            <a:cxnLst/>
-            <a:rect l="l" t="t" r="r" b="b"/>
-            <a:pathLst>
-              <a:path w="120000" h="120000" extrusionOk="0">
-                <a:moveTo>
-                  <a:pt x="0" y="0"/>
-                </a:moveTo>
-                <a:lnTo>
-                  <a:pt x="120000" y="0"/>
-                </a:lnTo>
-                <a:lnTo>
-                  <a:pt x="120000" y="120000"/>
-                </a:lnTo>
-                <a:lnTo>
-                  <a:pt x="0" y="120000"/>
-                </a:lnTo>
-                <a:close/>
-              </a:path>
-            </a:pathLst>
-          </a:custGeom>
-        </p:spPr>
-      </p:sp>
-    </p:spTree>
-    <p:extLst>
-      <p:ext uri="{BB962C8B-B14F-4D97-AF65-F5344CB8AC3E}">
-        <p14:creationId xmlns:p14="http://schemas.microsoft.com/office/powerpoint/2010/main" val="4111944888"/>
-      </p:ext>
-    </p:extLst>
-  </p:cSld>
-  <p:clrMapOvr>
-    <a:masterClrMapping/>
-  </p:clrMapOvr>
-</p:notes>
-</file>
-
-<file path=ppt/notesSlides/notesSlide23.xml><?xml version="1.0" encoding="utf-8"?>
-<p:notes xmlns:a="http://schemas.openxmlformats.org/drawingml/2006/main" xmlns:r="http://schemas.openxmlformats.org/officeDocument/2006/relationships" xmlns:p="http://schemas.openxmlformats.org/presentationml/2006/main" showMasterSp="0" showMasterPhAnim="0">
-  <p:cSld>
-    <p:spTree>
-      <p:nvGrpSpPr>
-        <p:cNvPr id="1" name="Shape 314">
-          <a:extLst>
-            <a:ext uri="{FF2B5EF4-FFF2-40B4-BE49-F238E27FC236}">
-              <a16:creationId xmlns:a16="http://schemas.microsoft.com/office/drawing/2014/main" id="{D1DB388B-D8C8-B7AF-DA4A-2E2170DE54FD}"/>
-            </a:ext>
-          </a:extLst>
-        </p:cNvPr>
-        <p:cNvGrpSpPr/>
-        <p:nvPr/>
-      </p:nvGrpSpPr>
-      <p:grpSpPr>
-        <a:xfrm>
-          <a:off x="0" y="0"/>
-          <a:ext cx="0" cy="0"/>
-          <a:chOff x="0" y="0"/>
-          <a:chExt cx="0" cy="0"/>
-        </a:xfrm>
-      </p:grpSpPr>
-      <p:sp>
-        <p:nvSpPr>
-          <p:cNvPr id="315" name="Google Shape;315;g364a009736c_2_236:notes">
-            <a:extLst>
-              <a:ext uri="{FF2B5EF4-FFF2-40B4-BE49-F238E27FC236}">
-                <a16:creationId xmlns:a16="http://schemas.microsoft.com/office/drawing/2014/main" id="{1E842EB0-6396-B037-9E7A-18381198AEF8}"/>
+                <a16:creationId xmlns:a16="http://schemas.microsoft.com/office/drawing/2014/main" id="{7179A8BD-D72B-17C3-44BC-06F2F6192264}"/>
               </a:ext>
             </a:extLst>
           </p:cNvPr>
@@ -3189,10 +1961,10 @@
       </p:sp>
       <p:sp>
         <p:nvSpPr>
-          <p:cNvPr id="316" name="Google Shape;316;g364a009736c_2_236:notes">
+          <p:cNvPr id="246" name="Google Shape;246;g364a009736c_2_177:notes">
             <a:extLst>
               <a:ext uri="{FF2B5EF4-FFF2-40B4-BE49-F238E27FC236}">
-                <a16:creationId xmlns:a16="http://schemas.microsoft.com/office/drawing/2014/main" id="{AB152011-E51C-8072-EF4C-FA66B157A482}"/>
+                <a16:creationId xmlns:a16="http://schemas.microsoft.com/office/drawing/2014/main" id="{F5D984FA-6573-75F7-EB96-40693293361E}"/>
               </a:ext>
             </a:extLst>
           </p:cNvPr>
@@ -3235,82 +2007,14 @@
               <a:buSzPts val="1100"/>
               <a:buNone/>
             </a:pPr>
-            <a:endParaRPr dirty="0"/>
-          </a:p>
-        </p:txBody>
-      </p:sp>
-      <p:sp>
-        <p:nvSpPr>
-          <p:cNvPr id="317" name="Google Shape;317;g364a009736c_2_236:notes">
-            <a:extLst>
-              <a:ext uri="{FF2B5EF4-FFF2-40B4-BE49-F238E27FC236}">
-                <a16:creationId xmlns:a16="http://schemas.microsoft.com/office/drawing/2014/main" id="{B49F4616-5FAB-B511-3493-CA05E7313DDB}"/>
-              </a:ext>
-            </a:extLst>
-          </p:cNvPr>
-          <p:cNvSpPr txBox="1">
-            <a:spLocks noGrp="1"/>
-          </p:cNvSpPr>
-          <p:nvPr>
-            <p:ph type="sldNum" idx="12"/>
-          </p:nvPr>
-        </p:nvSpPr>
-        <p:spPr>
-          <a:xfrm>
-            <a:off x="0" y="0"/>
-            <a:ext cx="3000000" cy="3000000"/>
-          </a:xfrm>
-          <a:prstGeom prst="rect">
-            <a:avLst/>
-          </a:prstGeom>
-          <a:noFill/>
-          <a:ln>
-            <a:noFill/>
-          </a:ln>
-        </p:spPr>
-        <p:txBody>
-          <a:bodyPr spcFirstLastPara="1" wrap="square" lIns="91425" tIns="45700" rIns="91425" bIns="45700" anchor="t" anchorCtr="0">
-            <a:noAutofit/>
-          </a:bodyPr>
-          <a:lstStyle/>
-          <a:p>
-            <a:pPr marL="0" marR="0" lvl="0" indent="0" algn="l" rtl="0">
-              <a:spcBef>
-                <a:spcPts val="0"/>
-              </a:spcBef>
-              <a:spcAft>
-                <a:spcPts val="0"/>
-              </a:spcAft>
-              <a:buNone/>
-            </a:pPr>
-            <a:fld id="{00000000-1234-1234-1234-123412341234}" type="slidenum">
-              <a:rPr lang="en" sz="1800">
-                <a:solidFill>
-                  <a:schemeClr val="dk1"/>
-                </a:solidFill>
-                <a:latin typeface="Arial"/>
-                <a:ea typeface="Arial"/>
-                <a:cs typeface="Arial"/>
-                <a:sym typeface="Arial"/>
-              </a:rPr>
-              <a:t>31</a:t>
-            </a:fld>
-            <a:endParaRPr sz="1800">
-              <a:solidFill>
-                <a:schemeClr val="dk1"/>
-              </a:solidFill>
-              <a:latin typeface="Arial"/>
-              <a:ea typeface="Arial"/>
-              <a:cs typeface="Arial"/>
-              <a:sym typeface="Arial"/>
-            </a:endParaRPr>
+            <a:endParaRPr/>
           </a:p>
         </p:txBody>
       </p:sp>
     </p:spTree>
     <p:extLst>
       <p:ext uri="{BB962C8B-B14F-4D97-AF65-F5344CB8AC3E}">
-        <p14:creationId xmlns:p14="http://schemas.microsoft.com/office/powerpoint/2010/main" val="157119954"/>
+        <p14:creationId xmlns:p14="http://schemas.microsoft.com/office/powerpoint/2010/main" val="2276880705"/>
       </p:ext>
     </p:extLst>
   </p:cSld>
@@ -3320,12 +2024,18 @@
 </p:notes>
 </file>
 
-<file path=ppt/notesSlides/notesSlide3.xml><?xml version="1.0" encoding="utf-8"?>
+<file path=ppt/notesSlides/notesSlide18.xml><?xml version="1.0" encoding="utf-8"?>
 <p:notes xmlns:a="http://schemas.openxmlformats.org/drawingml/2006/main" xmlns:r="http://schemas.openxmlformats.org/officeDocument/2006/relationships" xmlns:p="http://schemas.openxmlformats.org/presentationml/2006/main" showMasterSp="0" showMasterPhAnim="0">
   <p:cSld>
     <p:spTree>
       <p:nvGrpSpPr>
-        <p:cNvPr id="1" name="Shape 213"/>
+        <p:cNvPr id="1" name="Shape 256">
+          <a:extLst>
+            <a:ext uri="{FF2B5EF4-FFF2-40B4-BE49-F238E27FC236}">
+              <a16:creationId xmlns:a16="http://schemas.microsoft.com/office/drawing/2014/main" id="{4543D9CC-7E56-CC55-4FF8-9BB5116A0A43}"/>
+            </a:ext>
+          </a:extLst>
+        </p:cNvPr>
         <p:cNvGrpSpPr/>
         <p:nvPr/>
       </p:nvGrpSpPr>
@@ -3339,7 +2049,232 @@
       </p:grpSpPr>
       <p:sp>
         <p:nvSpPr>
-          <p:cNvPr id="214" name="Google Shape;214;g364a009736c_2_150:notes"/>
+          <p:cNvPr id="257" name="Google Shape;257;g364a009736c_2_187:notes">
+            <a:extLst>
+              <a:ext uri="{FF2B5EF4-FFF2-40B4-BE49-F238E27FC236}">
+                <a16:creationId xmlns:a16="http://schemas.microsoft.com/office/drawing/2014/main" id="{2BDAE34B-4BF1-52EA-A461-957F869870D9}"/>
+              </a:ext>
+            </a:extLst>
+          </p:cNvPr>
+          <p:cNvSpPr txBox="1">
+            <a:spLocks noGrp="1"/>
+          </p:cNvSpPr>
+          <p:nvPr>
+            <p:ph type="body" idx="1"/>
+          </p:nvPr>
+        </p:nvSpPr>
+        <p:spPr>
+          <a:xfrm>
+            <a:off x="685800" y="4343400"/>
+            <a:ext cx="5486400" cy="4114800"/>
+          </a:xfrm>
+          <a:prstGeom prst="rect">
+            <a:avLst/>
+          </a:prstGeom>
+        </p:spPr>
+        <p:txBody>
+          <a:bodyPr spcFirstLastPara="1" wrap="square" lIns="91425" tIns="91425" rIns="91425" bIns="91425" anchor="t" anchorCtr="0">
+            <a:noAutofit/>
+          </a:bodyPr>
+          <a:lstStyle/>
+          <a:p>
+            <a:pPr marL="0" lvl="0" indent="0" algn="l" rtl="0">
+              <a:spcBef>
+                <a:spcPts val="0"/>
+              </a:spcBef>
+              <a:spcAft>
+                <a:spcPts val="0"/>
+              </a:spcAft>
+              <a:buNone/>
+            </a:pPr>
+            <a:endParaRPr/>
+          </a:p>
+        </p:txBody>
+      </p:sp>
+      <p:sp>
+        <p:nvSpPr>
+          <p:cNvPr id="258" name="Google Shape;258;g364a009736c_2_187:notes">
+            <a:extLst>
+              <a:ext uri="{FF2B5EF4-FFF2-40B4-BE49-F238E27FC236}">
+                <a16:creationId xmlns:a16="http://schemas.microsoft.com/office/drawing/2014/main" id="{D66910F0-4EC2-4D73-EF29-4687A9FB1F6C}"/>
+              </a:ext>
+            </a:extLst>
+          </p:cNvPr>
+          <p:cNvSpPr>
+            <a:spLocks noGrp="1" noRot="1" noChangeAspect="1"/>
+          </p:cNvSpPr>
+          <p:nvPr>
+            <p:ph type="sldImg" idx="2"/>
+          </p:nvPr>
+        </p:nvSpPr>
+        <p:spPr>
+          <a:xfrm>
+            <a:off x="381000" y="685800"/>
+            <a:ext cx="6096000" cy="3429000"/>
+          </a:xfrm>
+          <a:custGeom>
+            <a:avLst/>
+            <a:gdLst/>
+            <a:ahLst/>
+            <a:cxnLst/>
+            <a:rect l="l" t="t" r="r" b="b"/>
+            <a:pathLst>
+              <a:path w="120000" h="120000" extrusionOk="0">
+                <a:moveTo>
+                  <a:pt x="0" y="0"/>
+                </a:moveTo>
+                <a:lnTo>
+                  <a:pt x="120000" y="0"/>
+                </a:lnTo>
+                <a:lnTo>
+                  <a:pt x="120000" y="120000"/>
+                </a:lnTo>
+                <a:lnTo>
+                  <a:pt x="0" y="120000"/>
+                </a:lnTo>
+                <a:close/>
+              </a:path>
+            </a:pathLst>
+          </a:custGeom>
+        </p:spPr>
+      </p:sp>
+    </p:spTree>
+    <p:extLst>
+      <p:ext uri="{BB962C8B-B14F-4D97-AF65-F5344CB8AC3E}">
+        <p14:creationId xmlns:p14="http://schemas.microsoft.com/office/powerpoint/2010/main" val="2991809635"/>
+      </p:ext>
+    </p:extLst>
+  </p:cSld>
+  <p:clrMapOvr>
+    <a:masterClrMapping/>
+  </p:clrMapOvr>
+</p:notes>
+</file>
+
+<file path=ppt/notesSlides/notesSlide19.xml><?xml version="1.0" encoding="utf-8"?>
+<p:notes xmlns:a="http://schemas.openxmlformats.org/drawingml/2006/main" xmlns:r="http://schemas.openxmlformats.org/officeDocument/2006/relationships" xmlns:p="http://schemas.openxmlformats.org/presentationml/2006/main" showMasterSp="0" showMasterPhAnim="0">
+  <p:cSld>
+    <p:spTree>
+      <p:nvGrpSpPr>
+        <p:cNvPr id="1" name="Shape 256"/>
+        <p:cNvGrpSpPr/>
+        <p:nvPr/>
+      </p:nvGrpSpPr>
+      <p:grpSpPr>
+        <a:xfrm>
+          <a:off x="0" y="0"/>
+          <a:ext cx="0" cy="0"/>
+          <a:chOff x="0" y="0"/>
+          <a:chExt cx="0" cy="0"/>
+        </a:xfrm>
+      </p:grpSpPr>
+      <p:sp>
+        <p:nvSpPr>
+          <p:cNvPr id="257" name="Google Shape;257;g364a009736c_2_187:notes"/>
+          <p:cNvSpPr txBox="1">
+            <a:spLocks noGrp="1"/>
+          </p:cNvSpPr>
+          <p:nvPr>
+            <p:ph type="body" idx="1"/>
+          </p:nvPr>
+        </p:nvSpPr>
+        <p:spPr>
+          <a:xfrm>
+            <a:off x="685800" y="4343400"/>
+            <a:ext cx="5486400" cy="4114800"/>
+          </a:xfrm>
+          <a:prstGeom prst="rect">
+            <a:avLst/>
+          </a:prstGeom>
+        </p:spPr>
+        <p:txBody>
+          <a:bodyPr spcFirstLastPara="1" wrap="square" lIns="91425" tIns="91425" rIns="91425" bIns="91425" anchor="t" anchorCtr="0">
+            <a:noAutofit/>
+          </a:bodyPr>
+          <a:lstStyle/>
+          <a:p>
+            <a:pPr marL="0" lvl="0" indent="0" algn="l" rtl="0">
+              <a:spcBef>
+                <a:spcPts val="0"/>
+              </a:spcBef>
+              <a:spcAft>
+                <a:spcPts val="0"/>
+              </a:spcAft>
+              <a:buNone/>
+            </a:pPr>
+            <a:endParaRPr/>
+          </a:p>
+        </p:txBody>
+      </p:sp>
+      <p:sp>
+        <p:nvSpPr>
+          <p:cNvPr id="258" name="Google Shape;258;g364a009736c_2_187:notes"/>
+          <p:cNvSpPr>
+            <a:spLocks noGrp="1" noRot="1" noChangeAspect="1"/>
+          </p:cNvSpPr>
+          <p:nvPr>
+            <p:ph type="sldImg" idx="2"/>
+          </p:nvPr>
+        </p:nvSpPr>
+        <p:spPr>
+          <a:xfrm>
+            <a:off x="381000" y="685800"/>
+            <a:ext cx="6096000" cy="3429000"/>
+          </a:xfrm>
+          <a:custGeom>
+            <a:avLst/>
+            <a:gdLst/>
+            <a:ahLst/>
+            <a:cxnLst/>
+            <a:rect l="l" t="t" r="r" b="b"/>
+            <a:pathLst>
+              <a:path w="120000" h="120000" extrusionOk="0">
+                <a:moveTo>
+                  <a:pt x="0" y="0"/>
+                </a:moveTo>
+                <a:lnTo>
+                  <a:pt x="120000" y="0"/>
+                </a:lnTo>
+                <a:lnTo>
+                  <a:pt x="120000" y="120000"/>
+                </a:lnTo>
+                <a:lnTo>
+                  <a:pt x="0" y="120000"/>
+                </a:lnTo>
+                <a:close/>
+              </a:path>
+            </a:pathLst>
+          </a:custGeom>
+        </p:spPr>
+      </p:sp>
+    </p:spTree>
+  </p:cSld>
+  <p:clrMapOvr>
+    <a:masterClrMapping/>
+  </p:clrMapOvr>
+</p:notes>
+</file>
+
+<file path=ppt/notesSlides/notesSlide2.xml><?xml version="1.0" encoding="utf-8"?>
+<p:notes xmlns:a="http://schemas.openxmlformats.org/drawingml/2006/main" xmlns:r="http://schemas.openxmlformats.org/officeDocument/2006/relationships" xmlns:p="http://schemas.openxmlformats.org/presentationml/2006/main" showMasterSp="0" showMasterPhAnim="0">
+  <p:cSld>
+    <p:spTree>
+      <p:nvGrpSpPr>
+        <p:cNvPr id="1" name="Shape 206"/>
+        <p:cNvGrpSpPr/>
+        <p:nvPr/>
+      </p:nvGrpSpPr>
+      <p:grpSpPr>
+        <a:xfrm>
+          <a:off x="0" y="0"/>
+          <a:ext cx="0" cy="0"/>
+          <a:chOff x="0" y="0"/>
+          <a:chExt cx="0" cy="0"/>
+        </a:xfrm>
+      </p:grpSpPr>
+      <p:sp>
+        <p:nvSpPr>
+          <p:cNvPr id="207" name="Google Shape;207;g364a009736c_2_144:notes"/>
           <p:cNvSpPr>
             <a:spLocks noGrp="1" noRot="1" noChangeAspect="1"/>
           </p:cNvSpPr>
@@ -3390,7 +2325,7 @@
       </p:sp>
       <p:sp>
         <p:nvSpPr>
-          <p:cNvPr id="215" name="Google Shape;215;g364a009736c_2_150:notes"/>
+          <p:cNvPr id="208" name="Google Shape;208;g364a009736c_2_144:notes"/>
           <p:cNvSpPr txBox="1">
             <a:spLocks noGrp="1"/>
           </p:cNvSpPr>
@@ -3417,7 +2352,7 @@
           </a:bodyPr>
           <a:lstStyle/>
           <a:p>
-            <a:pPr marL="457200" lvl="0" indent="-228600" algn="l" rtl="0">
+            <a:pPr marL="457200" lvl="0" indent="-298450" algn="l" rtl="0">
               <a:lnSpc>
                 <a:spcPct val="100000"/>
               </a:lnSpc>
@@ -3428,8 +2363,12 @@
                 <a:spcPts val="0"/>
               </a:spcAft>
               <a:buSzPts val="1100"/>
-              <a:buNone/>
+              <a:buChar char="●"/>
             </a:pPr>
+            <a:r>
+              <a:rPr lang="en"/>
+              <a:t>Take 3-5 minutes to let people download Python</a:t>
+            </a:r>
             <a:endParaRPr/>
           </a:p>
         </p:txBody>
@@ -3442,12 +2381,12 @@
 </p:notes>
 </file>
 
-<file path=ppt/notesSlides/notesSlide4.xml><?xml version="1.0" encoding="utf-8"?>
+<file path=ppt/notesSlides/notesSlide20.xml><?xml version="1.0" encoding="utf-8"?>
 <p:notes xmlns:a="http://schemas.openxmlformats.org/drawingml/2006/main" xmlns:r="http://schemas.openxmlformats.org/officeDocument/2006/relationships" xmlns:p="http://schemas.openxmlformats.org/presentationml/2006/main" showMasterSp="0" showMasterPhAnim="0">
   <p:cSld>
     <p:spTree>
       <p:nvGrpSpPr>
-        <p:cNvPr id="1" name="Shape 220"/>
+        <p:cNvPr id="1" name="Shape 262"/>
         <p:cNvGrpSpPr/>
         <p:nvPr/>
       </p:nvGrpSpPr>
@@ -3461,7 +2400,189 @@
       </p:grpSpPr>
       <p:sp>
         <p:nvSpPr>
-          <p:cNvPr id="221" name="Google Shape;221;g364a009736c_2_156:notes"/>
+          <p:cNvPr id="263" name="Google Shape;263;g364a009736c_2_192:notes"/>
+          <p:cNvSpPr txBox="1">
+            <a:spLocks noGrp="1"/>
+          </p:cNvSpPr>
+          <p:nvPr>
+            <p:ph type="body" idx="1"/>
+          </p:nvPr>
+        </p:nvSpPr>
+        <p:spPr>
+          <a:xfrm>
+            <a:off x="685800" y="4343400"/>
+            <a:ext cx="5486400" cy="4114800"/>
+          </a:xfrm>
+          <a:prstGeom prst="rect">
+            <a:avLst/>
+          </a:prstGeom>
+        </p:spPr>
+        <p:txBody>
+          <a:bodyPr spcFirstLastPara="1" wrap="square" lIns="91425" tIns="91425" rIns="91425" bIns="91425" anchor="t" anchorCtr="0">
+            <a:noAutofit/>
+          </a:bodyPr>
+          <a:lstStyle/>
+          <a:p>
+            <a:pPr marL="0" lvl="0" indent="0" algn="l" rtl="0">
+              <a:spcBef>
+                <a:spcPts val="0"/>
+              </a:spcBef>
+              <a:spcAft>
+                <a:spcPts val="0"/>
+              </a:spcAft>
+              <a:buNone/>
+            </a:pPr>
+            <a:endParaRPr/>
+          </a:p>
+        </p:txBody>
+      </p:sp>
+      <p:sp>
+        <p:nvSpPr>
+          <p:cNvPr id="264" name="Google Shape;264;g364a009736c_2_192:notes"/>
+          <p:cNvSpPr>
+            <a:spLocks noGrp="1" noRot="1" noChangeAspect="1"/>
+          </p:cNvSpPr>
+          <p:nvPr>
+            <p:ph type="sldImg" idx="2"/>
+          </p:nvPr>
+        </p:nvSpPr>
+        <p:spPr>
+          <a:xfrm>
+            <a:off x="381000" y="685800"/>
+            <a:ext cx="6096000" cy="3429000"/>
+          </a:xfrm>
+          <a:custGeom>
+            <a:avLst/>
+            <a:gdLst/>
+            <a:ahLst/>
+            <a:cxnLst/>
+            <a:rect l="l" t="t" r="r" b="b"/>
+            <a:pathLst>
+              <a:path w="120000" h="120000" extrusionOk="0">
+                <a:moveTo>
+                  <a:pt x="0" y="0"/>
+                </a:moveTo>
+                <a:lnTo>
+                  <a:pt x="120000" y="0"/>
+                </a:lnTo>
+                <a:lnTo>
+                  <a:pt x="120000" y="120000"/>
+                </a:lnTo>
+                <a:lnTo>
+                  <a:pt x="0" y="120000"/>
+                </a:lnTo>
+                <a:close/>
+              </a:path>
+            </a:pathLst>
+          </a:custGeom>
+        </p:spPr>
+      </p:sp>
+    </p:spTree>
+  </p:cSld>
+  <p:clrMapOvr>
+    <a:masterClrMapping/>
+  </p:clrMapOvr>
+</p:notes>
+</file>
+
+<file path=ppt/notesSlides/notesSlide21.xml><?xml version="1.0" encoding="utf-8"?>
+<p:notes xmlns:a="http://schemas.openxmlformats.org/drawingml/2006/main" xmlns:r="http://schemas.openxmlformats.org/officeDocument/2006/relationships" xmlns:p="http://schemas.openxmlformats.org/presentationml/2006/main">
+  <p:cSld>
+    <p:spTree>
+      <p:nvGrpSpPr>
+        <p:cNvPr id="1" name=""/>
+        <p:cNvGrpSpPr/>
+        <p:nvPr/>
+      </p:nvGrpSpPr>
+      <p:grpSpPr>
+        <a:xfrm>
+          <a:off x="0" y="0"/>
+          <a:ext cx="0" cy="0"/>
+          <a:chOff x="0" y="0"/>
+          <a:chExt cx="0" cy="0"/>
+        </a:xfrm>
+      </p:grpSpPr>
+      <p:sp>
+        <p:nvSpPr>
+          <p:cNvPr id="2" name="Slide Image Placeholder 1"/>
+          <p:cNvSpPr>
+            <a:spLocks noGrp="1" noRot="1" noChangeAspect="1"/>
+          </p:cNvSpPr>
+          <p:nvPr>
+            <p:ph type="sldImg"/>
+          </p:nvPr>
+        </p:nvSpPr>
+        <p:spPr>
+          <a:xfrm>
+            <a:off x="381000" y="685800"/>
+            <a:ext cx="6096000" cy="3429000"/>
+          </a:xfrm>
+        </p:spPr>
+      </p:sp>
+      <p:sp>
+        <p:nvSpPr>
+          <p:cNvPr id="3" name="Notes Placeholder 2"/>
+          <p:cNvSpPr>
+            <a:spLocks noGrp="1"/>
+          </p:cNvSpPr>
+          <p:nvPr>
+            <p:ph type="body" idx="1"/>
+          </p:nvPr>
+        </p:nvSpPr>
+        <p:spPr/>
+        <p:txBody>
+          <a:bodyPr/>
+          <a:lstStyle/>
+          <a:p>
+            <a:pPr marL="158750" indent="0">
+              <a:buNone/>
+            </a:pPr>
+            <a:r>
+              <a:rPr lang="en-US" dirty="0"/>
+              <a:t>binary_demo.py</a:t>
+            </a:r>
+          </a:p>
+          <a:p>
+            <a:pPr marL="158750" indent="0">
+              <a:buNone/>
+            </a:pPr>
+            <a:endParaRPr lang="en-US" dirty="0"/>
+          </a:p>
+        </p:txBody>
+      </p:sp>
+    </p:spTree>
+    <p:extLst>
+      <p:ext uri="{BB962C8B-B14F-4D97-AF65-F5344CB8AC3E}">
+        <p14:creationId xmlns:p14="http://schemas.microsoft.com/office/powerpoint/2010/main" val="1372288377"/>
+      </p:ext>
+    </p:extLst>
+  </p:cSld>
+  <p:clrMapOvr>
+    <a:masterClrMapping/>
+  </p:clrMapOvr>
+</p:notes>
+</file>
+
+<file path=ppt/notesSlides/notesSlide22.xml><?xml version="1.0" encoding="utf-8"?>
+<p:notes xmlns:a="http://schemas.openxmlformats.org/drawingml/2006/main" xmlns:r="http://schemas.openxmlformats.org/officeDocument/2006/relationships" xmlns:p="http://schemas.openxmlformats.org/presentationml/2006/main" showMasterSp="0" showMasterPhAnim="0">
+  <p:cSld>
+    <p:spTree>
+      <p:nvGrpSpPr>
+        <p:cNvPr id="1" name="Shape 307"/>
+        <p:cNvGrpSpPr/>
+        <p:nvPr/>
+      </p:nvGrpSpPr>
+      <p:grpSpPr>
+        <a:xfrm>
+          <a:off x="0" y="0"/>
+          <a:ext cx="0" cy="0"/>
+          <a:chOff x="0" y="0"/>
+          <a:chExt cx="0" cy="0"/>
+        </a:xfrm>
+      </p:grpSpPr>
+      <p:sp>
+        <p:nvSpPr>
+          <p:cNvPr id="308" name="Google Shape;308;g364a009736c_2_230:notes"/>
           <p:cNvSpPr>
             <a:spLocks noGrp="1" noRot="1" noChangeAspect="1"/>
           </p:cNvSpPr>
@@ -3512,7 +2633,7 @@
       </p:sp>
       <p:sp>
         <p:nvSpPr>
-          <p:cNvPr id="222" name="Google Shape;222;g364a009736c_2_156:notes"/>
+          <p:cNvPr id="309" name="Google Shape;309;g364a009736c_2_230:notes"/>
           <p:cNvSpPr txBox="1">
             <a:spLocks noGrp="1"/>
           </p:cNvSpPr>
@@ -3554,7 +2675,127 @@
             </a:pPr>
             <a:r>
               <a:rPr lang="en"/>
-              <a:t>Give 3-5 minutes for download</a:t>
+              <a:t>Age1 = “18”</a:t>
+            </a:r>
+            <a:endParaRPr/>
+          </a:p>
+          <a:p>
+            <a:pPr marL="457200" lvl="0" indent="-298450" algn="l" rtl="0">
+              <a:lnSpc>
+                <a:spcPct val="100000"/>
+              </a:lnSpc>
+              <a:spcBef>
+                <a:spcPts val="0"/>
+              </a:spcBef>
+              <a:spcAft>
+                <a:spcPts val="0"/>
+              </a:spcAft>
+              <a:buSzPts val="1100"/>
+              <a:buChar char="●"/>
+            </a:pPr>
+            <a:r>
+              <a:rPr lang="en"/>
+              <a:t>Age2 = “19”</a:t>
+            </a:r>
+            <a:endParaRPr/>
+          </a:p>
+          <a:p>
+            <a:pPr marL="457200" lvl="0" indent="-298450" algn="l" rtl="0">
+              <a:lnSpc>
+                <a:spcPct val="100000"/>
+              </a:lnSpc>
+              <a:spcBef>
+                <a:spcPts val="0"/>
+              </a:spcBef>
+              <a:spcAft>
+                <a:spcPts val="0"/>
+              </a:spcAft>
+              <a:buSzPts val="1100"/>
+              <a:buChar char="●"/>
+            </a:pPr>
+            <a:r>
+              <a:rPr lang="en"/>
+              <a:t>Sum_of_ages = age1 + age2</a:t>
+            </a:r>
+            <a:endParaRPr/>
+          </a:p>
+          <a:p>
+            <a:pPr marL="457200" lvl="0" indent="-298450" algn="l" rtl="0">
+              <a:lnSpc>
+                <a:spcPct val="100000"/>
+              </a:lnSpc>
+              <a:spcBef>
+                <a:spcPts val="0"/>
+              </a:spcBef>
+              <a:spcAft>
+                <a:spcPts val="0"/>
+              </a:spcAft>
+              <a:buSzPts val="1100"/>
+              <a:buChar char="●"/>
+            </a:pPr>
+            <a:r>
+              <a:rPr lang="en"/>
+              <a:t>Print(sum_of_ages) --🡪 1819</a:t>
+            </a:r>
+            <a:endParaRPr/>
+          </a:p>
+          <a:p>
+            <a:pPr marL="457200" lvl="0" indent="-298450" algn="l" rtl="0">
+              <a:lnSpc>
+                <a:spcPct val="100000"/>
+              </a:lnSpc>
+              <a:spcBef>
+                <a:spcPts val="0"/>
+              </a:spcBef>
+              <a:spcAft>
+                <a:spcPts val="0"/>
+              </a:spcAft>
+              <a:buSzPts val="1100"/>
+              <a:buChar char="●"/>
+            </a:pPr>
+            <a:r>
+              <a:rPr lang="en"/>
+              <a:t>Let’s say I want to use how old you will be in 4 years.  </a:t>
+            </a:r>
+            <a:endParaRPr/>
+          </a:p>
+          <a:p>
+            <a:pPr marL="457200" lvl="0" indent="-298450" algn="l" rtl="0">
+              <a:lnSpc>
+                <a:spcPct val="100000"/>
+              </a:lnSpc>
+              <a:spcBef>
+                <a:spcPts val="0"/>
+              </a:spcBef>
+              <a:spcAft>
+                <a:spcPts val="0"/>
+              </a:spcAft>
+              <a:buSzPts val="1100"/>
+              <a:buChar char="●"/>
+            </a:pPr>
+            <a:r>
+              <a:rPr lang="en"/>
+              <a:t>Num = int(age1) + int(age2)</a:t>
+            </a:r>
+            <a:endParaRPr/>
+          </a:p>
+          <a:p>
+            <a:pPr marL="457200" lvl="0" indent="-298450" algn="l" rtl="0">
+              <a:lnSpc>
+                <a:spcPct val="100000"/>
+              </a:lnSpc>
+              <a:spcBef>
+                <a:spcPts val="0"/>
+              </a:spcBef>
+              <a:spcAft>
+                <a:spcPts val="0"/>
+              </a:spcAft>
+              <a:buSzPts val="1100"/>
+              <a:buChar char="●"/>
+            </a:pPr>
+            <a:r>
+              <a:rPr lang="en"/>
+              <a:t>Print(num) --🡪 37</a:t>
             </a:r>
             <a:endParaRPr/>
           </a:p>
@@ -3573,6 +2814,108 @@
               <a:buNone/>
             </a:pPr>
             <a:endParaRPr/>
+          </a:p>
+          <a:p>
+            <a:pPr marL="457200" lvl="0" indent="-298450" algn="l" rtl="0">
+              <a:lnSpc>
+                <a:spcPct val="100000"/>
+              </a:lnSpc>
+              <a:spcBef>
+                <a:spcPts val="0"/>
+              </a:spcBef>
+              <a:spcAft>
+                <a:spcPts val="0"/>
+              </a:spcAft>
+              <a:buSzPts val="1100"/>
+              <a:buChar char="●"/>
+            </a:pPr>
+            <a:r>
+              <a:rPr lang="en"/>
+              <a:t>Print(type(num1))</a:t>
+            </a:r>
+            <a:endParaRPr/>
+          </a:p>
+          <a:p>
+            <a:pPr marL="457200" lvl="0" indent="-298450" algn="l" rtl="0">
+              <a:lnSpc>
+                <a:spcPct val="100000"/>
+              </a:lnSpc>
+              <a:spcBef>
+                <a:spcPts val="0"/>
+              </a:spcBef>
+              <a:spcAft>
+                <a:spcPts val="0"/>
+              </a:spcAft>
+              <a:buSzPts val="1100"/>
+              <a:buChar char="●"/>
+            </a:pPr>
+            <a:r>
+              <a:rPr lang="en"/>
+              <a:t>Age1 = int(age1)  &lt;&lt;&lt; now age1 is an integer because we overwrote it.</a:t>
+            </a:r>
+            <a:endParaRPr/>
+          </a:p>
+        </p:txBody>
+      </p:sp>
+      <p:sp>
+        <p:nvSpPr>
+          <p:cNvPr id="310" name="Google Shape;310;g364a009736c_2_230:notes"/>
+          <p:cNvSpPr txBox="1">
+            <a:spLocks noGrp="1"/>
+          </p:cNvSpPr>
+          <p:nvPr>
+            <p:ph type="sldNum" idx="12"/>
+          </p:nvPr>
+        </p:nvSpPr>
+        <p:spPr>
+          <a:xfrm>
+            <a:off x="0" y="0"/>
+            <a:ext cx="3000000" cy="3000000"/>
+          </a:xfrm>
+          <a:prstGeom prst="rect">
+            <a:avLst/>
+          </a:prstGeom>
+          <a:noFill/>
+          <a:ln>
+            <a:noFill/>
+          </a:ln>
+        </p:spPr>
+        <p:txBody>
+          <a:bodyPr spcFirstLastPara="1" wrap="square" lIns="91425" tIns="45700" rIns="91425" bIns="45700" anchor="t" anchorCtr="0">
+            <a:noAutofit/>
+          </a:bodyPr>
+          <a:lstStyle/>
+          <a:p>
+            <a:pPr marL="0" marR="0" lvl="0" indent="0" algn="l" rtl="0">
+              <a:spcBef>
+                <a:spcPts val="0"/>
+              </a:spcBef>
+              <a:spcAft>
+                <a:spcPts val="0"/>
+              </a:spcAft>
+              <a:buNone/>
+            </a:pPr>
+            <a:fld id="{00000000-1234-1234-1234-123412341234}" type="slidenum">
+              <a:rPr lang="en" sz="1800">
+                <a:solidFill>
+                  <a:schemeClr val="dk1"/>
+                </a:solidFill>
+                <a:latin typeface="Arial"/>
+                <a:ea typeface="Arial"/>
+                <a:cs typeface="Arial"/>
+                <a:sym typeface="Arial"/>
+              </a:rPr>
+              <a:t>27</a:t>
+            </a:fld>
+            <a:endParaRPr sz="1800">
+              <a:solidFill>
+                <a:schemeClr val="dk1"/>
+              </a:solidFill>
+              <a:latin typeface="Arial"/>
+              <a:ea typeface="Arial"/>
+              <a:cs typeface="Arial"/>
+              <a:sym typeface="Arial"/>
+            </a:endParaRPr>
           </a:p>
         </p:txBody>
       </p:sp>
@@ -3584,12 +2927,12 @@
 </p:notes>
 </file>
 
-<file path=ppt/notesSlides/notesSlide5.xml><?xml version="1.0" encoding="utf-8"?>
+<file path=ppt/notesSlides/notesSlide23.xml><?xml version="1.0" encoding="utf-8"?>
 <p:notes xmlns:a="http://schemas.openxmlformats.org/drawingml/2006/main" xmlns:r="http://schemas.openxmlformats.org/officeDocument/2006/relationships" xmlns:p="http://schemas.openxmlformats.org/presentationml/2006/main" showMasterSp="0" showMasterPhAnim="0">
   <p:cSld>
     <p:spTree>
       <p:nvGrpSpPr>
-        <p:cNvPr id="1" name="Shape 226"/>
+        <p:cNvPr id="1" name="Shape 351"/>
         <p:cNvGrpSpPr/>
         <p:nvPr/>
       </p:nvGrpSpPr>
@@ -3603,7 +2946,111 @@
       </p:grpSpPr>
       <p:sp>
         <p:nvSpPr>
-          <p:cNvPr id="227" name="Google Shape;227;g364a009736c_2_161:notes"/>
+          <p:cNvPr id="352" name="Google Shape;352;g364a009736c_2_267:notes"/>
+          <p:cNvSpPr txBox="1">
+            <a:spLocks noGrp="1"/>
+          </p:cNvSpPr>
+          <p:nvPr>
+            <p:ph type="body" idx="1"/>
+          </p:nvPr>
+        </p:nvSpPr>
+        <p:spPr>
+          <a:xfrm>
+            <a:off x="685800" y="4343400"/>
+            <a:ext cx="5486400" cy="4114800"/>
+          </a:xfrm>
+          <a:prstGeom prst="rect">
+            <a:avLst/>
+          </a:prstGeom>
+        </p:spPr>
+        <p:txBody>
+          <a:bodyPr spcFirstLastPara="1" wrap="square" lIns="91425" tIns="91425" rIns="91425" bIns="91425" anchor="t" anchorCtr="0">
+            <a:noAutofit/>
+          </a:bodyPr>
+          <a:lstStyle/>
+          <a:p>
+            <a:pPr marL="0" lvl="0" indent="0" algn="l" rtl="0">
+              <a:spcBef>
+                <a:spcPts val="0"/>
+              </a:spcBef>
+              <a:spcAft>
+                <a:spcPts val="0"/>
+              </a:spcAft>
+              <a:buNone/>
+            </a:pPr>
+            <a:endParaRPr/>
+          </a:p>
+        </p:txBody>
+      </p:sp>
+      <p:sp>
+        <p:nvSpPr>
+          <p:cNvPr id="353" name="Google Shape;353;g364a009736c_2_267:notes"/>
+          <p:cNvSpPr>
+            <a:spLocks noGrp="1" noRot="1" noChangeAspect="1"/>
+          </p:cNvSpPr>
+          <p:nvPr>
+            <p:ph type="sldImg" idx="2"/>
+          </p:nvPr>
+        </p:nvSpPr>
+        <p:spPr>
+          <a:xfrm>
+            <a:off x="381000" y="685800"/>
+            <a:ext cx="6096000" cy="3429000"/>
+          </a:xfrm>
+          <a:custGeom>
+            <a:avLst/>
+            <a:gdLst/>
+            <a:ahLst/>
+            <a:cxnLst/>
+            <a:rect l="l" t="t" r="r" b="b"/>
+            <a:pathLst>
+              <a:path w="120000" h="120000" extrusionOk="0">
+                <a:moveTo>
+                  <a:pt x="0" y="0"/>
+                </a:moveTo>
+                <a:lnTo>
+                  <a:pt x="120000" y="0"/>
+                </a:lnTo>
+                <a:lnTo>
+                  <a:pt x="120000" y="120000"/>
+                </a:lnTo>
+                <a:lnTo>
+                  <a:pt x="0" y="120000"/>
+                </a:lnTo>
+                <a:close/>
+              </a:path>
+            </a:pathLst>
+          </a:custGeom>
+        </p:spPr>
+      </p:sp>
+    </p:spTree>
+  </p:cSld>
+  <p:clrMapOvr>
+    <a:masterClrMapping/>
+  </p:clrMapOvr>
+</p:notes>
+</file>
+
+<file path=ppt/notesSlides/notesSlide24.xml><?xml version="1.0" encoding="utf-8"?>
+<p:notes xmlns:a="http://schemas.openxmlformats.org/drawingml/2006/main" xmlns:r="http://schemas.openxmlformats.org/officeDocument/2006/relationships" xmlns:p="http://schemas.openxmlformats.org/presentationml/2006/main" showMasterSp="0" showMasterPhAnim="0">
+  <p:cSld>
+    <p:spTree>
+      <p:nvGrpSpPr>
+        <p:cNvPr id="1" name="Shape 366"/>
+        <p:cNvGrpSpPr/>
+        <p:nvPr/>
+      </p:nvGrpSpPr>
+      <p:grpSpPr>
+        <a:xfrm>
+          <a:off x="0" y="0"/>
+          <a:ext cx="0" cy="0"/>
+          <a:chOff x="0" y="0"/>
+          <a:chExt cx="0" cy="0"/>
+        </a:xfrm>
+      </p:grpSpPr>
+      <p:sp>
+        <p:nvSpPr>
+          <p:cNvPr id="367" name="Google Shape;367;g364a009736c_2_281:notes"/>
           <p:cNvSpPr>
             <a:spLocks noGrp="1" noRot="1" noChangeAspect="1"/>
           </p:cNvSpPr>
@@ -3654,7 +3101,7 @@
       </p:sp>
       <p:sp>
         <p:nvSpPr>
-          <p:cNvPr id="228" name="Google Shape;228;g364a009736c_2_161:notes"/>
+          <p:cNvPr id="368" name="Google Shape;368;g364a009736c_2_281:notes"/>
           <p:cNvSpPr txBox="1">
             <a:spLocks noGrp="1"/>
           </p:cNvSpPr>
@@ -3681,6 +3128,66 @@
           </a:bodyPr>
           <a:lstStyle/>
           <a:p>
+            <a:pPr marL="457200" lvl="0" indent="-298450" algn="l" rtl="0">
+              <a:lnSpc>
+                <a:spcPct val="100000"/>
+              </a:lnSpc>
+              <a:spcBef>
+                <a:spcPts val="0"/>
+              </a:spcBef>
+              <a:spcAft>
+                <a:spcPts val="0"/>
+              </a:spcAft>
+              <a:buSzPts val="1100"/>
+              <a:buChar char="●"/>
+            </a:pPr>
+            <a:r>
+              <a:rPr lang="en"/>
+              <a:t>PEMDAS</a:t>
+            </a:r>
+            <a:endParaRPr/>
+          </a:p>
+          <a:p>
+            <a:pPr marL="457200" lvl="0" indent="-298450" algn="l" rtl="0">
+              <a:lnSpc>
+                <a:spcPct val="100000"/>
+              </a:lnSpc>
+              <a:spcBef>
+                <a:spcPts val="0"/>
+              </a:spcBef>
+              <a:spcAft>
+                <a:spcPts val="0"/>
+              </a:spcAft>
+              <a:buSzPts val="1100"/>
+              <a:buChar char="●"/>
+            </a:pPr>
+            <a:r>
+              <a:rPr lang="en"/>
+              <a:t>Please Excuse My Dear Aunt Sally</a:t>
+            </a:r>
+            <a:endParaRPr/>
+          </a:p>
+          <a:p>
+            <a:pPr marL="457200" lvl="0" indent="-298450" algn="l" rtl="0">
+              <a:lnSpc>
+                <a:spcPct val="100000"/>
+              </a:lnSpc>
+              <a:spcBef>
+                <a:spcPts val="0"/>
+              </a:spcBef>
+              <a:spcAft>
+                <a:spcPts val="0"/>
+              </a:spcAft>
+              <a:buSzPts val="1100"/>
+              <a:buChar char="●"/>
+            </a:pPr>
+            <a:r>
+              <a:rPr lang="en"/>
+              <a:t>Parentheses, Exponent, Multiply/Divide, Add/Subtract</a:t>
+            </a:r>
+            <a:endParaRPr/>
+          </a:p>
+          <a:p>
             <a:pPr marL="457200" lvl="0" indent="-228600" algn="l" rtl="0">
               <a:lnSpc>
                 <a:spcPct val="100000"/>
@@ -3695,6 +3202,68 @@
               <a:buNone/>
             </a:pPr>
             <a:endParaRPr/>
+          </a:p>
+        </p:txBody>
+      </p:sp>
+      <p:sp>
+        <p:nvSpPr>
+          <p:cNvPr id="369" name="Google Shape;369;g364a009736c_2_281:notes"/>
+          <p:cNvSpPr txBox="1">
+            <a:spLocks noGrp="1"/>
+          </p:cNvSpPr>
+          <p:nvPr>
+            <p:ph type="sldNum" idx="12"/>
+          </p:nvPr>
+        </p:nvSpPr>
+        <p:spPr>
+          <a:xfrm>
+            <a:off x="0" y="0"/>
+            <a:ext cx="3000000" cy="3000000"/>
+          </a:xfrm>
+          <a:prstGeom prst="rect">
+            <a:avLst/>
+          </a:prstGeom>
+          <a:noFill/>
+          <a:ln>
+            <a:noFill/>
+          </a:ln>
+        </p:spPr>
+        <p:txBody>
+          <a:bodyPr spcFirstLastPara="1" wrap="square" lIns="91425" tIns="45700" rIns="91425" bIns="45700" anchor="t" anchorCtr="0">
+            <a:noAutofit/>
+          </a:bodyPr>
+          <a:lstStyle/>
+          <a:p>
+            <a:pPr marL="0" marR="0" lvl="0" indent="0" algn="l" rtl="0">
+              <a:spcBef>
+                <a:spcPts val="0"/>
+              </a:spcBef>
+              <a:spcAft>
+                <a:spcPts val="0"/>
+              </a:spcAft>
+              <a:buNone/>
+            </a:pPr>
+            <a:fld id="{00000000-1234-1234-1234-123412341234}" type="slidenum">
+              <a:rPr lang="en" sz="1800">
+                <a:solidFill>
+                  <a:schemeClr val="dk1"/>
+                </a:solidFill>
+                <a:latin typeface="Arial"/>
+                <a:ea typeface="Arial"/>
+                <a:cs typeface="Arial"/>
+                <a:sym typeface="Arial"/>
+              </a:rPr>
+              <a:t>29</a:t>
+            </a:fld>
+            <a:endParaRPr sz="1800">
+              <a:solidFill>
+                <a:schemeClr val="dk1"/>
+              </a:solidFill>
+              <a:latin typeface="Arial"/>
+              <a:ea typeface="Arial"/>
+              <a:cs typeface="Arial"/>
+              <a:sym typeface="Arial"/>
+            </a:endParaRPr>
           </a:p>
         </p:txBody>
       </p:sp>
@@ -3706,12 +3275,12 @@
 </p:notes>
 </file>
 
-<file path=ppt/notesSlides/notesSlide6.xml><?xml version="1.0" encoding="utf-8"?>
+<file path=ppt/notesSlides/notesSlide25.xml><?xml version="1.0" encoding="utf-8"?>
 <p:notes xmlns:a="http://schemas.openxmlformats.org/drawingml/2006/main" xmlns:r="http://schemas.openxmlformats.org/officeDocument/2006/relationships" xmlns:p="http://schemas.openxmlformats.org/presentationml/2006/main" showMasterSp="0" showMasterPhAnim="0">
   <p:cSld>
     <p:spTree>
       <p:nvGrpSpPr>
-        <p:cNvPr id="1" name="Shape 238"/>
+        <p:cNvPr id="1" name="Shape 314"/>
         <p:cNvGrpSpPr/>
         <p:nvPr/>
       </p:nvGrpSpPr>
@@ -3725,7 +3294,7 @@
       </p:grpSpPr>
       <p:sp>
         <p:nvSpPr>
-          <p:cNvPr id="239" name="Google Shape;239;g364a009736c_2_172:notes"/>
+          <p:cNvPr id="315" name="Google Shape;315;g364a009736c_2_236:notes"/>
           <p:cNvSpPr>
             <a:spLocks noGrp="1" noRot="1" noChangeAspect="1"/>
           </p:cNvSpPr>
@@ -3776,7 +3345,7 @@
       </p:sp>
       <p:sp>
         <p:nvSpPr>
-          <p:cNvPr id="240" name="Google Shape;240;g364a009736c_2_172:notes"/>
+          <p:cNvPr id="316" name="Google Shape;316;g364a009736c_2_236:notes"/>
           <p:cNvSpPr txBox="1">
             <a:spLocks noGrp="1"/>
           </p:cNvSpPr>
@@ -3816,7 +3385,69 @@
               <a:buSzPts val="1100"/>
               <a:buNone/>
             </a:pPr>
-            <a:endParaRPr/>
+            <a:endParaRPr dirty="0"/>
+          </a:p>
+        </p:txBody>
+      </p:sp>
+      <p:sp>
+        <p:nvSpPr>
+          <p:cNvPr id="317" name="Google Shape;317;g364a009736c_2_236:notes"/>
+          <p:cNvSpPr txBox="1">
+            <a:spLocks noGrp="1"/>
+          </p:cNvSpPr>
+          <p:nvPr>
+            <p:ph type="sldNum" idx="12"/>
+          </p:nvPr>
+        </p:nvSpPr>
+        <p:spPr>
+          <a:xfrm>
+            <a:off x="0" y="0"/>
+            <a:ext cx="3000000" cy="3000000"/>
+          </a:xfrm>
+          <a:prstGeom prst="rect">
+            <a:avLst/>
+          </a:prstGeom>
+          <a:noFill/>
+          <a:ln>
+            <a:noFill/>
+          </a:ln>
+        </p:spPr>
+        <p:txBody>
+          <a:bodyPr spcFirstLastPara="1" wrap="square" lIns="91425" tIns="45700" rIns="91425" bIns="45700" anchor="t" anchorCtr="0">
+            <a:noAutofit/>
+          </a:bodyPr>
+          <a:lstStyle/>
+          <a:p>
+            <a:pPr marL="0" marR="0" lvl="0" indent="0" algn="l" rtl="0">
+              <a:spcBef>
+                <a:spcPts val="0"/>
+              </a:spcBef>
+              <a:spcAft>
+                <a:spcPts val="0"/>
+              </a:spcAft>
+              <a:buNone/>
+            </a:pPr>
+            <a:fld id="{00000000-1234-1234-1234-123412341234}" type="slidenum">
+              <a:rPr lang="en" sz="1800">
+                <a:solidFill>
+                  <a:schemeClr val="dk1"/>
+                </a:solidFill>
+                <a:latin typeface="Arial"/>
+                <a:ea typeface="Arial"/>
+                <a:cs typeface="Arial"/>
+                <a:sym typeface="Arial"/>
+              </a:rPr>
+              <a:t>30</a:t>
+            </a:fld>
+            <a:endParaRPr sz="1800">
+              <a:solidFill>
+                <a:schemeClr val="dk1"/>
+              </a:solidFill>
+              <a:latin typeface="Arial"/>
+              <a:ea typeface="Arial"/>
+              <a:cs typeface="Arial"/>
+              <a:sym typeface="Arial"/>
+            </a:endParaRPr>
           </a:p>
         </p:txBody>
       </p:sp>
@@ -3828,12 +3459,12 @@
 </p:notes>
 </file>
 
-<file path=ppt/notesSlides/notesSlide7.xml><?xml version="1.0" encoding="utf-8"?>
+<file path=ppt/notesSlides/notesSlide26.xml><?xml version="1.0" encoding="utf-8"?>
 <p:notes xmlns:a="http://schemas.openxmlformats.org/drawingml/2006/main" xmlns:r="http://schemas.openxmlformats.org/officeDocument/2006/relationships" xmlns:p="http://schemas.openxmlformats.org/presentationml/2006/main" showMasterSp="0" showMasterPhAnim="0">
   <p:cSld>
     <p:spTree>
       <p:nvGrpSpPr>
-        <p:cNvPr id="1" name="Shape 244"/>
+        <p:cNvPr id="1" name="Shape 327"/>
         <p:cNvGrpSpPr/>
         <p:nvPr/>
       </p:nvGrpSpPr>
@@ -3847,7 +3478,123 @@
       </p:grpSpPr>
       <p:sp>
         <p:nvSpPr>
-          <p:cNvPr id="245" name="Google Shape;245;g364a009736c_2_177:notes"/>
+          <p:cNvPr id="328" name="Google Shape;328;g364a009736c_2_247:notes"/>
+          <p:cNvSpPr txBox="1">
+            <a:spLocks noGrp="1"/>
+          </p:cNvSpPr>
+          <p:nvPr>
+            <p:ph type="body" idx="1"/>
+          </p:nvPr>
+        </p:nvSpPr>
+        <p:spPr>
+          <a:xfrm>
+            <a:off x="685800" y="4343400"/>
+            <a:ext cx="5486400" cy="4114800"/>
+          </a:xfrm>
+          <a:prstGeom prst="rect">
+            <a:avLst/>
+          </a:prstGeom>
+        </p:spPr>
+        <p:txBody>
+          <a:bodyPr spcFirstLastPara="1" wrap="square" lIns="91425" tIns="91425" rIns="91425" bIns="91425" anchor="t" anchorCtr="0">
+            <a:noAutofit/>
+          </a:bodyPr>
+          <a:lstStyle/>
+          <a:p>
+            <a:pPr marL="0" lvl="0" indent="0" algn="l" rtl="0">
+              <a:spcBef>
+                <a:spcPts val="0"/>
+              </a:spcBef>
+              <a:spcAft>
+                <a:spcPts val="0"/>
+              </a:spcAft>
+              <a:buNone/>
+            </a:pPr>
+            <a:endParaRPr/>
+          </a:p>
+        </p:txBody>
+      </p:sp>
+      <p:sp>
+        <p:nvSpPr>
+          <p:cNvPr id="329" name="Google Shape;329;g364a009736c_2_247:notes"/>
+          <p:cNvSpPr>
+            <a:spLocks noGrp="1" noRot="1" noChangeAspect="1"/>
+          </p:cNvSpPr>
+          <p:nvPr>
+            <p:ph type="sldImg" idx="2"/>
+          </p:nvPr>
+        </p:nvSpPr>
+        <p:spPr>
+          <a:xfrm>
+            <a:off x="381000" y="685800"/>
+            <a:ext cx="6096000" cy="3429000"/>
+          </a:xfrm>
+          <a:custGeom>
+            <a:avLst/>
+            <a:gdLst/>
+            <a:ahLst/>
+            <a:cxnLst/>
+            <a:rect l="l" t="t" r="r" b="b"/>
+            <a:pathLst>
+              <a:path w="120000" h="120000" extrusionOk="0">
+                <a:moveTo>
+                  <a:pt x="0" y="0"/>
+                </a:moveTo>
+                <a:lnTo>
+                  <a:pt x="120000" y="0"/>
+                </a:lnTo>
+                <a:lnTo>
+                  <a:pt x="120000" y="120000"/>
+                </a:lnTo>
+                <a:lnTo>
+                  <a:pt x="0" y="120000"/>
+                </a:lnTo>
+                <a:close/>
+              </a:path>
+            </a:pathLst>
+          </a:custGeom>
+        </p:spPr>
+      </p:sp>
+    </p:spTree>
+  </p:cSld>
+  <p:clrMapOvr>
+    <a:masterClrMapping/>
+  </p:clrMapOvr>
+</p:notes>
+</file>
+
+<file path=ppt/notesSlides/notesSlide27.xml><?xml version="1.0" encoding="utf-8"?>
+<p:notes xmlns:a="http://schemas.openxmlformats.org/drawingml/2006/main" xmlns:r="http://schemas.openxmlformats.org/officeDocument/2006/relationships" xmlns:p="http://schemas.openxmlformats.org/presentationml/2006/main" showMasterSp="0" showMasterPhAnim="0">
+  <p:cSld>
+    <p:spTree>
+      <p:nvGrpSpPr>
+        <p:cNvPr id="1" name="Shape 314">
+          <a:extLst>
+            <a:ext uri="{FF2B5EF4-FFF2-40B4-BE49-F238E27FC236}">
+              <a16:creationId xmlns:a16="http://schemas.microsoft.com/office/drawing/2014/main" id="{3AD028B9-EF2E-39CC-8555-E5F64A55D450}"/>
+            </a:ext>
+          </a:extLst>
+        </p:cNvPr>
+        <p:cNvGrpSpPr/>
+        <p:nvPr/>
+      </p:nvGrpSpPr>
+      <p:grpSpPr>
+        <a:xfrm>
+          <a:off x="0" y="0"/>
+          <a:ext cx="0" cy="0"/>
+          <a:chOff x="0" y="0"/>
+          <a:chExt cx="0" cy="0"/>
+        </a:xfrm>
+      </p:grpSpPr>
+      <p:sp>
+        <p:nvSpPr>
+          <p:cNvPr id="315" name="Google Shape;315;g364a009736c_2_236:notes">
+            <a:extLst>
+              <a:ext uri="{FF2B5EF4-FFF2-40B4-BE49-F238E27FC236}">
+                <a16:creationId xmlns:a16="http://schemas.microsoft.com/office/drawing/2014/main" id="{FBFC26D6-1573-BE95-405B-F3C7BB10ED97}"/>
+              </a:ext>
+            </a:extLst>
+          </p:cNvPr>
           <p:cNvSpPr>
             <a:spLocks noGrp="1" noRot="1" noChangeAspect="1"/>
           </p:cNvSpPr>
@@ -3898,7 +3645,13 @@
       </p:sp>
       <p:sp>
         <p:nvSpPr>
-          <p:cNvPr id="246" name="Google Shape;246;g364a009736c_2_177:notes"/>
+          <p:cNvPr id="316" name="Google Shape;316;g364a009736c_2_236:notes">
+            <a:extLst>
+              <a:ext uri="{FF2B5EF4-FFF2-40B4-BE49-F238E27FC236}">
+                <a16:creationId xmlns:a16="http://schemas.microsoft.com/office/drawing/2014/main" id="{E548D4FE-6C3E-078F-0EAE-CD7ACC04C0BA}"/>
+              </a:ext>
+            </a:extLst>
+          </p:cNvPr>
           <p:cNvSpPr txBox="1">
             <a:spLocks noGrp="1"/>
           </p:cNvSpPr>
@@ -3938,11 +3691,84 @@
               <a:buSzPts val="1100"/>
               <a:buNone/>
             </a:pPr>
-            <a:endParaRPr/>
+            <a:endParaRPr dirty="0"/>
+          </a:p>
+        </p:txBody>
+      </p:sp>
+      <p:sp>
+        <p:nvSpPr>
+          <p:cNvPr id="317" name="Google Shape;317;g364a009736c_2_236:notes">
+            <a:extLst>
+              <a:ext uri="{FF2B5EF4-FFF2-40B4-BE49-F238E27FC236}">
+                <a16:creationId xmlns:a16="http://schemas.microsoft.com/office/drawing/2014/main" id="{6EF7C67B-0491-C73F-72D3-D4A8999C7EC1}"/>
+              </a:ext>
+            </a:extLst>
+          </p:cNvPr>
+          <p:cNvSpPr txBox="1">
+            <a:spLocks noGrp="1"/>
+          </p:cNvSpPr>
+          <p:nvPr>
+            <p:ph type="sldNum" idx="12"/>
+          </p:nvPr>
+        </p:nvSpPr>
+        <p:spPr>
+          <a:xfrm>
+            <a:off x="0" y="0"/>
+            <a:ext cx="3000000" cy="3000000"/>
+          </a:xfrm>
+          <a:prstGeom prst="rect">
+            <a:avLst/>
+          </a:prstGeom>
+          <a:noFill/>
+          <a:ln>
+            <a:noFill/>
+          </a:ln>
+        </p:spPr>
+        <p:txBody>
+          <a:bodyPr spcFirstLastPara="1" wrap="square" lIns="91425" tIns="45700" rIns="91425" bIns="45700" anchor="t" anchorCtr="0">
+            <a:noAutofit/>
+          </a:bodyPr>
+          <a:lstStyle/>
+          <a:p>
+            <a:pPr marL="0" marR="0" lvl="0" indent="0" algn="l" rtl="0">
+              <a:spcBef>
+                <a:spcPts val="0"/>
+              </a:spcBef>
+              <a:spcAft>
+                <a:spcPts val="0"/>
+              </a:spcAft>
+              <a:buNone/>
+            </a:pPr>
+            <a:fld id="{00000000-1234-1234-1234-123412341234}" type="slidenum">
+              <a:rPr lang="en" sz="1800">
+                <a:solidFill>
+                  <a:schemeClr val="dk1"/>
+                </a:solidFill>
+                <a:latin typeface="Arial"/>
+                <a:ea typeface="Arial"/>
+                <a:cs typeface="Arial"/>
+                <a:sym typeface="Arial"/>
+              </a:rPr>
+              <a:t>35</a:t>
+            </a:fld>
+            <a:endParaRPr sz="1800">
+              <a:solidFill>
+                <a:schemeClr val="dk1"/>
+              </a:solidFill>
+              <a:latin typeface="Arial"/>
+              <a:ea typeface="Arial"/>
+              <a:cs typeface="Arial"/>
+              <a:sym typeface="Arial"/>
+            </a:endParaRPr>
           </a:p>
         </p:txBody>
       </p:sp>
     </p:spTree>
+    <p:extLst>
+      <p:ext uri="{BB962C8B-B14F-4D97-AF65-F5344CB8AC3E}">
+        <p14:creationId xmlns:p14="http://schemas.microsoft.com/office/powerpoint/2010/main" val="2968394695"/>
+      </p:ext>
+    </p:extLst>
   </p:cSld>
   <p:clrMapOvr>
     <a:masterClrMapping/>
@@ -3950,12 +3776,12 @@
 </p:notes>
 </file>
 
-<file path=ppt/notesSlides/notesSlide8.xml><?xml version="1.0" encoding="utf-8"?>
+<file path=ppt/notesSlides/notesSlide28.xml><?xml version="1.0" encoding="utf-8"?>
 <p:notes xmlns:a="http://schemas.openxmlformats.org/drawingml/2006/main" xmlns:r="http://schemas.openxmlformats.org/officeDocument/2006/relationships" xmlns:p="http://schemas.openxmlformats.org/presentationml/2006/main" showMasterSp="0" showMasterPhAnim="0">
   <p:cSld>
     <p:spTree>
       <p:nvGrpSpPr>
-        <p:cNvPr id="1" name="Shape 250"/>
+        <p:cNvPr id="1" name="Shape 373"/>
         <p:cNvGrpSpPr/>
         <p:nvPr/>
       </p:nvGrpSpPr>
@@ -3969,7 +3795,7 @@
       </p:grpSpPr>
       <p:sp>
         <p:nvSpPr>
-          <p:cNvPr id="251" name="Google Shape;251;g364a009736c_2_182:notes"/>
+          <p:cNvPr id="374" name="Google Shape;374;g364a009736c_2_287:notes"/>
           <p:cNvSpPr>
             <a:spLocks noGrp="1" noRot="1" noChangeAspect="1"/>
           </p:cNvSpPr>
@@ -4020,7 +3846,7 @@
       </p:sp>
       <p:sp>
         <p:nvSpPr>
-          <p:cNvPr id="252" name="Google Shape;252;g364a009736c_2_182:notes"/>
+          <p:cNvPr id="375" name="Google Shape;375;g364a009736c_2_287:notes"/>
           <p:cNvSpPr txBox="1">
             <a:spLocks noGrp="1"/>
           </p:cNvSpPr>
@@ -4064,6 +3890,68 @@
           </a:p>
         </p:txBody>
       </p:sp>
+      <p:sp>
+        <p:nvSpPr>
+          <p:cNvPr id="376" name="Google Shape;376;g364a009736c_2_287:notes"/>
+          <p:cNvSpPr txBox="1">
+            <a:spLocks noGrp="1"/>
+          </p:cNvSpPr>
+          <p:nvPr>
+            <p:ph type="sldNum" idx="12"/>
+          </p:nvPr>
+        </p:nvSpPr>
+        <p:spPr>
+          <a:xfrm>
+            <a:off x="0" y="0"/>
+            <a:ext cx="3000000" cy="3000000"/>
+          </a:xfrm>
+          <a:prstGeom prst="rect">
+            <a:avLst/>
+          </a:prstGeom>
+          <a:noFill/>
+          <a:ln>
+            <a:noFill/>
+          </a:ln>
+        </p:spPr>
+        <p:txBody>
+          <a:bodyPr spcFirstLastPara="1" wrap="square" lIns="91425" tIns="45700" rIns="91425" bIns="45700" anchor="t" anchorCtr="0">
+            <a:noAutofit/>
+          </a:bodyPr>
+          <a:lstStyle/>
+          <a:p>
+            <a:pPr marL="0" marR="0" lvl="0" indent="0" algn="l" rtl="0">
+              <a:spcBef>
+                <a:spcPts val="0"/>
+              </a:spcBef>
+              <a:spcAft>
+                <a:spcPts val="0"/>
+              </a:spcAft>
+              <a:buNone/>
+            </a:pPr>
+            <a:fld id="{00000000-1234-1234-1234-123412341234}" type="slidenum">
+              <a:rPr lang="en" sz="1800">
+                <a:solidFill>
+                  <a:schemeClr val="dk1"/>
+                </a:solidFill>
+                <a:latin typeface="Arial"/>
+                <a:ea typeface="Arial"/>
+                <a:cs typeface="Arial"/>
+                <a:sym typeface="Arial"/>
+              </a:rPr>
+              <a:t>36</a:t>
+            </a:fld>
+            <a:endParaRPr sz="1800">
+              <a:solidFill>
+                <a:schemeClr val="dk1"/>
+              </a:solidFill>
+              <a:latin typeface="Arial"/>
+              <a:ea typeface="Arial"/>
+              <a:cs typeface="Arial"/>
+              <a:sym typeface="Arial"/>
+            </a:endParaRPr>
+          </a:p>
+        </p:txBody>
+      </p:sp>
     </p:spTree>
   </p:cSld>
   <p:clrMapOvr>
@@ -4072,15 +3960,15 @@
 </p:notes>
 </file>
 
-<file path=ppt/notesSlides/notesSlide9.xml><?xml version="1.0" encoding="utf-8"?>
+<file path=ppt/notesSlides/notesSlide29.xml><?xml version="1.0" encoding="utf-8"?>
 <p:notes xmlns:a="http://schemas.openxmlformats.org/drawingml/2006/main" xmlns:r="http://schemas.openxmlformats.org/officeDocument/2006/relationships" xmlns:p="http://schemas.openxmlformats.org/presentationml/2006/main" showMasterSp="0" showMasterPhAnim="0">
   <p:cSld>
     <p:spTree>
       <p:nvGrpSpPr>
-        <p:cNvPr id="1" name="Shape 256">
+        <p:cNvPr id="1" name="Shape 373">
           <a:extLst>
             <a:ext uri="{FF2B5EF4-FFF2-40B4-BE49-F238E27FC236}">
-              <a16:creationId xmlns:a16="http://schemas.microsoft.com/office/drawing/2014/main" id="{4543D9CC-7E56-CC55-4FF8-9BB5116A0A43}"/>
+              <a16:creationId xmlns:a16="http://schemas.microsoft.com/office/drawing/2014/main" id="{EFAE6C7F-0239-263C-40F0-4409AE397822}"/>
             </a:ext>
           </a:extLst>
         </p:cNvPr>
@@ -4097,13 +3985,336 @@
       </p:grpSpPr>
       <p:sp>
         <p:nvSpPr>
-          <p:cNvPr id="257" name="Google Shape;257;g364a009736c_2_187:notes">
+          <p:cNvPr id="374" name="Google Shape;374;g364a009736c_2_287:notes">
             <a:extLst>
               <a:ext uri="{FF2B5EF4-FFF2-40B4-BE49-F238E27FC236}">
-                <a16:creationId xmlns:a16="http://schemas.microsoft.com/office/drawing/2014/main" id="{2BDAE34B-4BF1-52EA-A461-957F869870D9}"/>
+                <a16:creationId xmlns:a16="http://schemas.microsoft.com/office/drawing/2014/main" id="{A7F07626-F769-63ED-A8C5-D934B2163733}"/>
               </a:ext>
             </a:extLst>
           </p:cNvPr>
+          <p:cNvSpPr>
+            <a:spLocks noGrp="1" noRot="1" noChangeAspect="1"/>
+          </p:cNvSpPr>
+          <p:nvPr>
+            <p:ph type="sldImg" idx="2"/>
+          </p:nvPr>
+        </p:nvSpPr>
+        <p:spPr>
+          <a:xfrm>
+            <a:off x="381000" y="685800"/>
+            <a:ext cx="6096000" cy="3429000"/>
+          </a:xfrm>
+          <a:custGeom>
+            <a:avLst/>
+            <a:gdLst/>
+            <a:ahLst/>
+            <a:cxnLst/>
+            <a:rect l="l" t="t" r="r" b="b"/>
+            <a:pathLst>
+              <a:path w="120000" h="120000" extrusionOk="0">
+                <a:moveTo>
+                  <a:pt x="0" y="0"/>
+                </a:moveTo>
+                <a:lnTo>
+                  <a:pt x="120000" y="0"/>
+                </a:lnTo>
+                <a:lnTo>
+                  <a:pt x="120000" y="120000"/>
+                </a:lnTo>
+                <a:lnTo>
+                  <a:pt x="0" y="120000"/>
+                </a:lnTo>
+                <a:close/>
+              </a:path>
+            </a:pathLst>
+          </a:custGeom>
+          <a:noFill/>
+          <a:ln w="9525" cap="flat" cmpd="sng">
+            <a:solidFill>
+              <a:srgbClr val="000000"/>
+            </a:solidFill>
+            <a:prstDash val="solid"/>
+            <a:round/>
+            <a:headEnd type="none" w="sm" len="sm"/>
+            <a:tailEnd type="none" w="sm" len="sm"/>
+          </a:ln>
+        </p:spPr>
+      </p:sp>
+      <p:sp>
+        <p:nvSpPr>
+          <p:cNvPr id="375" name="Google Shape;375;g364a009736c_2_287:notes">
+            <a:extLst>
+              <a:ext uri="{FF2B5EF4-FFF2-40B4-BE49-F238E27FC236}">
+                <a16:creationId xmlns:a16="http://schemas.microsoft.com/office/drawing/2014/main" id="{3A56F53B-8AFE-75CA-FB1B-B69C1DE075F5}"/>
+              </a:ext>
+            </a:extLst>
+          </p:cNvPr>
+          <p:cNvSpPr txBox="1">
+            <a:spLocks noGrp="1"/>
+          </p:cNvSpPr>
+          <p:nvPr>
+            <p:ph type="body" idx="1"/>
+          </p:nvPr>
+        </p:nvSpPr>
+        <p:spPr>
+          <a:xfrm>
+            <a:off x="685800" y="4343400"/>
+            <a:ext cx="5486400" cy="4114800"/>
+          </a:xfrm>
+          <a:prstGeom prst="rect">
+            <a:avLst/>
+          </a:prstGeom>
+          <a:noFill/>
+          <a:ln>
+            <a:noFill/>
+          </a:ln>
+        </p:spPr>
+        <p:txBody>
+          <a:bodyPr spcFirstLastPara="1" wrap="square" lIns="91425" tIns="91425" rIns="91425" bIns="91425" anchor="t" anchorCtr="0">
+            <a:noAutofit/>
+          </a:bodyPr>
+          <a:lstStyle/>
+          <a:p>
+            <a:pPr marL="457200" lvl="0" indent="-228600" algn="l" rtl="0">
+              <a:lnSpc>
+                <a:spcPct val="100000"/>
+              </a:lnSpc>
+              <a:spcBef>
+                <a:spcPts val="0"/>
+              </a:spcBef>
+              <a:spcAft>
+                <a:spcPts val="0"/>
+              </a:spcAft>
+              <a:buSzPts val="1100"/>
+              <a:buNone/>
+            </a:pPr>
+            <a:endParaRPr/>
+          </a:p>
+        </p:txBody>
+      </p:sp>
+      <p:sp>
+        <p:nvSpPr>
+          <p:cNvPr id="376" name="Google Shape;376;g364a009736c_2_287:notes">
+            <a:extLst>
+              <a:ext uri="{FF2B5EF4-FFF2-40B4-BE49-F238E27FC236}">
+                <a16:creationId xmlns:a16="http://schemas.microsoft.com/office/drawing/2014/main" id="{E4C97AA2-01B3-E850-B0A7-96445DCBC72E}"/>
+              </a:ext>
+            </a:extLst>
+          </p:cNvPr>
+          <p:cNvSpPr txBox="1">
+            <a:spLocks noGrp="1"/>
+          </p:cNvSpPr>
+          <p:nvPr>
+            <p:ph type="sldNum" idx="12"/>
+          </p:nvPr>
+        </p:nvSpPr>
+        <p:spPr>
+          <a:xfrm>
+            <a:off x="0" y="0"/>
+            <a:ext cx="3000000" cy="3000000"/>
+          </a:xfrm>
+          <a:prstGeom prst="rect">
+            <a:avLst/>
+          </a:prstGeom>
+          <a:noFill/>
+          <a:ln>
+            <a:noFill/>
+          </a:ln>
+        </p:spPr>
+        <p:txBody>
+          <a:bodyPr spcFirstLastPara="1" wrap="square" lIns="91425" tIns="45700" rIns="91425" bIns="45700" anchor="t" anchorCtr="0">
+            <a:noAutofit/>
+          </a:bodyPr>
+          <a:lstStyle/>
+          <a:p>
+            <a:pPr marL="0" marR="0" lvl="0" indent="0" algn="l" rtl="0">
+              <a:spcBef>
+                <a:spcPts val="0"/>
+              </a:spcBef>
+              <a:spcAft>
+                <a:spcPts val="0"/>
+              </a:spcAft>
+              <a:buNone/>
+            </a:pPr>
+            <a:fld id="{00000000-1234-1234-1234-123412341234}" type="slidenum">
+              <a:rPr lang="en" sz="1800">
+                <a:solidFill>
+                  <a:schemeClr val="dk1"/>
+                </a:solidFill>
+                <a:latin typeface="Arial"/>
+                <a:ea typeface="Arial"/>
+                <a:cs typeface="Arial"/>
+                <a:sym typeface="Arial"/>
+              </a:rPr>
+              <a:t>37</a:t>
+            </a:fld>
+            <a:endParaRPr sz="1800">
+              <a:solidFill>
+                <a:schemeClr val="dk1"/>
+              </a:solidFill>
+              <a:latin typeface="Arial"/>
+              <a:ea typeface="Arial"/>
+              <a:cs typeface="Arial"/>
+              <a:sym typeface="Arial"/>
+            </a:endParaRPr>
+          </a:p>
+        </p:txBody>
+      </p:sp>
+    </p:spTree>
+    <p:extLst>
+      <p:ext uri="{BB962C8B-B14F-4D97-AF65-F5344CB8AC3E}">
+        <p14:creationId xmlns:p14="http://schemas.microsoft.com/office/powerpoint/2010/main" val="1210229669"/>
+      </p:ext>
+    </p:extLst>
+  </p:cSld>
+  <p:clrMapOvr>
+    <a:masterClrMapping/>
+  </p:clrMapOvr>
+</p:notes>
+</file>
+
+<file path=ppt/notesSlides/notesSlide3.xml><?xml version="1.0" encoding="utf-8"?>
+<p:notes xmlns:a="http://schemas.openxmlformats.org/drawingml/2006/main" xmlns:r="http://schemas.openxmlformats.org/officeDocument/2006/relationships" xmlns:p="http://schemas.openxmlformats.org/presentationml/2006/main" showMasterSp="0" showMasterPhAnim="0">
+  <p:cSld>
+    <p:spTree>
+      <p:nvGrpSpPr>
+        <p:cNvPr id="1" name="Shape 213"/>
+        <p:cNvGrpSpPr/>
+        <p:nvPr/>
+      </p:nvGrpSpPr>
+      <p:grpSpPr>
+        <a:xfrm>
+          <a:off x="0" y="0"/>
+          <a:ext cx="0" cy="0"/>
+          <a:chOff x="0" y="0"/>
+          <a:chExt cx="0" cy="0"/>
+        </a:xfrm>
+      </p:grpSpPr>
+      <p:sp>
+        <p:nvSpPr>
+          <p:cNvPr id="214" name="Google Shape;214;g364a009736c_2_150:notes"/>
+          <p:cNvSpPr>
+            <a:spLocks noGrp="1" noRot="1" noChangeAspect="1"/>
+          </p:cNvSpPr>
+          <p:nvPr>
+            <p:ph type="sldImg" idx="2"/>
+          </p:nvPr>
+        </p:nvSpPr>
+        <p:spPr>
+          <a:xfrm>
+            <a:off x="381000" y="685800"/>
+            <a:ext cx="6096000" cy="3429000"/>
+          </a:xfrm>
+          <a:custGeom>
+            <a:avLst/>
+            <a:gdLst/>
+            <a:ahLst/>
+            <a:cxnLst/>
+            <a:rect l="l" t="t" r="r" b="b"/>
+            <a:pathLst>
+              <a:path w="120000" h="120000" extrusionOk="0">
+                <a:moveTo>
+                  <a:pt x="0" y="0"/>
+                </a:moveTo>
+                <a:lnTo>
+                  <a:pt x="120000" y="0"/>
+                </a:lnTo>
+                <a:lnTo>
+                  <a:pt x="120000" y="120000"/>
+                </a:lnTo>
+                <a:lnTo>
+                  <a:pt x="0" y="120000"/>
+                </a:lnTo>
+                <a:close/>
+              </a:path>
+            </a:pathLst>
+          </a:custGeom>
+          <a:noFill/>
+          <a:ln w="9525" cap="flat" cmpd="sng">
+            <a:solidFill>
+              <a:srgbClr val="000000"/>
+            </a:solidFill>
+            <a:prstDash val="solid"/>
+            <a:round/>
+            <a:headEnd type="none" w="sm" len="sm"/>
+            <a:tailEnd type="none" w="sm" len="sm"/>
+          </a:ln>
+        </p:spPr>
+      </p:sp>
+      <p:sp>
+        <p:nvSpPr>
+          <p:cNvPr id="215" name="Google Shape;215;g364a009736c_2_150:notes"/>
+          <p:cNvSpPr txBox="1">
+            <a:spLocks noGrp="1"/>
+          </p:cNvSpPr>
+          <p:nvPr>
+            <p:ph type="body" idx="1"/>
+          </p:nvPr>
+        </p:nvSpPr>
+        <p:spPr>
+          <a:xfrm>
+            <a:off x="685800" y="4343400"/>
+            <a:ext cx="5486400" cy="4114800"/>
+          </a:xfrm>
+          <a:prstGeom prst="rect">
+            <a:avLst/>
+          </a:prstGeom>
+          <a:noFill/>
+          <a:ln>
+            <a:noFill/>
+          </a:ln>
+        </p:spPr>
+        <p:txBody>
+          <a:bodyPr spcFirstLastPara="1" wrap="square" lIns="91425" tIns="91425" rIns="91425" bIns="91425" anchor="t" anchorCtr="0">
+            <a:noAutofit/>
+          </a:bodyPr>
+          <a:lstStyle/>
+          <a:p>
+            <a:pPr marL="457200" lvl="0" indent="-228600" algn="l" rtl="0">
+              <a:lnSpc>
+                <a:spcPct val="100000"/>
+              </a:lnSpc>
+              <a:spcBef>
+                <a:spcPts val="0"/>
+              </a:spcBef>
+              <a:spcAft>
+                <a:spcPts val="0"/>
+              </a:spcAft>
+              <a:buSzPts val="1100"/>
+              <a:buNone/>
+            </a:pPr>
+            <a:endParaRPr/>
+          </a:p>
+        </p:txBody>
+      </p:sp>
+    </p:spTree>
+  </p:cSld>
+  <p:clrMapOvr>
+    <a:masterClrMapping/>
+  </p:clrMapOvr>
+</p:notes>
+</file>
+
+<file path=ppt/notesSlides/notesSlide30.xml><?xml version="1.0" encoding="utf-8"?>
+<p:notes xmlns:a="http://schemas.openxmlformats.org/drawingml/2006/main" xmlns:r="http://schemas.openxmlformats.org/officeDocument/2006/relationships" xmlns:p="http://schemas.openxmlformats.org/presentationml/2006/main" showMasterSp="0" showMasterPhAnim="0">
+  <p:cSld>
+    <p:spTree>
+      <p:nvGrpSpPr>
+        <p:cNvPr id="1" name="Shape 339"/>
+        <p:cNvGrpSpPr/>
+        <p:nvPr/>
+      </p:nvGrpSpPr>
+      <p:grpSpPr>
+        <a:xfrm>
+          <a:off x="0" y="0"/>
+          <a:ext cx="0" cy="0"/>
+          <a:chOff x="0" y="0"/>
+          <a:chExt cx="0" cy="0"/>
+        </a:xfrm>
+      </p:grpSpPr>
+      <p:sp>
+        <p:nvSpPr>
+          <p:cNvPr id="340" name="Google Shape;340;g364a009736c_2_257:notes"/>
           <p:cNvSpPr txBox="1">
             <a:spLocks noGrp="1"/>
           </p:cNvSpPr>
@@ -4141,13 +4352,7 @@
       </p:sp>
       <p:sp>
         <p:nvSpPr>
-          <p:cNvPr id="258" name="Google Shape;258;g364a009736c_2_187:notes">
-            <a:extLst>
-              <a:ext uri="{FF2B5EF4-FFF2-40B4-BE49-F238E27FC236}">
-                <a16:creationId xmlns:a16="http://schemas.microsoft.com/office/drawing/2014/main" id="{D66910F0-4EC2-4D73-EF29-4687A9FB1F6C}"/>
-              </a:ext>
-            </a:extLst>
-          </p:cNvPr>
+          <p:cNvPr id="341" name="Google Shape;341;g364a009736c_2_257:notes"/>
           <p:cNvSpPr>
             <a:spLocks noGrp="1" noRot="1" noChangeAspect="1"/>
           </p:cNvSpPr>
@@ -4187,9 +4392,1119 @@
         </p:spPr>
       </p:sp>
     </p:spTree>
+  </p:cSld>
+  <p:clrMapOvr>
+    <a:masterClrMapping/>
+  </p:clrMapOvr>
+</p:notes>
+</file>
+
+<file path=ppt/notesSlides/notesSlide31.xml><?xml version="1.0" encoding="utf-8"?>
+<p:notes xmlns:a="http://schemas.openxmlformats.org/drawingml/2006/main" xmlns:r="http://schemas.openxmlformats.org/officeDocument/2006/relationships" xmlns:p="http://schemas.openxmlformats.org/presentationml/2006/main" showMasterSp="0" showMasterPhAnim="0">
+  <p:cSld>
+    <p:spTree>
+      <p:nvGrpSpPr>
+        <p:cNvPr id="1" name="Shape 339">
+          <a:extLst>
+            <a:ext uri="{FF2B5EF4-FFF2-40B4-BE49-F238E27FC236}">
+              <a16:creationId xmlns:a16="http://schemas.microsoft.com/office/drawing/2014/main" id="{59A83625-484F-5D61-8522-8B0BB15B97D4}"/>
+            </a:ext>
+          </a:extLst>
+        </p:cNvPr>
+        <p:cNvGrpSpPr/>
+        <p:nvPr/>
+      </p:nvGrpSpPr>
+      <p:grpSpPr>
+        <a:xfrm>
+          <a:off x="0" y="0"/>
+          <a:ext cx="0" cy="0"/>
+          <a:chOff x="0" y="0"/>
+          <a:chExt cx="0" cy="0"/>
+        </a:xfrm>
+      </p:grpSpPr>
+      <p:sp>
+        <p:nvSpPr>
+          <p:cNvPr id="340" name="Google Shape;340;g364a009736c_2_257:notes">
+            <a:extLst>
+              <a:ext uri="{FF2B5EF4-FFF2-40B4-BE49-F238E27FC236}">
+                <a16:creationId xmlns:a16="http://schemas.microsoft.com/office/drawing/2014/main" id="{5675A772-7D01-1B11-A419-3EDB6C5CA3FC}"/>
+              </a:ext>
+            </a:extLst>
+          </p:cNvPr>
+          <p:cNvSpPr txBox="1">
+            <a:spLocks noGrp="1"/>
+          </p:cNvSpPr>
+          <p:nvPr>
+            <p:ph type="body" idx="1"/>
+          </p:nvPr>
+        </p:nvSpPr>
+        <p:spPr>
+          <a:xfrm>
+            <a:off x="685800" y="4343400"/>
+            <a:ext cx="5486400" cy="4114800"/>
+          </a:xfrm>
+          <a:prstGeom prst="rect">
+            <a:avLst/>
+          </a:prstGeom>
+        </p:spPr>
+        <p:txBody>
+          <a:bodyPr spcFirstLastPara="1" wrap="square" lIns="91425" tIns="91425" rIns="91425" bIns="91425" anchor="t" anchorCtr="0">
+            <a:noAutofit/>
+          </a:bodyPr>
+          <a:lstStyle/>
+          <a:p>
+            <a:pPr marL="0" lvl="0" indent="0" algn="l" rtl="0">
+              <a:spcBef>
+                <a:spcPts val="0"/>
+              </a:spcBef>
+              <a:spcAft>
+                <a:spcPts val="0"/>
+              </a:spcAft>
+              <a:buNone/>
+            </a:pPr>
+            <a:endParaRPr dirty="0"/>
+          </a:p>
+        </p:txBody>
+      </p:sp>
+      <p:sp>
+        <p:nvSpPr>
+          <p:cNvPr id="341" name="Google Shape;341;g364a009736c_2_257:notes">
+            <a:extLst>
+              <a:ext uri="{FF2B5EF4-FFF2-40B4-BE49-F238E27FC236}">
+                <a16:creationId xmlns:a16="http://schemas.microsoft.com/office/drawing/2014/main" id="{19FEA6A7-605F-6E9C-6CDE-918C2FC3D54C}"/>
+              </a:ext>
+            </a:extLst>
+          </p:cNvPr>
+          <p:cNvSpPr>
+            <a:spLocks noGrp="1" noRot="1" noChangeAspect="1"/>
+          </p:cNvSpPr>
+          <p:nvPr>
+            <p:ph type="sldImg" idx="2"/>
+          </p:nvPr>
+        </p:nvSpPr>
+        <p:spPr>
+          <a:xfrm>
+            <a:off x="381000" y="685800"/>
+            <a:ext cx="6096000" cy="3429000"/>
+          </a:xfrm>
+          <a:custGeom>
+            <a:avLst/>
+            <a:gdLst/>
+            <a:ahLst/>
+            <a:cxnLst/>
+            <a:rect l="l" t="t" r="r" b="b"/>
+            <a:pathLst>
+              <a:path w="120000" h="120000" extrusionOk="0">
+                <a:moveTo>
+                  <a:pt x="0" y="0"/>
+                </a:moveTo>
+                <a:lnTo>
+                  <a:pt x="120000" y="0"/>
+                </a:lnTo>
+                <a:lnTo>
+                  <a:pt x="120000" y="120000"/>
+                </a:lnTo>
+                <a:lnTo>
+                  <a:pt x="0" y="120000"/>
+                </a:lnTo>
+                <a:close/>
+              </a:path>
+            </a:pathLst>
+          </a:custGeom>
+        </p:spPr>
+      </p:sp>
+    </p:spTree>
     <p:extLst>
       <p:ext uri="{BB962C8B-B14F-4D97-AF65-F5344CB8AC3E}">
-        <p14:creationId xmlns:p14="http://schemas.microsoft.com/office/powerpoint/2010/main" val="2991809635"/>
+        <p14:creationId xmlns:p14="http://schemas.microsoft.com/office/powerpoint/2010/main" val="4111944888"/>
+      </p:ext>
+    </p:extLst>
+  </p:cSld>
+  <p:clrMapOvr>
+    <a:masterClrMapping/>
+  </p:clrMapOvr>
+</p:notes>
+</file>
+
+<file path=ppt/notesSlides/notesSlide32.xml><?xml version="1.0" encoding="utf-8"?>
+<p:notes xmlns:a="http://schemas.openxmlformats.org/drawingml/2006/main" xmlns:r="http://schemas.openxmlformats.org/officeDocument/2006/relationships" xmlns:p="http://schemas.openxmlformats.org/presentationml/2006/main" showMasterSp="0" showMasterPhAnim="0">
+  <p:cSld>
+    <p:spTree>
+      <p:nvGrpSpPr>
+        <p:cNvPr id="1" name="Shape 314">
+          <a:extLst>
+            <a:ext uri="{FF2B5EF4-FFF2-40B4-BE49-F238E27FC236}">
+              <a16:creationId xmlns:a16="http://schemas.microsoft.com/office/drawing/2014/main" id="{D1DB388B-D8C8-B7AF-DA4A-2E2170DE54FD}"/>
+            </a:ext>
+          </a:extLst>
+        </p:cNvPr>
+        <p:cNvGrpSpPr/>
+        <p:nvPr/>
+      </p:nvGrpSpPr>
+      <p:grpSpPr>
+        <a:xfrm>
+          <a:off x="0" y="0"/>
+          <a:ext cx="0" cy="0"/>
+          <a:chOff x="0" y="0"/>
+          <a:chExt cx="0" cy="0"/>
+        </a:xfrm>
+      </p:grpSpPr>
+      <p:sp>
+        <p:nvSpPr>
+          <p:cNvPr id="315" name="Google Shape;315;g364a009736c_2_236:notes">
+            <a:extLst>
+              <a:ext uri="{FF2B5EF4-FFF2-40B4-BE49-F238E27FC236}">
+                <a16:creationId xmlns:a16="http://schemas.microsoft.com/office/drawing/2014/main" id="{1E842EB0-6396-B037-9E7A-18381198AEF8}"/>
+              </a:ext>
+            </a:extLst>
+          </p:cNvPr>
+          <p:cNvSpPr>
+            <a:spLocks noGrp="1" noRot="1" noChangeAspect="1"/>
+          </p:cNvSpPr>
+          <p:nvPr>
+            <p:ph type="sldImg" idx="2"/>
+          </p:nvPr>
+        </p:nvSpPr>
+        <p:spPr>
+          <a:xfrm>
+            <a:off x="381000" y="685800"/>
+            <a:ext cx="6096000" cy="3429000"/>
+          </a:xfrm>
+          <a:custGeom>
+            <a:avLst/>
+            <a:gdLst/>
+            <a:ahLst/>
+            <a:cxnLst/>
+            <a:rect l="l" t="t" r="r" b="b"/>
+            <a:pathLst>
+              <a:path w="120000" h="120000" extrusionOk="0">
+                <a:moveTo>
+                  <a:pt x="0" y="0"/>
+                </a:moveTo>
+                <a:lnTo>
+                  <a:pt x="120000" y="0"/>
+                </a:lnTo>
+                <a:lnTo>
+                  <a:pt x="120000" y="120000"/>
+                </a:lnTo>
+                <a:lnTo>
+                  <a:pt x="0" y="120000"/>
+                </a:lnTo>
+                <a:close/>
+              </a:path>
+            </a:pathLst>
+          </a:custGeom>
+          <a:noFill/>
+          <a:ln w="9525" cap="flat" cmpd="sng">
+            <a:solidFill>
+              <a:srgbClr val="000000"/>
+            </a:solidFill>
+            <a:prstDash val="solid"/>
+            <a:round/>
+            <a:headEnd type="none" w="sm" len="sm"/>
+            <a:tailEnd type="none" w="sm" len="sm"/>
+          </a:ln>
+        </p:spPr>
+      </p:sp>
+      <p:sp>
+        <p:nvSpPr>
+          <p:cNvPr id="316" name="Google Shape;316;g364a009736c_2_236:notes">
+            <a:extLst>
+              <a:ext uri="{FF2B5EF4-FFF2-40B4-BE49-F238E27FC236}">
+                <a16:creationId xmlns:a16="http://schemas.microsoft.com/office/drawing/2014/main" id="{AB152011-E51C-8072-EF4C-FA66B157A482}"/>
+              </a:ext>
+            </a:extLst>
+          </p:cNvPr>
+          <p:cNvSpPr txBox="1">
+            <a:spLocks noGrp="1"/>
+          </p:cNvSpPr>
+          <p:nvPr>
+            <p:ph type="body" idx="1"/>
+          </p:nvPr>
+        </p:nvSpPr>
+        <p:spPr>
+          <a:xfrm>
+            <a:off x="685800" y="4343400"/>
+            <a:ext cx="5486400" cy="4114800"/>
+          </a:xfrm>
+          <a:prstGeom prst="rect">
+            <a:avLst/>
+          </a:prstGeom>
+          <a:noFill/>
+          <a:ln>
+            <a:noFill/>
+          </a:ln>
+        </p:spPr>
+        <p:txBody>
+          <a:bodyPr spcFirstLastPara="1" wrap="square" lIns="91425" tIns="91425" rIns="91425" bIns="91425" anchor="t" anchorCtr="0">
+            <a:noAutofit/>
+          </a:bodyPr>
+          <a:lstStyle/>
+          <a:p>
+            <a:pPr marL="457200" lvl="0" indent="-228600" algn="l" rtl="0">
+              <a:lnSpc>
+                <a:spcPct val="100000"/>
+              </a:lnSpc>
+              <a:spcBef>
+                <a:spcPts val="0"/>
+              </a:spcBef>
+              <a:spcAft>
+                <a:spcPts val="0"/>
+              </a:spcAft>
+              <a:buSzPts val="1100"/>
+              <a:buNone/>
+            </a:pPr>
+            <a:endParaRPr dirty="0"/>
+          </a:p>
+        </p:txBody>
+      </p:sp>
+      <p:sp>
+        <p:nvSpPr>
+          <p:cNvPr id="317" name="Google Shape;317;g364a009736c_2_236:notes">
+            <a:extLst>
+              <a:ext uri="{FF2B5EF4-FFF2-40B4-BE49-F238E27FC236}">
+                <a16:creationId xmlns:a16="http://schemas.microsoft.com/office/drawing/2014/main" id="{B49F4616-5FAB-B511-3493-CA05E7313DDB}"/>
+              </a:ext>
+            </a:extLst>
+          </p:cNvPr>
+          <p:cNvSpPr txBox="1">
+            <a:spLocks noGrp="1"/>
+          </p:cNvSpPr>
+          <p:nvPr>
+            <p:ph type="sldNum" idx="12"/>
+          </p:nvPr>
+        </p:nvSpPr>
+        <p:spPr>
+          <a:xfrm>
+            <a:off x="0" y="0"/>
+            <a:ext cx="3000000" cy="3000000"/>
+          </a:xfrm>
+          <a:prstGeom prst="rect">
+            <a:avLst/>
+          </a:prstGeom>
+          <a:noFill/>
+          <a:ln>
+            <a:noFill/>
+          </a:ln>
+        </p:spPr>
+        <p:txBody>
+          <a:bodyPr spcFirstLastPara="1" wrap="square" lIns="91425" tIns="45700" rIns="91425" bIns="45700" anchor="t" anchorCtr="0">
+            <a:noAutofit/>
+          </a:bodyPr>
+          <a:lstStyle/>
+          <a:p>
+            <a:pPr marL="0" marR="0" lvl="0" indent="0" algn="l" rtl="0">
+              <a:spcBef>
+                <a:spcPts val="0"/>
+              </a:spcBef>
+              <a:spcAft>
+                <a:spcPts val="0"/>
+              </a:spcAft>
+              <a:buNone/>
+            </a:pPr>
+            <a:fld id="{00000000-1234-1234-1234-123412341234}" type="slidenum">
+              <a:rPr lang="en" sz="1800">
+                <a:solidFill>
+                  <a:schemeClr val="dk1"/>
+                </a:solidFill>
+                <a:latin typeface="Arial"/>
+                <a:ea typeface="Arial"/>
+                <a:cs typeface="Arial"/>
+                <a:sym typeface="Arial"/>
+              </a:rPr>
+              <a:t>41</a:t>
+            </a:fld>
+            <a:endParaRPr sz="1800">
+              <a:solidFill>
+                <a:schemeClr val="dk1"/>
+              </a:solidFill>
+              <a:latin typeface="Arial"/>
+              <a:ea typeface="Arial"/>
+              <a:cs typeface="Arial"/>
+              <a:sym typeface="Arial"/>
+            </a:endParaRPr>
+          </a:p>
+        </p:txBody>
+      </p:sp>
+    </p:spTree>
+    <p:extLst>
+      <p:ext uri="{BB962C8B-B14F-4D97-AF65-F5344CB8AC3E}">
+        <p14:creationId xmlns:p14="http://schemas.microsoft.com/office/powerpoint/2010/main" val="157119954"/>
+      </p:ext>
+    </p:extLst>
+  </p:cSld>
+  <p:clrMapOvr>
+    <a:masterClrMapping/>
+  </p:clrMapOvr>
+</p:notes>
+</file>
+
+<file path=ppt/notesSlides/notesSlide4.xml><?xml version="1.0" encoding="utf-8"?>
+<p:notes xmlns:a="http://schemas.openxmlformats.org/drawingml/2006/main" xmlns:r="http://schemas.openxmlformats.org/officeDocument/2006/relationships" xmlns:p="http://schemas.openxmlformats.org/presentationml/2006/main" showMasterSp="0" showMasterPhAnim="0">
+  <p:cSld>
+    <p:spTree>
+      <p:nvGrpSpPr>
+        <p:cNvPr id="1" name="Shape 220"/>
+        <p:cNvGrpSpPr/>
+        <p:nvPr/>
+      </p:nvGrpSpPr>
+      <p:grpSpPr>
+        <a:xfrm>
+          <a:off x="0" y="0"/>
+          <a:ext cx="0" cy="0"/>
+          <a:chOff x="0" y="0"/>
+          <a:chExt cx="0" cy="0"/>
+        </a:xfrm>
+      </p:grpSpPr>
+      <p:sp>
+        <p:nvSpPr>
+          <p:cNvPr id="221" name="Google Shape;221;g364a009736c_2_156:notes"/>
+          <p:cNvSpPr>
+            <a:spLocks noGrp="1" noRot="1" noChangeAspect="1"/>
+          </p:cNvSpPr>
+          <p:nvPr>
+            <p:ph type="sldImg" idx="2"/>
+          </p:nvPr>
+        </p:nvSpPr>
+        <p:spPr>
+          <a:xfrm>
+            <a:off x="381000" y="685800"/>
+            <a:ext cx="6096000" cy="3429000"/>
+          </a:xfrm>
+          <a:custGeom>
+            <a:avLst/>
+            <a:gdLst/>
+            <a:ahLst/>
+            <a:cxnLst/>
+            <a:rect l="l" t="t" r="r" b="b"/>
+            <a:pathLst>
+              <a:path w="120000" h="120000" extrusionOk="0">
+                <a:moveTo>
+                  <a:pt x="0" y="0"/>
+                </a:moveTo>
+                <a:lnTo>
+                  <a:pt x="120000" y="0"/>
+                </a:lnTo>
+                <a:lnTo>
+                  <a:pt x="120000" y="120000"/>
+                </a:lnTo>
+                <a:lnTo>
+                  <a:pt x="0" y="120000"/>
+                </a:lnTo>
+                <a:close/>
+              </a:path>
+            </a:pathLst>
+          </a:custGeom>
+          <a:noFill/>
+          <a:ln w="9525" cap="flat" cmpd="sng">
+            <a:solidFill>
+              <a:srgbClr val="000000"/>
+            </a:solidFill>
+            <a:prstDash val="solid"/>
+            <a:round/>
+            <a:headEnd type="none" w="sm" len="sm"/>
+            <a:tailEnd type="none" w="sm" len="sm"/>
+          </a:ln>
+        </p:spPr>
+      </p:sp>
+      <p:sp>
+        <p:nvSpPr>
+          <p:cNvPr id="222" name="Google Shape;222;g364a009736c_2_156:notes"/>
+          <p:cNvSpPr txBox="1">
+            <a:spLocks noGrp="1"/>
+          </p:cNvSpPr>
+          <p:nvPr>
+            <p:ph type="body" idx="1"/>
+          </p:nvPr>
+        </p:nvSpPr>
+        <p:spPr>
+          <a:xfrm>
+            <a:off x="685800" y="4343400"/>
+            <a:ext cx="5486400" cy="4114800"/>
+          </a:xfrm>
+          <a:prstGeom prst="rect">
+            <a:avLst/>
+          </a:prstGeom>
+          <a:noFill/>
+          <a:ln>
+            <a:noFill/>
+          </a:ln>
+        </p:spPr>
+        <p:txBody>
+          <a:bodyPr spcFirstLastPara="1" wrap="square" lIns="91425" tIns="91425" rIns="91425" bIns="91425" anchor="t" anchorCtr="0">
+            <a:noAutofit/>
+          </a:bodyPr>
+          <a:lstStyle/>
+          <a:p>
+            <a:pPr marL="457200" lvl="0" indent="-298450" algn="l" rtl="0">
+              <a:lnSpc>
+                <a:spcPct val="100000"/>
+              </a:lnSpc>
+              <a:spcBef>
+                <a:spcPts val="0"/>
+              </a:spcBef>
+              <a:spcAft>
+                <a:spcPts val="0"/>
+              </a:spcAft>
+              <a:buSzPts val="1100"/>
+              <a:buChar char="●"/>
+            </a:pPr>
+            <a:r>
+              <a:rPr lang="en"/>
+              <a:t>Give 3-5 minutes for download</a:t>
+            </a:r>
+            <a:endParaRPr/>
+          </a:p>
+          <a:p>
+            <a:pPr marL="457200" lvl="0" indent="-228600" algn="l" rtl="0">
+              <a:lnSpc>
+                <a:spcPct val="100000"/>
+              </a:lnSpc>
+              <a:spcBef>
+                <a:spcPts val="0"/>
+              </a:spcBef>
+              <a:spcAft>
+                <a:spcPts val="0"/>
+              </a:spcAft>
+              <a:buSzPts val="1100"/>
+              <a:buNone/>
+            </a:pPr>
+            <a:endParaRPr/>
+          </a:p>
+        </p:txBody>
+      </p:sp>
+    </p:spTree>
+  </p:cSld>
+  <p:clrMapOvr>
+    <a:masterClrMapping/>
+  </p:clrMapOvr>
+</p:notes>
+</file>
+
+<file path=ppt/notesSlides/notesSlide5.xml><?xml version="1.0" encoding="utf-8"?>
+<p:notes xmlns:a="http://schemas.openxmlformats.org/drawingml/2006/main" xmlns:r="http://schemas.openxmlformats.org/officeDocument/2006/relationships" xmlns:p="http://schemas.openxmlformats.org/presentationml/2006/main" showMasterSp="0" showMasterPhAnim="0">
+  <p:cSld>
+    <p:spTree>
+      <p:nvGrpSpPr>
+        <p:cNvPr id="1" name="Shape 226"/>
+        <p:cNvGrpSpPr/>
+        <p:nvPr/>
+      </p:nvGrpSpPr>
+      <p:grpSpPr>
+        <a:xfrm>
+          <a:off x="0" y="0"/>
+          <a:ext cx="0" cy="0"/>
+          <a:chOff x="0" y="0"/>
+          <a:chExt cx="0" cy="0"/>
+        </a:xfrm>
+      </p:grpSpPr>
+      <p:sp>
+        <p:nvSpPr>
+          <p:cNvPr id="227" name="Google Shape;227;g364a009736c_2_161:notes"/>
+          <p:cNvSpPr>
+            <a:spLocks noGrp="1" noRot="1" noChangeAspect="1"/>
+          </p:cNvSpPr>
+          <p:nvPr>
+            <p:ph type="sldImg" idx="2"/>
+          </p:nvPr>
+        </p:nvSpPr>
+        <p:spPr>
+          <a:xfrm>
+            <a:off x="381000" y="685800"/>
+            <a:ext cx="6096000" cy="3429000"/>
+          </a:xfrm>
+          <a:custGeom>
+            <a:avLst/>
+            <a:gdLst/>
+            <a:ahLst/>
+            <a:cxnLst/>
+            <a:rect l="l" t="t" r="r" b="b"/>
+            <a:pathLst>
+              <a:path w="120000" h="120000" extrusionOk="0">
+                <a:moveTo>
+                  <a:pt x="0" y="0"/>
+                </a:moveTo>
+                <a:lnTo>
+                  <a:pt x="120000" y="0"/>
+                </a:lnTo>
+                <a:lnTo>
+                  <a:pt x="120000" y="120000"/>
+                </a:lnTo>
+                <a:lnTo>
+                  <a:pt x="0" y="120000"/>
+                </a:lnTo>
+                <a:close/>
+              </a:path>
+            </a:pathLst>
+          </a:custGeom>
+          <a:noFill/>
+          <a:ln w="9525" cap="flat" cmpd="sng">
+            <a:solidFill>
+              <a:srgbClr val="000000"/>
+            </a:solidFill>
+            <a:prstDash val="solid"/>
+            <a:round/>
+            <a:headEnd type="none" w="sm" len="sm"/>
+            <a:tailEnd type="none" w="sm" len="sm"/>
+          </a:ln>
+        </p:spPr>
+      </p:sp>
+      <p:sp>
+        <p:nvSpPr>
+          <p:cNvPr id="228" name="Google Shape;228;g364a009736c_2_161:notes"/>
+          <p:cNvSpPr txBox="1">
+            <a:spLocks noGrp="1"/>
+          </p:cNvSpPr>
+          <p:nvPr>
+            <p:ph type="body" idx="1"/>
+          </p:nvPr>
+        </p:nvSpPr>
+        <p:spPr>
+          <a:xfrm>
+            <a:off x="685800" y="4343400"/>
+            <a:ext cx="5486400" cy="4114800"/>
+          </a:xfrm>
+          <a:prstGeom prst="rect">
+            <a:avLst/>
+          </a:prstGeom>
+          <a:noFill/>
+          <a:ln>
+            <a:noFill/>
+          </a:ln>
+        </p:spPr>
+        <p:txBody>
+          <a:bodyPr spcFirstLastPara="1" wrap="square" lIns="91425" tIns="91425" rIns="91425" bIns="91425" anchor="t" anchorCtr="0">
+            <a:noAutofit/>
+          </a:bodyPr>
+          <a:lstStyle/>
+          <a:p>
+            <a:pPr marL="457200" lvl="0" indent="-228600" algn="l" rtl="0">
+              <a:lnSpc>
+                <a:spcPct val="100000"/>
+              </a:lnSpc>
+              <a:spcBef>
+                <a:spcPts val="0"/>
+              </a:spcBef>
+              <a:spcAft>
+                <a:spcPts val="0"/>
+              </a:spcAft>
+              <a:buSzPts val="1100"/>
+              <a:buNone/>
+            </a:pPr>
+            <a:endParaRPr/>
+          </a:p>
+        </p:txBody>
+      </p:sp>
+    </p:spTree>
+  </p:cSld>
+  <p:clrMapOvr>
+    <a:masterClrMapping/>
+  </p:clrMapOvr>
+</p:notes>
+</file>
+
+<file path=ppt/notesSlides/notesSlide6.xml><?xml version="1.0" encoding="utf-8"?>
+<p:notes xmlns:a="http://schemas.openxmlformats.org/drawingml/2006/main" xmlns:r="http://schemas.openxmlformats.org/officeDocument/2006/relationships" xmlns:p="http://schemas.openxmlformats.org/presentationml/2006/main" showMasterSp="0" showMasterPhAnim="0">
+  <p:cSld>
+    <p:spTree>
+      <p:nvGrpSpPr>
+        <p:cNvPr id="1" name="Shape 238"/>
+        <p:cNvGrpSpPr/>
+        <p:nvPr/>
+      </p:nvGrpSpPr>
+      <p:grpSpPr>
+        <a:xfrm>
+          <a:off x="0" y="0"/>
+          <a:ext cx="0" cy="0"/>
+          <a:chOff x="0" y="0"/>
+          <a:chExt cx="0" cy="0"/>
+        </a:xfrm>
+      </p:grpSpPr>
+      <p:sp>
+        <p:nvSpPr>
+          <p:cNvPr id="239" name="Google Shape;239;g364a009736c_2_172:notes"/>
+          <p:cNvSpPr>
+            <a:spLocks noGrp="1" noRot="1" noChangeAspect="1"/>
+          </p:cNvSpPr>
+          <p:nvPr>
+            <p:ph type="sldImg" idx="2"/>
+          </p:nvPr>
+        </p:nvSpPr>
+        <p:spPr>
+          <a:xfrm>
+            <a:off x="381000" y="685800"/>
+            <a:ext cx="6096000" cy="3429000"/>
+          </a:xfrm>
+          <a:custGeom>
+            <a:avLst/>
+            <a:gdLst/>
+            <a:ahLst/>
+            <a:cxnLst/>
+            <a:rect l="l" t="t" r="r" b="b"/>
+            <a:pathLst>
+              <a:path w="120000" h="120000" extrusionOk="0">
+                <a:moveTo>
+                  <a:pt x="0" y="0"/>
+                </a:moveTo>
+                <a:lnTo>
+                  <a:pt x="120000" y="0"/>
+                </a:lnTo>
+                <a:lnTo>
+                  <a:pt x="120000" y="120000"/>
+                </a:lnTo>
+                <a:lnTo>
+                  <a:pt x="0" y="120000"/>
+                </a:lnTo>
+                <a:close/>
+              </a:path>
+            </a:pathLst>
+          </a:custGeom>
+          <a:noFill/>
+          <a:ln w="9525" cap="flat" cmpd="sng">
+            <a:solidFill>
+              <a:srgbClr val="000000"/>
+            </a:solidFill>
+            <a:prstDash val="solid"/>
+            <a:round/>
+            <a:headEnd type="none" w="sm" len="sm"/>
+            <a:tailEnd type="none" w="sm" len="sm"/>
+          </a:ln>
+        </p:spPr>
+      </p:sp>
+      <p:sp>
+        <p:nvSpPr>
+          <p:cNvPr id="240" name="Google Shape;240;g364a009736c_2_172:notes"/>
+          <p:cNvSpPr txBox="1">
+            <a:spLocks noGrp="1"/>
+          </p:cNvSpPr>
+          <p:nvPr>
+            <p:ph type="body" idx="1"/>
+          </p:nvPr>
+        </p:nvSpPr>
+        <p:spPr>
+          <a:xfrm>
+            <a:off x="685800" y="4343400"/>
+            <a:ext cx="5486400" cy="4114800"/>
+          </a:xfrm>
+          <a:prstGeom prst="rect">
+            <a:avLst/>
+          </a:prstGeom>
+          <a:noFill/>
+          <a:ln>
+            <a:noFill/>
+          </a:ln>
+        </p:spPr>
+        <p:txBody>
+          <a:bodyPr spcFirstLastPara="1" wrap="square" lIns="91425" tIns="91425" rIns="91425" bIns="91425" anchor="t" anchorCtr="0">
+            <a:noAutofit/>
+          </a:bodyPr>
+          <a:lstStyle/>
+          <a:p>
+            <a:pPr marL="457200" lvl="0" indent="-228600" algn="l" rtl="0">
+              <a:lnSpc>
+                <a:spcPct val="100000"/>
+              </a:lnSpc>
+              <a:spcBef>
+                <a:spcPts val="0"/>
+              </a:spcBef>
+              <a:spcAft>
+                <a:spcPts val="0"/>
+              </a:spcAft>
+              <a:buSzPts val="1100"/>
+              <a:buNone/>
+            </a:pPr>
+            <a:endParaRPr/>
+          </a:p>
+        </p:txBody>
+      </p:sp>
+    </p:spTree>
+  </p:cSld>
+  <p:clrMapOvr>
+    <a:masterClrMapping/>
+  </p:clrMapOvr>
+</p:notes>
+</file>
+
+<file path=ppt/notesSlides/notesSlide7.xml><?xml version="1.0" encoding="utf-8"?>
+<p:notes xmlns:a="http://schemas.openxmlformats.org/drawingml/2006/main" xmlns:r="http://schemas.openxmlformats.org/officeDocument/2006/relationships" xmlns:p="http://schemas.openxmlformats.org/presentationml/2006/main" showMasterSp="0" showMasterPhAnim="0">
+  <p:cSld>
+    <p:spTree>
+      <p:nvGrpSpPr>
+        <p:cNvPr id="1" name="Shape 244"/>
+        <p:cNvGrpSpPr/>
+        <p:nvPr/>
+      </p:nvGrpSpPr>
+      <p:grpSpPr>
+        <a:xfrm>
+          <a:off x="0" y="0"/>
+          <a:ext cx="0" cy="0"/>
+          <a:chOff x="0" y="0"/>
+          <a:chExt cx="0" cy="0"/>
+        </a:xfrm>
+      </p:grpSpPr>
+      <p:sp>
+        <p:nvSpPr>
+          <p:cNvPr id="245" name="Google Shape;245;g364a009736c_2_177:notes"/>
+          <p:cNvSpPr>
+            <a:spLocks noGrp="1" noRot="1" noChangeAspect="1"/>
+          </p:cNvSpPr>
+          <p:nvPr>
+            <p:ph type="sldImg" idx="2"/>
+          </p:nvPr>
+        </p:nvSpPr>
+        <p:spPr>
+          <a:xfrm>
+            <a:off x="381000" y="685800"/>
+            <a:ext cx="6096000" cy="3429000"/>
+          </a:xfrm>
+          <a:custGeom>
+            <a:avLst/>
+            <a:gdLst/>
+            <a:ahLst/>
+            <a:cxnLst/>
+            <a:rect l="l" t="t" r="r" b="b"/>
+            <a:pathLst>
+              <a:path w="120000" h="120000" extrusionOk="0">
+                <a:moveTo>
+                  <a:pt x="0" y="0"/>
+                </a:moveTo>
+                <a:lnTo>
+                  <a:pt x="120000" y="0"/>
+                </a:lnTo>
+                <a:lnTo>
+                  <a:pt x="120000" y="120000"/>
+                </a:lnTo>
+                <a:lnTo>
+                  <a:pt x="0" y="120000"/>
+                </a:lnTo>
+                <a:close/>
+              </a:path>
+            </a:pathLst>
+          </a:custGeom>
+          <a:noFill/>
+          <a:ln w="9525" cap="flat" cmpd="sng">
+            <a:solidFill>
+              <a:srgbClr val="000000"/>
+            </a:solidFill>
+            <a:prstDash val="solid"/>
+            <a:round/>
+            <a:headEnd type="none" w="sm" len="sm"/>
+            <a:tailEnd type="none" w="sm" len="sm"/>
+          </a:ln>
+        </p:spPr>
+      </p:sp>
+      <p:sp>
+        <p:nvSpPr>
+          <p:cNvPr id="246" name="Google Shape;246;g364a009736c_2_177:notes"/>
+          <p:cNvSpPr txBox="1">
+            <a:spLocks noGrp="1"/>
+          </p:cNvSpPr>
+          <p:nvPr>
+            <p:ph type="body" idx="1"/>
+          </p:nvPr>
+        </p:nvSpPr>
+        <p:spPr>
+          <a:xfrm>
+            <a:off x="685800" y="4343400"/>
+            <a:ext cx="5486400" cy="4114800"/>
+          </a:xfrm>
+          <a:prstGeom prst="rect">
+            <a:avLst/>
+          </a:prstGeom>
+          <a:noFill/>
+          <a:ln>
+            <a:noFill/>
+          </a:ln>
+        </p:spPr>
+        <p:txBody>
+          <a:bodyPr spcFirstLastPara="1" wrap="square" lIns="91425" tIns="91425" rIns="91425" bIns="91425" anchor="t" anchorCtr="0">
+            <a:noAutofit/>
+          </a:bodyPr>
+          <a:lstStyle/>
+          <a:p>
+            <a:pPr marL="457200" lvl="0" indent="-228600" algn="l" rtl="0">
+              <a:lnSpc>
+                <a:spcPct val="100000"/>
+              </a:lnSpc>
+              <a:spcBef>
+                <a:spcPts val="0"/>
+              </a:spcBef>
+              <a:spcAft>
+                <a:spcPts val="0"/>
+              </a:spcAft>
+              <a:buSzPts val="1100"/>
+              <a:buNone/>
+            </a:pPr>
+            <a:endParaRPr/>
+          </a:p>
+        </p:txBody>
+      </p:sp>
+    </p:spTree>
+  </p:cSld>
+  <p:clrMapOvr>
+    <a:masterClrMapping/>
+  </p:clrMapOvr>
+</p:notes>
+</file>
+
+<file path=ppt/notesSlides/notesSlide8.xml><?xml version="1.0" encoding="utf-8"?>
+<p:notes xmlns:a="http://schemas.openxmlformats.org/drawingml/2006/main" xmlns:r="http://schemas.openxmlformats.org/officeDocument/2006/relationships" xmlns:p="http://schemas.openxmlformats.org/presentationml/2006/main" showMasterSp="0" showMasterPhAnim="0">
+  <p:cSld>
+    <p:spTree>
+      <p:nvGrpSpPr>
+        <p:cNvPr id="1" name="Shape 250"/>
+        <p:cNvGrpSpPr/>
+        <p:nvPr/>
+      </p:nvGrpSpPr>
+      <p:grpSpPr>
+        <a:xfrm>
+          <a:off x="0" y="0"/>
+          <a:ext cx="0" cy="0"/>
+          <a:chOff x="0" y="0"/>
+          <a:chExt cx="0" cy="0"/>
+        </a:xfrm>
+      </p:grpSpPr>
+      <p:sp>
+        <p:nvSpPr>
+          <p:cNvPr id="251" name="Google Shape;251;g364a009736c_2_182:notes"/>
+          <p:cNvSpPr>
+            <a:spLocks noGrp="1" noRot="1" noChangeAspect="1"/>
+          </p:cNvSpPr>
+          <p:nvPr>
+            <p:ph type="sldImg" idx="2"/>
+          </p:nvPr>
+        </p:nvSpPr>
+        <p:spPr>
+          <a:xfrm>
+            <a:off x="381000" y="685800"/>
+            <a:ext cx="6096000" cy="3429000"/>
+          </a:xfrm>
+          <a:custGeom>
+            <a:avLst/>
+            <a:gdLst/>
+            <a:ahLst/>
+            <a:cxnLst/>
+            <a:rect l="l" t="t" r="r" b="b"/>
+            <a:pathLst>
+              <a:path w="120000" h="120000" extrusionOk="0">
+                <a:moveTo>
+                  <a:pt x="0" y="0"/>
+                </a:moveTo>
+                <a:lnTo>
+                  <a:pt x="120000" y="0"/>
+                </a:lnTo>
+                <a:lnTo>
+                  <a:pt x="120000" y="120000"/>
+                </a:lnTo>
+                <a:lnTo>
+                  <a:pt x="0" y="120000"/>
+                </a:lnTo>
+                <a:close/>
+              </a:path>
+            </a:pathLst>
+          </a:custGeom>
+          <a:noFill/>
+          <a:ln w="9525" cap="flat" cmpd="sng">
+            <a:solidFill>
+              <a:srgbClr val="000000"/>
+            </a:solidFill>
+            <a:prstDash val="solid"/>
+            <a:round/>
+            <a:headEnd type="none" w="sm" len="sm"/>
+            <a:tailEnd type="none" w="sm" len="sm"/>
+          </a:ln>
+        </p:spPr>
+      </p:sp>
+      <p:sp>
+        <p:nvSpPr>
+          <p:cNvPr id="252" name="Google Shape;252;g364a009736c_2_182:notes"/>
+          <p:cNvSpPr txBox="1">
+            <a:spLocks noGrp="1"/>
+          </p:cNvSpPr>
+          <p:nvPr>
+            <p:ph type="body" idx="1"/>
+          </p:nvPr>
+        </p:nvSpPr>
+        <p:spPr>
+          <a:xfrm>
+            <a:off x="685800" y="4343400"/>
+            <a:ext cx="5486400" cy="4114800"/>
+          </a:xfrm>
+          <a:prstGeom prst="rect">
+            <a:avLst/>
+          </a:prstGeom>
+          <a:noFill/>
+          <a:ln>
+            <a:noFill/>
+          </a:ln>
+        </p:spPr>
+        <p:txBody>
+          <a:bodyPr spcFirstLastPara="1" wrap="square" lIns="91425" tIns="91425" rIns="91425" bIns="91425" anchor="t" anchorCtr="0">
+            <a:noAutofit/>
+          </a:bodyPr>
+          <a:lstStyle/>
+          <a:p>
+            <a:pPr marL="457200" lvl="0" indent="-228600" algn="l" rtl="0">
+              <a:lnSpc>
+                <a:spcPct val="100000"/>
+              </a:lnSpc>
+              <a:spcBef>
+                <a:spcPts val="0"/>
+              </a:spcBef>
+              <a:spcAft>
+                <a:spcPts val="0"/>
+              </a:spcAft>
+              <a:buSzPts val="1100"/>
+              <a:buNone/>
+            </a:pPr>
+            <a:endParaRPr/>
+          </a:p>
+        </p:txBody>
+      </p:sp>
+    </p:spTree>
+  </p:cSld>
+  <p:clrMapOvr>
+    <a:masterClrMapping/>
+  </p:clrMapOvr>
+</p:notes>
+</file>
+
+<file path=ppt/notesSlides/notesSlide9.xml><?xml version="1.0" encoding="utf-8"?>
+<p:notes xmlns:a="http://schemas.openxmlformats.org/drawingml/2006/main" xmlns:r="http://schemas.openxmlformats.org/officeDocument/2006/relationships" xmlns:p="http://schemas.openxmlformats.org/presentationml/2006/main" showMasterSp="0" showMasterPhAnim="0">
+  <p:cSld>
+    <p:spTree>
+      <p:nvGrpSpPr>
+        <p:cNvPr id="1" name="Shape 244">
+          <a:extLst>
+            <a:ext uri="{FF2B5EF4-FFF2-40B4-BE49-F238E27FC236}">
+              <a16:creationId xmlns:a16="http://schemas.microsoft.com/office/drawing/2014/main" id="{CEB98131-FC7F-1A21-D059-38752821D2E0}"/>
+            </a:ext>
+          </a:extLst>
+        </p:cNvPr>
+        <p:cNvGrpSpPr/>
+        <p:nvPr/>
+      </p:nvGrpSpPr>
+      <p:grpSpPr>
+        <a:xfrm>
+          <a:off x="0" y="0"/>
+          <a:ext cx="0" cy="0"/>
+          <a:chOff x="0" y="0"/>
+          <a:chExt cx="0" cy="0"/>
+        </a:xfrm>
+      </p:grpSpPr>
+      <p:sp>
+        <p:nvSpPr>
+          <p:cNvPr id="245" name="Google Shape;245;g364a009736c_2_177:notes">
+            <a:extLst>
+              <a:ext uri="{FF2B5EF4-FFF2-40B4-BE49-F238E27FC236}">
+                <a16:creationId xmlns:a16="http://schemas.microsoft.com/office/drawing/2014/main" id="{88E5B73D-8888-3A55-B5CA-21AC60CD4146}"/>
+              </a:ext>
+            </a:extLst>
+          </p:cNvPr>
+          <p:cNvSpPr>
+            <a:spLocks noGrp="1" noRot="1" noChangeAspect="1"/>
+          </p:cNvSpPr>
+          <p:nvPr>
+            <p:ph type="sldImg" idx="2"/>
+          </p:nvPr>
+        </p:nvSpPr>
+        <p:spPr>
+          <a:xfrm>
+            <a:off x="381000" y="685800"/>
+            <a:ext cx="6096000" cy="3429000"/>
+          </a:xfrm>
+          <a:custGeom>
+            <a:avLst/>
+            <a:gdLst/>
+            <a:ahLst/>
+            <a:cxnLst/>
+            <a:rect l="l" t="t" r="r" b="b"/>
+            <a:pathLst>
+              <a:path w="120000" h="120000" extrusionOk="0">
+                <a:moveTo>
+                  <a:pt x="0" y="0"/>
+                </a:moveTo>
+                <a:lnTo>
+                  <a:pt x="120000" y="0"/>
+                </a:lnTo>
+                <a:lnTo>
+                  <a:pt x="120000" y="120000"/>
+                </a:lnTo>
+                <a:lnTo>
+                  <a:pt x="0" y="120000"/>
+                </a:lnTo>
+                <a:close/>
+              </a:path>
+            </a:pathLst>
+          </a:custGeom>
+          <a:noFill/>
+          <a:ln w="9525" cap="flat" cmpd="sng">
+            <a:solidFill>
+              <a:srgbClr val="000000"/>
+            </a:solidFill>
+            <a:prstDash val="solid"/>
+            <a:round/>
+            <a:headEnd type="none" w="sm" len="sm"/>
+            <a:tailEnd type="none" w="sm" len="sm"/>
+          </a:ln>
+        </p:spPr>
+      </p:sp>
+      <p:sp>
+        <p:nvSpPr>
+          <p:cNvPr id="246" name="Google Shape;246;g364a009736c_2_177:notes">
+            <a:extLst>
+              <a:ext uri="{FF2B5EF4-FFF2-40B4-BE49-F238E27FC236}">
+                <a16:creationId xmlns:a16="http://schemas.microsoft.com/office/drawing/2014/main" id="{6671704B-6B97-996B-1A73-08EE501E747E}"/>
+              </a:ext>
+            </a:extLst>
+          </p:cNvPr>
+          <p:cNvSpPr txBox="1">
+            <a:spLocks noGrp="1"/>
+          </p:cNvSpPr>
+          <p:nvPr>
+            <p:ph type="body" idx="1"/>
+          </p:nvPr>
+        </p:nvSpPr>
+        <p:spPr>
+          <a:xfrm>
+            <a:off x="685800" y="4343400"/>
+            <a:ext cx="5486400" cy="4114800"/>
+          </a:xfrm>
+          <a:prstGeom prst="rect">
+            <a:avLst/>
+          </a:prstGeom>
+          <a:noFill/>
+          <a:ln>
+            <a:noFill/>
+          </a:ln>
+        </p:spPr>
+        <p:txBody>
+          <a:bodyPr spcFirstLastPara="1" wrap="square" lIns="91425" tIns="91425" rIns="91425" bIns="91425" anchor="t" anchorCtr="0">
+            <a:noAutofit/>
+          </a:bodyPr>
+          <a:lstStyle/>
+          <a:p>
+            <a:pPr marL="457200" lvl="0" indent="-228600" algn="l" rtl="0">
+              <a:lnSpc>
+                <a:spcPct val="100000"/>
+              </a:lnSpc>
+              <a:spcBef>
+                <a:spcPts val="0"/>
+              </a:spcBef>
+              <a:spcAft>
+                <a:spcPts val="0"/>
+              </a:spcAft>
+              <a:buSzPts val="1100"/>
+              <a:buNone/>
+            </a:pPr>
+            <a:endParaRPr/>
+          </a:p>
+        </p:txBody>
+      </p:sp>
+    </p:spTree>
+    <p:extLst>
+      <p:ext uri="{BB962C8B-B14F-4D97-AF65-F5344CB8AC3E}">
+        <p14:creationId xmlns:p14="http://schemas.microsoft.com/office/powerpoint/2010/main" val="3344905152"/>
       </p:ext>
     </p:extLst>
   </p:cSld>
@@ -4247,7 +5562,7 @@
           <a:p>
             <a:fld id="{7A3E0868-4E26-4CDC-8A56-D70E2D8B12FE}" type="datetime3">
               <a:rPr lang="en-US" smtClean="0"/>
-              <a:t>5 May 2026</a:t>
+              <a:t>1 June 2026</a:t>
             </a:fld>
             <a:endParaRPr lang="en-US"/>
           </a:p>
@@ -6808,7 +8123,7 @@
           <a:p>
             <a:fld id="{A7B8021B-6105-4216-96FC-94348F216D0E}" type="datetime3">
               <a:rPr lang="en-US" smtClean="0"/>
-              <a:t>5 May 2026</a:t>
+              <a:t>1 June 2026</a:t>
             </a:fld>
             <a:endParaRPr lang="en-US"/>
           </a:p>
@@ -8505,7 +9820,7 @@
           <a:p>
             <a:fld id="{5D27CFAB-73E6-44A8-B862-B3306344E3F2}" type="datetime3">
               <a:rPr lang="en-US" smtClean="0"/>
-              <a:t>5 May 2026</a:t>
+              <a:t>1 June 2026</a:t>
             </a:fld>
             <a:endParaRPr lang="en-US"/>
           </a:p>
@@ -10295,7 +11610,7 @@
           <a:p>
             <a:fld id="{A9B2E784-A5F5-4301-881B-94AC8DBF9DED}" type="datetime3">
               <a:rPr lang="en-US" smtClean="0"/>
-              <a:t>5 May 2026</a:t>
+              <a:t>1 June 2026</a:t>
             </a:fld>
             <a:endParaRPr lang="en-US"/>
           </a:p>
@@ -10474,7 +11789,7 @@
           <a:p>
             <a:fld id="{18EAB3A5-9E92-4BB9-8F22-9632B4FBEDBA}" type="datetime3">
               <a:rPr lang="en-US" smtClean="0"/>
-              <a:t>5 May 2026</a:t>
+              <a:t>1 June 2026</a:t>
             </a:fld>
             <a:endParaRPr lang="en-US"/>
           </a:p>
@@ -10701,7 +12016,7 @@
           <a:p>
             <a:fld id="{40923810-5FB2-48C9-96CA-1DE2C4773142}" type="datetime3">
               <a:rPr lang="en-US" smtClean="0"/>
-              <a:t>5 May 2026</a:t>
+              <a:t>1 June 2026</a:t>
             </a:fld>
             <a:endParaRPr lang="en-US"/>
           </a:p>
@@ -10991,7 +12306,7 @@
           <a:p>
             <a:fld id="{E50EFF4B-86EB-42FB-93EA-7D8F9CB2466F}" type="datetime3">
               <a:rPr lang="en-US" smtClean="0"/>
-              <a:t>5 May 2026</a:t>
+              <a:t>1 June 2026</a:t>
             </a:fld>
             <a:endParaRPr lang="en-US"/>
           </a:p>
@@ -11603,7 +12918,7 @@
           <a:p>
             <a:fld id="{FB14FC24-E041-45E9-9A72-E5755A86890F}" type="datetime3">
               <a:rPr lang="en-US" smtClean="0"/>
-              <a:t>5 May 2026</a:t>
+              <a:t>1 June 2026</a:t>
             </a:fld>
             <a:endParaRPr lang="en-US"/>
           </a:p>
@@ -12463,7 +13778,7 @@
           <a:p>
             <a:fld id="{98A19125-94A7-4474-858C-FD9C4ABE9DDA}" type="datetime3">
               <a:rPr lang="en-US" smtClean="0"/>
-              <a:t>5 May 2026</a:t>
+              <a:t>1 June 2026</a:t>
             </a:fld>
             <a:endParaRPr lang="en-US"/>
           </a:p>
@@ -13566,7 +14881,7 @@
           <a:p>
             <a:fld id="{3BA0343D-C8D8-43CE-BB79-50DEA219DB07}" type="datetime3">
               <a:rPr lang="en-US" smtClean="0"/>
-              <a:t>5 May 2026</a:t>
+              <a:t>1 June 2026</a:t>
             </a:fld>
             <a:endParaRPr lang="en-US"/>
           </a:p>
@@ -13855,7 +15170,7 @@
           <a:p>
             <a:fld id="{453BD212-0B9F-4987-965F-AC83B2FC354F}" type="datetime3">
               <a:rPr lang="en-US" smtClean="0"/>
-              <a:t>5 May 2026</a:t>
+              <a:t>1 June 2026</a:t>
             </a:fld>
             <a:endParaRPr lang="en-US"/>
           </a:p>
@@ -14100,7 +15415,7 @@
           <a:p>
             <a:fld id="{6DDC931E-8CBE-4A3F-A034-9B6122C6DCDB}" type="datetime3">
               <a:rPr lang="en-US" smtClean="0"/>
-              <a:t>5 May 2026</a:t>
+              <a:t>1 June 2026</a:t>
             </a:fld>
             <a:endParaRPr lang="en-US"/>
           </a:p>
@@ -15866,7 +17181,7 @@
           <a:p>
             <a:fld id="{220AF9C2-5E8A-4308-AE6B-CA9B65007D0E}" type="datetime3">
               <a:rPr lang="en-US" smtClean="0"/>
-              <a:t>5 May 2026</a:t>
+              <a:t>1 June 2026</a:t>
             </a:fld>
             <a:endParaRPr lang="en-US"/>
           </a:p>
@@ -16179,7 +17494,7 @@
           <a:p>
             <a:fld id="{FF31E861-D2AF-431D-860B-DCF67C218052}" type="datetime3">
               <a:rPr lang="en-US" smtClean="0"/>
-              <a:t>5 May 2026</a:t>
+              <a:t>1 June 2026</a:t>
             </a:fld>
             <a:endParaRPr lang="en-US"/>
           </a:p>
@@ -16458,7 +17773,7 @@
           <a:p>
             <a:fld id="{D1DA25B2-AAF1-4C1F-AA38-12D5BFA7D4C8}" type="datetime3">
               <a:rPr lang="en-US" smtClean="0"/>
-              <a:t>5 May 2026</a:t>
+              <a:t>1 June 2026</a:t>
             </a:fld>
             <a:endParaRPr lang="en-US"/>
           </a:p>
@@ -16737,7 +18052,7 @@
           <a:p>
             <a:fld id="{A25C0F39-45D0-48E9-90B3-7FE8FCE561C8}" type="datetime3">
               <a:rPr lang="en-US" smtClean="0"/>
-              <a:t>5 May 2026</a:t>
+              <a:t>1 June 2026</a:t>
             </a:fld>
             <a:endParaRPr lang="en-US"/>
           </a:p>
@@ -17238,7 +18553,7 @@
           <a:p>
             <a:fld id="{9BAF1A3D-92FA-4F24-9781-74AFA516A230}" type="datetime3">
               <a:rPr lang="en-US" smtClean="0"/>
-              <a:t>5 May 2026</a:t>
+              <a:t>1 June 2026</a:t>
             </a:fld>
             <a:endParaRPr lang="en-US"/>
           </a:p>
@@ -17365,7 +18680,7 @@
           <a:p>
             <a:fld id="{5719C672-856D-4617-A693-8FE15749A9B7}" type="datetime3">
               <a:rPr lang="en-US" smtClean="0"/>
-              <a:t>5 May 2026</a:t>
+              <a:t>1 June 2026</a:t>
             </a:fld>
             <a:endParaRPr lang="en-US"/>
           </a:p>
@@ -17500,7 +18815,7 @@
           <a:p>
             <a:fld id="{5F6C764D-A39E-4C03-B161-E0BC66E8883B}" type="datetime3">
               <a:rPr lang="en-US" smtClean="0"/>
-              <a:t>5 May 2026</a:t>
+              <a:t>1 June 2026</a:t>
             </a:fld>
             <a:endParaRPr lang="en-US"/>
           </a:p>
@@ -17742,7 +19057,7 @@
           <a:p>
             <a:fld id="{6E3E33F9-20B7-4995-BE7D-165DBB597850}" type="datetime3">
               <a:rPr lang="en-US" smtClean="0"/>
-              <a:t>5 May 2026</a:t>
+              <a:t>1 June 2026</a:t>
             </a:fld>
             <a:endParaRPr lang="en-US"/>
           </a:p>
@@ -17855,7 +19170,7 @@
           <a:p>
             <a:fld id="{CD41C263-3501-4369-A962-62B6BF915CDE}" type="datetime3">
               <a:rPr lang="en-US" smtClean="0"/>
-              <a:t>5 May 2026</a:t>
+              <a:t>1 June 2026</a:t>
             </a:fld>
             <a:endParaRPr lang="en-US"/>
           </a:p>
@@ -18258,7 +19573,7 @@
           <a:p>
             <a:fld id="{B06F3EBE-B2E8-4992-9F00-9E4B44F057C0}" type="datetime3">
               <a:rPr lang="en-US" smtClean="0"/>
-              <a:t>5 May 2026</a:t>
+              <a:t>1 June 2026</a:t>
             </a:fld>
             <a:endParaRPr lang="en-US"/>
           </a:p>
@@ -18390,7 +19705,7 @@
           <a:p>
             <a:fld id="{D41656AB-D2E1-472E-8B95-0DF5C6E1D623}" type="datetime3">
               <a:rPr lang="en-US" smtClean="0"/>
-              <a:t>5 May 2026</a:t>
+              <a:t>1 June 2026</a:t>
             </a:fld>
             <a:endParaRPr lang="en-US"/>
           </a:p>
@@ -22531,7 +23846,7 @@
           <a:p>
             <a:fld id="{AD622D1A-DF83-41A8-85FF-04D90BF831D3}" type="datetime3">
               <a:rPr lang="en-US" smtClean="0"/>
-              <a:t>5 May 2026</a:t>
+              <a:t>1 June 2026</a:t>
             </a:fld>
             <a:endParaRPr lang="en-US"/>
           </a:p>
@@ -22781,7 +24096,7 @@
           <a:p>
             <a:fld id="{334F72C3-CDF3-44A8-B602-1649B1728485}" type="datetime3">
               <a:rPr lang="en-US" smtClean="0"/>
-              <a:t>5 May 2026</a:t>
+              <a:t>1 June 2026</a:t>
             </a:fld>
             <a:endParaRPr lang="en-US"/>
           </a:p>
@@ -23088,7 +24403,7 @@
           <a:p>
             <a:fld id="{1E0132BA-B5E7-4FFD-AF6C-169169D47D4A}" type="datetime3">
               <a:rPr lang="en-US" smtClean="0"/>
-              <a:t>5 May 2026</a:t>
+              <a:t>1 June 2026</a:t>
             </a:fld>
             <a:endParaRPr lang="en-US"/>
           </a:p>
@@ -23569,7 +24884,7 @@
           <a:p>
             <a:fld id="{81A30091-1C2A-4151-8D3C-D1E47A72615F}" type="datetime3">
               <a:rPr lang="en-US" smtClean="0"/>
-              <a:t>5 May 2026</a:t>
+              <a:t>1 June 2026</a:t>
             </a:fld>
             <a:endParaRPr lang="en-US"/>
           </a:p>
@@ -24206,7 +25521,7 @@
           <a:p>
             <a:fld id="{35D703CE-07B4-4C05-A488-B4566700621F}" type="datetime3">
               <a:rPr lang="en-US" smtClean="0"/>
-              <a:t>5 May 2026</a:t>
+              <a:t>1 June 2026</a:t>
             </a:fld>
             <a:endParaRPr lang="en-US"/>
           </a:p>
@@ -25264,7 +26579,7 @@
           <a:p>
             <a:fld id="{694BD61C-20BA-43AF-A21F-1DAFB3200099}" type="datetime3">
               <a:rPr lang="en-US" smtClean="0"/>
-              <a:t>5 May 2026</a:t>
+              <a:t>1 June 2026</a:t>
             </a:fld>
             <a:endParaRPr lang="en-US"/>
           </a:p>
@@ -25751,7 +27066,7 @@
           <a:p>
             <a:fld id="{CABCB1B0-B6E5-4DD1-BB55-95C076D6C0C8}" type="datetime3">
               <a:rPr lang="en-US" smtClean="0"/>
-              <a:t>5 May 2026</a:t>
+              <a:t>1 June 2026</a:t>
             </a:fld>
             <a:endParaRPr lang="en-US"/>
           </a:p>
@@ -26615,12 +27930,9 @@
           <a:bodyPr/>
           <a:lstStyle/>
           <a:p>
-            <a:br>
+            <a:r>
               <a:rPr lang="en-US" dirty="0"/>
-            </a:br>
-            <a:r>
-              <a:rPr lang="en-US" dirty="0"/>
-              <a:t>intro to python</a:t>
+              <a:t>Environment setup</a:t>
             </a:r>
           </a:p>
         </p:txBody>
@@ -26852,6 +28164,2190 @@
   <p:cSld>
     <p:spTree>
       <p:nvGrpSpPr>
+        <p:cNvPr id="1" name="Shape 247">
+          <a:extLst>
+            <a:ext uri="{FF2B5EF4-FFF2-40B4-BE49-F238E27FC236}">
+              <a16:creationId xmlns:a16="http://schemas.microsoft.com/office/drawing/2014/main" id="{1D012512-475A-1A49-2FFF-B1E79184C657}"/>
+            </a:ext>
+          </a:extLst>
+        </p:cNvPr>
+        <p:cNvGrpSpPr/>
+        <p:nvPr/>
+      </p:nvGrpSpPr>
+      <p:grpSpPr>
+        <a:xfrm>
+          <a:off x="0" y="0"/>
+          <a:ext cx="0" cy="0"/>
+          <a:chOff x="0" y="0"/>
+          <a:chExt cx="0" cy="0"/>
+        </a:xfrm>
+      </p:grpSpPr>
+      <p:sp>
+        <p:nvSpPr>
+          <p:cNvPr id="249" name="Google Shape;249;p44">
+            <a:extLst>
+              <a:ext uri="{FF2B5EF4-FFF2-40B4-BE49-F238E27FC236}">
+                <a16:creationId xmlns:a16="http://schemas.microsoft.com/office/drawing/2014/main" id="{32C0A142-BC40-EB92-5486-DEE33E93783E}"/>
+              </a:ext>
+            </a:extLst>
+          </p:cNvPr>
+          <p:cNvSpPr txBox="1">
+            <a:spLocks noGrp="1"/>
+          </p:cNvSpPr>
+          <p:nvPr>
+            <p:ph type="title"/>
+          </p:nvPr>
+        </p:nvSpPr>
+        <p:spPr>
+          <a:xfrm>
+            <a:off x="411481" y="308611"/>
+            <a:ext cx="6383329" cy="891778"/>
+          </a:xfrm>
+          <a:noFill/>
+          <a:ln>
+            <a:noFill/>
+          </a:ln>
+        </p:spPr>
+        <p:txBody>
+          <a:bodyPr spcFirstLastPara="1" wrap="square" lIns="91425" tIns="45700" rIns="91425" bIns="45700" anchor="ctr" anchorCtr="0">
+            <a:normAutofit/>
+          </a:bodyPr>
+          <a:lstStyle/>
+          <a:p>
+            <a:pPr lvl="0"/>
+            <a:r>
+              <a:rPr lang="en-US" dirty="0"/>
+              <a:t>Fork the content for this summer</a:t>
+            </a:r>
+          </a:p>
+        </p:txBody>
+      </p:sp>
+      <p:sp>
+        <p:nvSpPr>
+          <p:cNvPr id="4" name="Text Placeholder 3">
+            <a:extLst>
+              <a:ext uri="{FF2B5EF4-FFF2-40B4-BE49-F238E27FC236}">
+                <a16:creationId xmlns:a16="http://schemas.microsoft.com/office/drawing/2014/main" id="{E1D58D23-7785-782C-DD39-1FA4D988A4B1}"/>
+              </a:ext>
+            </a:extLst>
+          </p:cNvPr>
+          <p:cNvSpPr>
+            <a:spLocks noGrp="1"/>
+          </p:cNvSpPr>
+          <p:nvPr>
+            <p:ph type="body" sz="quarter" idx="11"/>
+          </p:nvPr>
+        </p:nvSpPr>
+        <p:spPr>
+          <a:xfrm>
+            <a:off x="411481" y="1363940"/>
+            <a:ext cx="5937281" cy="3017520"/>
+          </a:xfrm>
+        </p:spPr>
+        <p:txBody>
+          <a:bodyPr/>
+          <a:lstStyle/>
+          <a:p>
+            <a:r>
+              <a:rPr lang="en-US" dirty="0"/>
+              <a:t>Go to </a:t>
+            </a:r>
+            <a:r>
+              <a:rPr lang="en-US" dirty="0">
+                <a:hlinkClick r:id="rId3"/>
+              </a:rPr>
+              <a:t>https://github.com/AFC-AI2C/summer-course</a:t>
+            </a:r>
+            <a:endParaRPr lang="en-US" dirty="0"/>
+          </a:p>
+          <a:p>
+            <a:endParaRPr lang="en-US" dirty="0"/>
+          </a:p>
+        </p:txBody>
+      </p:sp>
+      <p:pic>
+        <p:nvPicPr>
+          <p:cNvPr id="8" name="Picture 7">
+            <a:extLst>
+              <a:ext uri="{FF2B5EF4-FFF2-40B4-BE49-F238E27FC236}">
+                <a16:creationId xmlns:a16="http://schemas.microsoft.com/office/drawing/2014/main" id="{D44C6DE1-3592-AF11-FAE3-F132EBD8B559}"/>
+              </a:ext>
+            </a:extLst>
+          </p:cNvPr>
+          <p:cNvPicPr>
+            <a:picLocks noChangeAspect="1"/>
+          </p:cNvPicPr>
+          <p:nvPr/>
+        </p:nvPicPr>
+        <p:blipFill>
+          <a:blip r:embed="rId4"/>
+          <a:stretch>
+            <a:fillRect/>
+          </a:stretch>
+        </p:blipFill>
+        <p:spPr>
+          <a:xfrm>
+            <a:off x="1000126" y="1754459"/>
+            <a:ext cx="6894938" cy="3485049"/>
+          </a:xfrm>
+          <a:prstGeom prst="rect">
+            <a:avLst/>
+          </a:prstGeom>
+        </p:spPr>
+      </p:pic>
+      <p:sp>
+        <p:nvSpPr>
+          <p:cNvPr id="9" name="Rectangle 8">
+            <a:extLst>
+              <a:ext uri="{FF2B5EF4-FFF2-40B4-BE49-F238E27FC236}">
+                <a16:creationId xmlns:a16="http://schemas.microsoft.com/office/drawing/2014/main" id="{E1C4340D-9A99-7025-595C-23DE51FDB03A}"/>
+              </a:ext>
+            </a:extLst>
+          </p:cNvPr>
+          <p:cNvSpPr/>
+          <p:nvPr/>
+        </p:nvSpPr>
+        <p:spPr>
+          <a:xfrm>
+            <a:off x="5843239" y="1992350"/>
+            <a:ext cx="624468" cy="468351"/>
+          </a:xfrm>
+          <a:prstGeom prst="rect">
+            <a:avLst/>
+          </a:prstGeom>
+          <a:noFill/>
+          <a:ln w="38100">
+            <a:solidFill>
+              <a:srgbClr val="FF0000"/>
+            </a:solidFill>
+            <a:miter/>
+          </a:ln>
+        </p:spPr>
+        <p:style>
+          <a:lnRef idx="0">
+            <a:schemeClr val="accent1"/>
+          </a:lnRef>
+          <a:fillRef idx="1">
+            <a:schemeClr val="accent1"/>
+          </a:fillRef>
+          <a:effectRef idx="0">
+            <a:srgbClr val="000000"/>
+          </a:effectRef>
+          <a:fontRef idx="minor">
+            <a:srgbClr val="FFFFFF"/>
+          </a:fontRef>
+        </p:style>
+        <p:txBody>
+          <a:bodyPr rtlCol="0" anchor="ctr"/>
+          <a:lstStyle/>
+          <a:p>
+            <a:pPr algn="ctr">
+              <a:lnSpc>
+                <a:spcPct val="95000"/>
+              </a:lnSpc>
+            </a:pPr>
+            <a:endParaRPr lang="en-US" sz="1700"/>
+          </a:p>
+        </p:txBody>
+      </p:sp>
+    </p:spTree>
+    <p:extLst>
+      <p:ext uri="{BB962C8B-B14F-4D97-AF65-F5344CB8AC3E}">
+        <p14:creationId xmlns:p14="http://schemas.microsoft.com/office/powerpoint/2010/main" val="210788066"/>
+      </p:ext>
+    </p:extLst>
+  </p:cSld>
+  <p:clrMapOvr>
+    <a:masterClrMapping/>
+  </p:clrMapOvr>
+</p:sld>
+</file>
+
+<file path=ppt/slides/slide12.xml><?xml version="1.0" encoding="utf-8"?>
+<p:sld xmlns:a="http://schemas.openxmlformats.org/drawingml/2006/main" xmlns:r="http://schemas.openxmlformats.org/officeDocument/2006/relationships" xmlns:p="http://schemas.openxmlformats.org/presentationml/2006/main">
+  <p:cSld>
+    <p:spTree>
+      <p:nvGrpSpPr>
+        <p:cNvPr id="1" name="Shape 247">
+          <a:extLst>
+            <a:ext uri="{FF2B5EF4-FFF2-40B4-BE49-F238E27FC236}">
+              <a16:creationId xmlns:a16="http://schemas.microsoft.com/office/drawing/2014/main" id="{CDA3A273-E3E1-FD5B-A39E-CCE21A24D510}"/>
+            </a:ext>
+          </a:extLst>
+        </p:cNvPr>
+        <p:cNvGrpSpPr/>
+        <p:nvPr/>
+      </p:nvGrpSpPr>
+      <p:grpSpPr>
+        <a:xfrm>
+          <a:off x="0" y="0"/>
+          <a:ext cx="0" cy="0"/>
+          <a:chOff x="0" y="0"/>
+          <a:chExt cx="0" cy="0"/>
+        </a:xfrm>
+      </p:grpSpPr>
+      <p:pic>
+        <p:nvPicPr>
+          <p:cNvPr id="10" name="Picture 9">
+            <a:extLst>
+              <a:ext uri="{FF2B5EF4-FFF2-40B4-BE49-F238E27FC236}">
+                <a16:creationId xmlns:a16="http://schemas.microsoft.com/office/drawing/2014/main" id="{FE04F518-12DC-0094-D7ED-D293577F3003}"/>
+              </a:ext>
+            </a:extLst>
+          </p:cNvPr>
+          <p:cNvPicPr>
+            <a:picLocks noChangeAspect="1"/>
+          </p:cNvPicPr>
+          <p:nvPr/>
+        </p:nvPicPr>
+        <p:blipFill>
+          <a:blip r:embed="rId3"/>
+          <a:stretch>
+            <a:fillRect/>
+          </a:stretch>
+        </p:blipFill>
+        <p:spPr>
+          <a:xfrm>
+            <a:off x="1878016" y="1033347"/>
+            <a:ext cx="5510167" cy="3931734"/>
+          </a:xfrm>
+          <a:prstGeom prst="rect">
+            <a:avLst/>
+          </a:prstGeom>
+        </p:spPr>
+      </p:pic>
+      <p:sp>
+        <p:nvSpPr>
+          <p:cNvPr id="11" name="Rectangle 10">
+            <a:extLst>
+              <a:ext uri="{FF2B5EF4-FFF2-40B4-BE49-F238E27FC236}">
+                <a16:creationId xmlns:a16="http://schemas.microsoft.com/office/drawing/2014/main" id="{97FABDEE-5903-B2DF-C869-8F2A7D8A7FD7}"/>
+              </a:ext>
+            </a:extLst>
+          </p:cNvPr>
+          <p:cNvSpPr/>
+          <p:nvPr/>
+        </p:nvSpPr>
+        <p:spPr>
+          <a:xfrm>
+            <a:off x="6118302" y="4329459"/>
+            <a:ext cx="758284" cy="468351"/>
+          </a:xfrm>
+          <a:prstGeom prst="rect">
+            <a:avLst/>
+          </a:prstGeom>
+          <a:noFill/>
+          <a:ln w="38100">
+            <a:solidFill>
+              <a:srgbClr val="FF0000"/>
+            </a:solidFill>
+            <a:miter/>
+          </a:ln>
+        </p:spPr>
+        <p:style>
+          <a:lnRef idx="0">
+            <a:schemeClr val="accent1"/>
+          </a:lnRef>
+          <a:fillRef idx="1">
+            <a:schemeClr val="accent1"/>
+          </a:fillRef>
+          <a:effectRef idx="0">
+            <a:srgbClr val="000000"/>
+          </a:effectRef>
+          <a:fontRef idx="minor">
+            <a:srgbClr val="FFFFFF"/>
+          </a:fontRef>
+        </p:style>
+        <p:txBody>
+          <a:bodyPr rtlCol="0" anchor="ctr"/>
+          <a:lstStyle/>
+          <a:p>
+            <a:pPr algn="ctr">
+              <a:lnSpc>
+                <a:spcPct val="95000"/>
+              </a:lnSpc>
+            </a:pPr>
+            <a:endParaRPr lang="en-US" sz="1700"/>
+          </a:p>
+        </p:txBody>
+      </p:sp>
+      <p:sp>
+        <p:nvSpPr>
+          <p:cNvPr id="12" name="Google Shape;249;p44">
+            <a:extLst>
+              <a:ext uri="{FF2B5EF4-FFF2-40B4-BE49-F238E27FC236}">
+                <a16:creationId xmlns:a16="http://schemas.microsoft.com/office/drawing/2014/main" id="{DBDECF57-42A8-4250-A37C-9A0667A1567F}"/>
+              </a:ext>
+            </a:extLst>
+          </p:cNvPr>
+          <p:cNvSpPr txBox="1">
+            <a:spLocks noGrp="1"/>
+          </p:cNvSpPr>
+          <p:nvPr>
+            <p:ph type="title"/>
+          </p:nvPr>
+        </p:nvSpPr>
+        <p:spPr>
+          <a:xfrm>
+            <a:off x="411481" y="308611"/>
+            <a:ext cx="6383329" cy="891778"/>
+          </a:xfrm>
+          <a:noFill/>
+          <a:ln>
+            <a:noFill/>
+          </a:ln>
+        </p:spPr>
+        <p:txBody>
+          <a:bodyPr spcFirstLastPara="1" wrap="square" lIns="91425" tIns="45700" rIns="91425" bIns="45700" anchor="ctr" anchorCtr="0">
+            <a:normAutofit/>
+          </a:bodyPr>
+          <a:lstStyle/>
+          <a:p>
+            <a:pPr lvl="0"/>
+            <a:r>
+              <a:rPr lang="en-US" dirty="0"/>
+              <a:t>Create a fork</a:t>
+            </a:r>
+          </a:p>
+        </p:txBody>
+      </p:sp>
+    </p:spTree>
+    <p:extLst>
+      <p:ext uri="{BB962C8B-B14F-4D97-AF65-F5344CB8AC3E}">
+        <p14:creationId xmlns:p14="http://schemas.microsoft.com/office/powerpoint/2010/main" val="558195663"/>
+      </p:ext>
+    </p:extLst>
+  </p:cSld>
+  <p:clrMapOvr>
+    <a:masterClrMapping/>
+  </p:clrMapOvr>
+</p:sld>
+</file>
+
+<file path=ppt/slides/slide13.xml><?xml version="1.0" encoding="utf-8"?>
+<p:sld xmlns:a="http://schemas.openxmlformats.org/drawingml/2006/main" xmlns:r="http://schemas.openxmlformats.org/officeDocument/2006/relationships" xmlns:p="http://schemas.openxmlformats.org/presentationml/2006/main">
+  <p:cSld>
+    <p:spTree>
+      <p:nvGrpSpPr>
+        <p:cNvPr id="1" name="Shape 247">
+          <a:extLst>
+            <a:ext uri="{FF2B5EF4-FFF2-40B4-BE49-F238E27FC236}">
+              <a16:creationId xmlns:a16="http://schemas.microsoft.com/office/drawing/2014/main" id="{98945316-27DE-53FC-F095-006A50EFCE2F}"/>
+            </a:ext>
+          </a:extLst>
+        </p:cNvPr>
+        <p:cNvGrpSpPr/>
+        <p:nvPr/>
+      </p:nvGrpSpPr>
+      <p:grpSpPr>
+        <a:xfrm>
+          <a:off x="0" y="0"/>
+          <a:ext cx="0" cy="0"/>
+          <a:chOff x="0" y="0"/>
+          <a:chExt cx="0" cy="0"/>
+        </a:xfrm>
+      </p:grpSpPr>
+      <p:pic>
+        <p:nvPicPr>
+          <p:cNvPr id="3" name="Picture 2">
+            <a:extLst>
+              <a:ext uri="{FF2B5EF4-FFF2-40B4-BE49-F238E27FC236}">
+                <a16:creationId xmlns:a16="http://schemas.microsoft.com/office/drawing/2014/main" id="{5F97F769-E95D-35AD-A952-B5BCB72130BD}"/>
+              </a:ext>
+            </a:extLst>
+          </p:cNvPr>
+          <p:cNvPicPr>
+            <a:picLocks noChangeAspect="1"/>
+          </p:cNvPicPr>
+          <p:nvPr/>
+        </p:nvPicPr>
+        <p:blipFill>
+          <a:blip r:embed="rId3"/>
+          <a:stretch>
+            <a:fillRect/>
+          </a:stretch>
+        </p:blipFill>
+        <p:spPr>
+          <a:xfrm>
+            <a:off x="0" y="1063642"/>
+            <a:ext cx="9144000" cy="4079858"/>
+          </a:xfrm>
+          <a:prstGeom prst="rect">
+            <a:avLst/>
+          </a:prstGeom>
+        </p:spPr>
+      </p:pic>
+      <p:sp>
+        <p:nvSpPr>
+          <p:cNvPr id="4" name="Google Shape;249;p44">
+            <a:extLst>
+              <a:ext uri="{FF2B5EF4-FFF2-40B4-BE49-F238E27FC236}">
+                <a16:creationId xmlns:a16="http://schemas.microsoft.com/office/drawing/2014/main" id="{88DB8D88-3EC1-3935-A284-76A61C783E85}"/>
+              </a:ext>
+            </a:extLst>
+          </p:cNvPr>
+          <p:cNvSpPr txBox="1">
+            <a:spLocks noGrp="1"/>
+          </p:cNvSpPr>
+          <p:nvPr>
+            <p:ph type="title"/>
+          </p:nvPr>
+        </p:nvSpPr>
+        <p:spPr>
+          <a:xfrm>
+            <a:off x="411481" y="308611"/>
+            <a:ext cx="6383329" cy="891778"/>
+          </a:xfrm>
+          <a:noFill/>
+          <a:ln>
+            <a:noFill/>
+          </a:ln>
+        </p:spPr>
+        <p:txBody>
+          <a:bodyPr spcFirstLastPara="1" wrap="square" lIns="91425" tIns="45700" rIns="91425" bIns="45700" anchor="ctr" anchorCtr="0">
+            <a:normAutofit/>
+          </a:bodyPr>
+          <a:lstStyle/>
+          <a:p>
+            <a:pPr lvl="0"/>
+            <a:r>
+              <a:rPr lang="en-US" dirty="0"/>
+              <a:t>YOUR FORKED REPO!</a:t>
+            </a:r>
+          </a:p>
+        </p:txBody>
+      </p:sp>
+    </p:spTree>
+    <p:extLst>
+      <p:ext uri="{BB962C8B-B14F-4D97-AF65-F5344CB8AC3E}">
+        <p14:creationId xmlns:p14="http://schemas.microsoft.com/office/powerpoint/2010/main" val="120147060"/>
+      </p:ext>
+    </p:extLst>
+  </p:cSld>
+  <p:clrMapOvr>
+    <a:masterClrMapping/>
+  </p:clrMapOvr>
+</p:sld>
+</file>
+
+<file path=ppt/slides/slide14.xml><?xml version="1.0" encoding="utf-8"?>
+<p:sld xmlns:a="http://schemas.openxmlformats.org/drawingml/2006/main" xmlns:r="http://schemas.openxmlformats.org/officeDocument/2006/relationships" xmlns:p="http://schemas.openxmlformats.org/presentationml/2006/main">
+  <p:cSld>
+    <p:spTree>
+      <p:nvGrpSpPr>
+        <p:cNvPr id="1" name="Shape 247">
+          <a:extLst>
+            <a:ext uri="{FF2B5EF4-FFF2-40B4-BE49-F238E27FC236}">
+              <a16:creationId xmlns:a16="http://schemas.microsoft.com/office/drawing/2014/main" id="{4CB87A01-4EFA-672D-64B8-B0B78A7FC32B}"/>
+            </a:ext>
+          </a:extLst>
+        </p:cNvPr>
+        <p:cNvGrpSpPr/>
+        <p:nvPr/>
+      </p:nvGrpSpPr>
+      <p:grpSpPr>
+        <a:xfrm>
+          <a:off x="0" y="0"/>
+          <a:ext cx="0" cy="0"/>
+          <a:chOff x="0" y="0"/>
+          <a:chExt cx="0" cy="0"/>
+        </a:xfrm>
+      </p:grpSpPr>
+      <p:pic>
+        <p:nvPicPr>
+          <p:cNvPr id="3" name="Picture 2">
+            <a:extLst>
+              <a:ext uri="{FF2B5EF4-FFF2-40B4-BE49-F238E27FC236}">
+                <a16:creationId xmlns:a16="http://schemas.microsoft.com/office/drawing/2014/main" id="{F6DC2C90-827C-B480-837E-FC88CCA515C2}"/>
+              </a:ext>
+            </a:extLst>
+          </p:cNvPr>
+          <p:cNvPicPr>
+            <a:picLocks noChangeAspect="1"/>
+          </p:cNvPicPr>
+          <p:nvPr/>
+        </p:nvPicPr>
+        <p:blipFill>
+          <a:blip r:embed="rId3"/>
+          <a:stretch>
+            <a:fillRect/>
+          </a:stretch>
+        </p:blipFill>
+        <p:spPr>
+          <a:xfrm>
+            <a:off x="341970" y="1048249"/>
+            <a:ext cx="7359805" cy="4100538"/>
+          </a:xfrm>
+          <a:prstGeom prst="rect">
+            <a:avLst/>
+          </a:prstGeom>
+        </p:spPr>
+      </p:pic>
+      <p:sp>
+        <p:nvSpPr>
+          <p:cNvPr id="4" name="Arrow: Right 3">
+            <a:extLst>
+              <a:ext uri="{FF2B5EF4-FFF2-40B4-BE49-F238E27FC236}">
+                <a16:creationId xmlns:a16="http://schemas.microsoft.com/office/drawing/2014/main" id="{C15FBEC0-47A0-800A-E2D4-0294517B36BC}"/>
+              </a:ext>
+            </a:extLst>
+          </p:cNvPr>
+          <p:cNvSpPr/>
+          <p:nvPr/>
+        </p:nvSpPr>
+        <p:spPr>
+          <a:xfrm rot="9934382">
+            <a:off x="5032917" y="1390179"/>
+            <a:ext cx="624468" cy="282498"/>
+          </a:xfrm>
+          <a:prstGeom prst="rightArrow">
+            <a:avLst/>
+          </a:prstGeom>
+          <a:solidFill>
+            <a:srgbClr val="FF0000"/>
+          </a:solidFill>
+          <a:ln>
+            <a:solidFill>
+              <a:srgbClr val="FF0000"/>
+            </a:solidFill>
+            <a:miter/>
+          </a:ln>
+        </p:spPr>
+        <p:style>
+          <a:lnRef idx="0">
+            <a:schemeClr val="accent1"/>
+          </a:lnRef>
+          <a:fillRef idx="1">
+            <a:schemeClr val="accent1"/>
+          </a:fillRef>
+          <a:effectRef idx="0">
+            <a:srgbClr val="000000"/>
+          </a:effectRef>
+          <a:fontRef idx="minor">
+            <a:srgbClr val="FFFFFF"/>
+          </a:fontRef>
+        </p:style>
+        <p:txBody>
+          <a:bodyPr rtlCol="0" anchor="ctr"/>
+          <a:lstStyle/>
+          <a:p>
+            <a:pPr algn="ctr">
+              <a:lnSpc>
+                <a:spcPct val="95000"/>
+              </a:lnSpc>
+            </a:pPr>
+            <a:endParaRPr lang="en-US" sz="1700"/>
+          </a:p>
+        </p:txBody>
+      </p:sp>
+      <p:sp>
+        <p:nvSpPr>
+          <p:cNvPr id="5" name="Arrow: Right 4">
+            <a:extLst>
+              <a:ext uri="{FF2B5EF4-FFF2-40B4-BE49-F238E27FC236}">
+                <a16:creationId xmlns:a16="http://schemas.microsoft.com/office/drawing/2014/main" id="{07E99C7D-7B4F-40A2-63AA-AFCABBC53491}"/>
+              </a:ext>
+            </a:extLst>
+          </p:cNvPr>
+          <p:cNvSpPr/>
+          <p:nvPr/>
+        </p:nvSpPr>
+        <p:spPr>
+          <a:xfrm rot="10222261">
+            <a:off x="4932555" y="2285997"/>
+            <a:ext cx="624468" cy="282498"/>
+          </a:xfrm>
+          <a:prstGeom prst="rightArrow">
+            <a:avLst/>
+          </a:prstGeom>
+          <a:solidFill>
+            <a:srgbClr val="FF0000"/>
+          </a:solidFill>
+          <a:ln>
+            <a:solidFill>
+              <a:srgbClr val="FF0000"/>
+            </a:solidFill>
+            <a:miter/>
+          </a:ln>
+        </p:spPr>
+        <p:style>
+          <a:lnRef idx="0">
+            <a:schemeClr val="accent1"/>
+          </a:lnRef>
+          <a:fillRef idx="1">
+            <a:schemeClr val="accent1"/>
+          </a:fillRef>
+          <a:effectRef idx="0">
+            <a:srgbClr val="000000"/>
+          </a:effectRef>
+          <a:fontRef idx="minor">
+            <a:srgbClr val="FFFFFF"/>
+          </a:fontRef>
+        </p:style>
+        <p:txBody>
+          <a:bodyPr rtlCol="0" anchor="ctr"/>
+          <a:lstStyle/>
+          <a:p>
+            <a:pPr algn="ctr">
+              <a:lnSpc>
+                <a:spcPct val="95000"/>
+              </a:lnSpc>
+            </a:pPr>
+            <a:endParaRPr lang="en-US" sz="1700"/>
+          </a:p>
+        </p:txBody>
+      </p:sp>
+      <p:sp>
+        <p:nvSpPr>
+          <p:cNvPr id="6" name="Google Shape;249;p44">
+            <a:extLst>
+              <a:ext uri="{FF2B5EF4-FFF2-40B4-BE49-F238E27FC236}">
+                <a16:creationId xmlns:a16="http://schemas.microsoft.com/office/drawing/2014/main" id="{2E826254-3333-D45A-95C4-6169A734EC41}"/>
+              </a:ext>
+            </a:extLst>
+          </p:cNvPr>
+          <p:cNvSpPr txBox="1">
+            <a:spLocks noGrp="1"/>
+          </p:cNvSpPr>
+          <p:nvPr>
+            <p:ph type="title"/>
+          </p:nvPr>
+        </p:nvSpPr>
+        <p:spPr>
+          <a:xfrm>
+            <a:off x="411481" y="308611"/>
+            <a:ext cx="7359805" cy="891778"/>
+          </a:xfrm>
+          <a:noFill/>
+          <a:ln>
+            <a:noFill/>
+          </a:ln>
+        </p:spPr>
+        <p:txBody>
+          <a:bodyPr spcFirstLastPara="1" wrap="square" lIns="91425" tIns="45700" rIns="91425" bIns="45700" anchor="ctr" anchorCtr="0">
+            <a:normAutofit/>
+          </a:bodyPr>
+          <a:lstStyle/>
+          <a:p>
+            <a:pPr lvl="0"/>
+            <a:r>
+              <a:rPr lang="en-US" dirty="0"/>
+              <a:t>CLONE FOR LOCAL DEVELOPMENT</a:t>
+            </a:r>
+          </a:p>
+        </p:txBody>
+      </p:sp>
+    </p:spTree>
+    <p:extLst>
+      <p:ext uri="{BB962C8B-B14F-4D97-AF65-F5344CB8AC3E}">
+        <p14:creationId xmlns:p14="http://schemas.microsoft.com/office/powerpoint/2010/main" val="2199570706"/>
+      </p:ext>
+    </p:extLst>
+  </p:cSld>
+  <p:clrMapOvr>
+    <a:masterClrMapping/>
+  </p:clrMapOvr>
+</p:sld>
+</file>
+
+<file path=ppt/slides/slide15.xml><?xml version="1.0" encoding="utf-8"?>
+<p:sld xmlns:a="http://schemas.openxmlformats.org/drawingml/2006/main" xmlns:r="http://schemas.openxmlformats.org/officeDocument/2006/relationships" xmlns:p="http://schemas.openxmlformats.org/presentationml/2006/main">
+  <p:cSld>
+    <p:spTree>
+      <p:nvGrpSpPr>
+        <p:cNvPr id="1" name="Shape 247">
+          <a:extLst>
+            <a:ext uri="{FF2B5EF4-FFF2-40B4-BE49-F238E27FC236}">
+              <a16:creationId xmlns:a16="http://schemas.microsoft.com/office/drawing/2014/main" id="{2505F461-A12F-CE88-34BC-6E3335897097}"/>
+            </a:ext>
+          </a:extLst>
+        </p:cNvPr>
+        <p:cNvGrpSpPr/>
+        <p:nvPr/>
+      </p:nvGrpSpPr>
+      <p:grpSpPr>
+        <a:xfrm>
+          <a:off x="0" y="0"/>
+          <a:ext cx="0" cy="0"/>
+          <a:chOff x="0" y="0"/>
+          <a:chExt cx="0" cy="0"/>
+        </a:xfrm>
+      </p:grpSpPr>
+      <p:pic>
+        <p:nvPicPr>
+          <p:cNvPr id="3" name="Picture 2">
+            <a:extLst>
+              <a:ext uri="{FF2B5EF4-FFF2-40B4-BE49-F238E27FC236}">
+                <a16:creationId xmlns:a16="http://schemas.microsoft.com/office/drawing/2014/main" id="{8CFD5FAF-B0FA-EC0D-AA09-8DFA5D4F56BC}"/>
+              </a:ext>
+            </a:extLst>
+          </p:cNvPr>
+          <p:cNvPicPr>
+            <a:picLocks noChangeAspect="1"/>
+          </p:cNvPicPr>
+          <p:nvPr/>
+        </p:nvPicPr>
+        <p:blipFill>
+          <a:blip r:embed="rId3"/>
+          <a:stretch>
+            <a:fillRect/>
+          </a:stretch>
+        </p:blipFill>
+        <p:spPr>
+          <a:xfrm>
+            <a:off x="341970" y="1048249"/>
+            <a:ext cx="7359805" cy="4100538"/>
+          </a:xfrm>
+          <a:prstGeom prst="rect">
+            <a:avLst/>
+          </a:prstGeom>
+        </p:spPr>
+      </p:pic>
+      <p:sp>
+        <p:nvSpPr>
+          <p:cNvPr id="4" name="Arrow: Right 3">
+            <a:extLst>
+              <a:ext uri="{FF2B5EF4-FFF2-40B4-BE49-F238E27FC236}">
+                <a16:creationId xmlns:a16="http://schemas.microsoft.com/office/drawing/2014/main" id="{B615ECF3-F782-8FF0-E04E-A6A6FADE0AEE}"/>
+              </a:ext>
+            </a:extLst>
+          </p:cNvPr>
+          <p:cNvSpPr/>
+          <p:nvPr/>
+        </p:nvSpPr>
+        <p:spPr>
+          <a:xfrm rot="9934382">
+            <a:off x="5032917" y="1390179"/>
+            <a:ext cx="624468" cy="282498"/>
+          </a:xfrm>
+          <a:prstGeom prst="rightArrow">
+            <a:avLst/>
+          </a:prstGeom>
+          <a:solidFill>
+            <a:srgbClr val="FF0000"/>
+          </a:solidFill>
+          <a:ln>
+            <a:solidFill>
+              <a:srgbClr val="FF0000"/>
+            </a:solidFill>
+            <a:miter/>
+          </a:ln>
+        </p:spPr>
+        <p:style>
+          <a:lnRef idx="0">
+            <a:schemeClr val="accent1"/>
+          </a:lnRef>
+          <a:fillRef idx="1">
+            <a:schemeClr val="accent1"/>
+          </a:fillRef>
+          <a:effectRef idx="0">
+            <a:srgbClr val="000000"/>
+          </a:effectRef>
+          <a:fontRef idx="minor">
+            <a:srgbClr val="FFFFFF"/>
+          </a:fontRef>
+        </p:style>
+        <p:txBody>
+          <a:bodyPr rtlCol="0" anchor="ctr"/>
+          <a:lstStyle/>
+          <a:p>
+            <a:pPr algn="ctr">
+              <a:lnSpc>
+                <a:spcPct val="95000"/>
+              </a:lnSpc>
+            </a:pPr>
+            <a:endParaRPr lang="en-US" sz="1700"/>
+          </a:p>
+        </p:txBody>
+      </p:sp>
+      <p:sp>
+        <p:nvSpPr>
+          <p:cNvPr id="5" name="Arrow: Right 4">
+            <a:extLst>
+              <a:ext uri="{FF2B5EF4-FFF2-40B4-BE49-F238E27FC236}">
+                <a16:creationId xmlns:a16="http://schemas.microsoft.com/office/drawing/2014/main" id="{BEA905B4-86A4-F341-483C-91E6A7BEEA2D}"/>
+              </a:ext>
+            </a:extLst>
+          </p:cNvPr>
+          <p:cNvSpPr/>
+          <p:nvPr/>
+        </p:nvSpPr>
+        <p:spPr>
+          <a:xfrm rot="10222261">
+            <a:off x="4932555" y="2285997"/>
+            <a:ext cx="624468" cy="282498"/>
+          </a:xfrm>
+          <a:prstGeom prst="rightArrow">
+            <a:avLst/>
+          </a:prstGeom>
+          <a:solidFill>
+            <a:srgbClr val="FF0000"/>
+          </a:solidFill>
+          <a:ln>
+            <a:solidFill>
+              <a:srgbClr val="FF0000"/>
+            </a:solidFill>
+            <a:miter/>
+          </a:ln>
+        </p:spPr>
+        <p:style>
+          <a:lnRef idx="0">
+            <a:schemeClr val="accent1"/>
+          </a:lnRef>
+          <a:fillRef idx="1">
+            <a:schemeClr val="accent1"/>
+          </a:fillRef>
+          <a:effectRef idx="0">
+            <a:srgbClr val="000000"/>
+          </a:effectRef>
+          <a:fontRef idx="minor">
+            <a:srgbClr val="FFFFFF"/>
+          </a:fontRef>
+        </p:style>
+        <p:txBody>
+          <a:bodyPr rtlCol="0" anchor="ctr"/>
+          <a:lstStyle/>
+          <a:p>
+            <a:pPr algn="ctr">
+              <a:lnSpc>
+                <a:spcPct val="95000"/>
+              </a:lnSpc>
+            </a:pPr>
+            <a:endParaRPr lang="en-US" sz="1700"/>
+          </a:p>
+        </p:txBody>
+      </p:sp>
+      <p:sp>
+        <p:nvSpPr>
+          <p:cNvPr id="6" name="Google Shape;249;p44">
+            <a:extLst>
+              <a:ext uri="{FF2B5EF4-FFF2-40B4-BE49-F238E27FC236}">
+                <a16:creationId xmlns:a16="http://schemas.microsoft.com/office/drawing/2014/main" id="{B9F9674D-A2DF-BE7D-F0F7-691414DDE916}"/>
+              </a:ext>
+            </a:extLst>
+          </p:cNvPr>
+          <p:cNvSpPr txBox="1">
+            <a:spLocks noGrp="1"/>
+          </p:cNvSpPr>
+          <p:nvPr>
+            <p:ph type="title"/>
+          </p:nvPr>
+        </p:nvSpPr>
+        <p:spPr>
+          <a:xfrm>
+            <a:off x="411481" y="308611"/>
+            <a:ext cx="7359805" cy="891778"/>
+          </a:xfrm>
+          <a:noFill/>
+          <a:ln>
+            <a:noFill/>
+          </a:ln>
+        </p:spPr>
+        <p:txBody>
+          <a:bodyPr spcFirstLastPara="1" wrap="square" lIns="91425" tIns="45700" rIns="91425" bIns="45700" anchor="ctr" anchorCtr="0">
+            <a:normAutofit/>
+          </a:bodyPr>
+          <a:lstStyle/>
+          <a:p>
+            <a:pPr lvl="0"/>
+            <a:r>
+              <a:rPr lang="en-US" dirty="0"/>
+              <a:t>CLONE FOR LOCAL DEVELOPMENT</a:t>
+            </a:r>
+          </a:p>
+        </p:txBody>
+      </p:sp>
+    </p:spTree>
+    <p:extLst>
+      <p:ext uri="{BB962C8B-B14F-4D97-AF65-F5344CB8AC3E}">
+        <p14:creationId xmlns:p14="http://schemas.microsoft.com/office/powerpoint/2010/main" val="4019813130"/>
+      </p:ext>
+    </p:extLst>
+  </p:cSld>
+  <p:clrMapOvr>
+    <a:masterClrMapping/>
+  </p:clrMapOvr>
+</p:sld>
+</file>
+
+<file path=ppt/slides/slide16.xml><?xml version="1.0" encoding="utf-8"?>
+<p:sld xmlns:a="http://schemas.openxmlformats.org/drawingml/2006/main" xmlns:r="http://schemas.openxmlformats.org/officeDocument/2006/relationships" xmlns:p="http://schemas.openxmlformats.org/presentationml/2006/main">
+  <p:cSld>
+    <p:spTree>
+      <p:nvGrpSpPr>
+        <p:cNvPr id="1" name="Shape 247">
+          <a:extLst>
+            <a:ext uri="{FF2B5EF4-FFF2-40B4-BE49-F238E27FC236}">
+              <a16:creationId xmlns:a16="http://schemas.microsoft.com/office/drawing/2014/main" id="{C698C6C2-8A49-1088-7BD3-25145C4EF700}"/>
+            </a:ext>
+          </a:extLst>
+        </p:cNvPr>
+        <p:cNvGrpSpPr/>
+        <p:nvPr/>
+      </p:nvGrpSpPr>
+      <p:grpSpPr>
+        <a:xfrm>
+          <a:off x="0" y="0"/>
+          <a:ext cx="0" cy="0"/>
+          <a:chOff x="0" y="0"/>
+          <a:chExt cx="0" cy="0"/>
+        </a:xfrm>
+      </p:grpSpPr>
+      <p:pic>
+        <p:nvPicPr>
+          <p:cNvPr id="3" name="Picture 2">
+            <a:extLst>
+              <a:ext uri="{FF2B5EF4-FFF2-40B4-BE49-F238E27FC236}">
+                <a16:creationId xmlns:a16="http://schemas.microsoft.com/office/drawing/2014/main" id="{4F603F7A-F7A2-FBF5-EFAC-B34A10D04DDC}"/>
+              </a:ext>
+            </a:extLst>
+          </p:cNvPr>
+          <p:cNvPicPr>
+            <a:picLocks noChangeAspect="1"/>
+          </p:cNvPicPr>
+          <p:nvPr/>
+        </p:nvPicPr>
+        <p:blipFill>
+          <a:blip r:embed="rId3"/>
+          <a:stretch>
+            <a:fillRect/>
+          </a:stretch>
+        </p:blipFill>
+        <p:spPr>
+          <a:xfrm>
+            <a:off x="890073" y="1951878"/>
+            <a:ext cx="7363853" cy="2429214"/>
+          </a:xfrm>
+          <a:prstGeom prst="rect">
+            <a:avLst/>
+          </a:prstGeom>
+        </p:spPr>
+      </p:pic>
+      <p:sp>
+        <p:nvSpPr>
+          <p:cNvPr id="4" name="Rectangle 3">
+            <a:extLst>
+              <a:ext uri="{FF2B5EF4-FFF2-40B4-BE49-F238E27FC236}">
+                <a16:creationId xmlns:a16="http://schemas.microsoft.com/office/drawing/2014/main" id="{ABA96263-EB07-EDF4-D1A4-1A1DFF6B63E0}"/>
+              </a:ext>
+            </a:extLst>
+          </p:cNvPr>
+          <p:cNvSpPr/>
+          <p:nvPr/>
+        </p:nvSpPr>
+        <p:spPr>
+          <a:xfrm>
+            <a:off x="5084956" y="2408666"/>
+            <a:ext cx="542693" cy="349405"/>
+          </a:xfrm>
+          <a:prstGeom prst="rect">
+            <a:avLst/>
+          </a:prstGeom>
+          <a:solidFill>
+            <a:srgbClr val="FF0000"/>
+          </a:solidFill>
+          <a:ln>
+            <a:noFill/>
+            <a:miter/>
+          </a:ln>
+        </p:spPr>
+        <p:style>
+          <a:lnRef idx="0">
+            <a:schemeClr val="accent1"/>
+          </a:lnRef>
+          <a:fillRef idx="1">
+            <a:schemeClr val="accent1"/>
+          </a:fillRef>
+          <a:effectRef idx="0">
+            <a:srgbClr val="000000"/>
+          </a:effectRef>
+          <a:fontRef idx="minor">
+            <a:srgbClr val="FFFFFF"/>
+          </a:fontRef>
+        </p:style>
+        <p:txBody>
+          <a:bodyPr rtlCol="0" anchor="ctr"/>
+          <a:lstStyle/>
+          <a:p>
+            <a:pPr algn="ctr">
+              <a:lnSpc>
+                <a:spcPct val="95000"/>
+              </a:lnSpc>
+            </a:pPr>
+            <a:endParaRPr lang="en-US" sz="1700"/>
+          </a:p>
+        </p:txBody>
+      </p:sp>
+      <p:sp>
+        <p:nvSpPr>
+          <p:cNvPr id="5" name="Google Shape;249;p44">
+            <a:extLst>
+              <a:ext uri="{FF2B5EF4-FFF2-40B4-BE49-F238E27FC236}">
+                <a16:creationId xmlns:a16="http://schemas.microsoft.com/office/drawing/2014/main" id="{EAAC3E57-E395-A9B5-080D-B657E2B648C8}"/>
+              </a:ext>
+            </a:extLst>
+          </p:cNvPr>
+          <p:cNvSpPr txBox="1">
+            <a:spLocks noGrp="1"/>
+          </p:cNvSpPr>
+          <p:nvPr>
+            <p:ph type="title"/>
+          </p:nvPr>
+        </p:nvSpPr>
+        <p:spPr>
+          <a:xfrm>
+            <a:off x="411481" y="308611"/>
+            <a:ext cx="7359805" cy="891778"/>
+          </a:xfrm>
+          <a:noFill/>
+          <a:ln>
+            <a:noFill/>
+          </a:ln>
+        </p:spPr>
+        <p:txBody>
+          <a:bodyPr spcFirstLastPara="1" wrap="square" lIns="91425" tIns="45700" rIns="91425" bIns="45700" anchor="ctr" anchorCtr="0">
+            <a:normAutofit/>
+          </a:bodyPr>
+          <a:lstStyle/>
+          <a:p>
+            <a:pPr lvl="0"/>
+            <a:r>
+              <a:rPr lang="en-US" dirty="0"/>
+              <a:t>IN VS CODE…</a:t>
+            </a:r>
+          </a:p>
+        </p:txBody>
+      </p:sp>
+    </p:spTree>
+    <p:extLst>
+      <p:ext uri="{BB962C8B-B14F-4D97-AF65-F5344CB8AC3E}">
+        <p14:creationId xmlns:p14="http://schemas.microsoft.com/office/powerpoint/2010/main" val="3049756004"/>
+      </p:ext>
+    </p:extLst>
+  </p:cSld>
+  <p:clrMapOvr>
+    <a:masterClrMapping/>
+  </p:clrMapOvr>
+</p:sld>
+</file>
+
+<file path=ppt/slides/slide17.xml><?xml version="1.0" encoding="utf-8"?>
+<p:sld xmlns:a="http://schemas.openxmlformats.org/drawingml/2006/main" xmlns:r="http://schemas.openxmlformats.org/officeDocument/2006/relationships" xmlns:p="http://schemas.openxmlformats.org/presentationml/2006/main">
+  <p:cSld>
+    <p:spTree>
+      <p:nvGrpSpPr>
+        <p:cNvPr id="1" name="Shape 247">
+          <a:extLst>
+            <a:ext uri="{FF2B5EF4-FFF2-40B4-BE49-F238E27FC236}">
+              <a16:creationId xmlns:a16="http://schemas.microsoft.com/office/drawing/2014/main" id="{687B3AEB-B086-44F0-850A-20981CF14D49}"/>
+            </a:ext>
+          </a:extLst>
+        </p:cNvPr>
+        <p:cNvGrpSpPr/>
+        <p:nvPr/>
+      </p:nvGrpSpPr>
+      <p:grpSpPr>
+        <a:xfrm>
+          <a:off x="0" y="0"/>
+          <a:ext cx="0" cy="0"/>
+          <a:chOff x="0" y="0"/>
+          <a:chExt cx="0" cy="0"/>
+        </a:xfrm>
+      </p:grpSpPr>
+      <p:sp>
+        <p:nvSpPr>
+          <p:cNvPr id="5" name="Google Shape;249;p44">
+            <a:extLst>
+              <a:ext uri="{FF2B5EF4-FFF2-40B4-BE49-F238E27FC236}">
+                <a16:creationId xmlns:a16="http://schemas.microsoft.com/office/drawing/2014/main" id="{879A4710-86A9-07AD-F1CC-722DD8A71050}"/>
+              </a:ext>
+            </a:extLst>
+          </p:cNvPr>
+          <p:cNvSpPr txBox="1">
+            <a:spLocks noGrp="1"/>
+          </p:cNvSpPr>
+          <p:nvPr>
+            <p:ph type="title"/>
+          </p:nvPr>
+        </p:nvSpPr>
+        <p:spPr>
+          <a:xfrm>
+            <a:off x="411481" y="308611"/>
+            <a:ext cx="7359805" cy="891778"/>
+          </a:xfrm>
+          <a:noFill/>
+          <a:ln>
+            <a:noFill/>
+          </a:ln>
+        </p:spPr>
+        <p:txBody>
+          <a:bodyPr spcFirstLastPara="1" wrap="square" lIns="91425" tIns="45700" rIns="91425" bIns="45700" anchor="ctr" anchorCtr="0">
+            <a:normAutofit/>
+          </a:bodyPr>
+          <a:lstStyle/>
+          <a:p>
+            <a:pPr lvl="0"/>
+            <a:r>
+              <a:rPr lang="en-US" dirty="0"/>
+              <a:t>What did we just do…?</a:t>
+            </a:r>
+          </a:p>
+        </p:txBody>
+      </p:sp>
+    </p:spTree>
+    <p:extLst>
+      <p:ext uri="{BB962C8B-B14F-4D97-AF65-F5344CB8AC3E}">
+        <p14:creationId xmlns:p14="http://schemas.microsoft.com/office/powerpoint/2010/main" val="1290567228"/>
+      </p:ext>
+    </p:extLst>
+  </p:cSld>
+  <p:clrMapOvr>
+    <a:masterClrMapping/>
+  </p:clrMapOvr>
+</p:sld>
+</file>
+
+<file path=ppt/slides/slide18.xml><?xml version="1.0" encoding="utf-8"?>
+<p:sld xmlns:a="http://schemas.openxmlformats.org/drawingml/2006/main" xmlns:r="http://schemas.openxmlformats.org/officeDocument/2006/relationships" xmlns:p="http://schemas.openxmlformats.org/presentationml/2006/main">
+  <p:cSld>
+    <p:spTree>
+      <p:nvGrpSpPr>
+        <p:cNvPr id="1" name="Shape 247">
+          <a:extLst>
+            <a:ext uri="{FF2B5EF4-FFF2-40B4-BE49-F238E27FC236}">
+              <a16:creationId xmlns:a16="http://schemas.microsoft.com/office/drawing/2014/main" id="{28F88F64-D73E-2BD5-3582-446A1F70712D}"/>
+            </a:ext>
+          </a:extLst>
+        </p:cNvPr>
+        <p:cNvGrpSpPr/>
+        <p:nvPr/>
+      </p:nvGrpSpPr>
+      <p:grpSpPr>
+        <a:xfrm>
+          <a:off x="0" y="0"/>
+          <a:ext cx="0" cy="0"/>
+          <a:chOff x="0" y="0"/>
+          <a:chExt cx="0" cy="0"/>
+        </a:xfrm>
+      </p:grpSpPr>
+      <p:sp>
+        <p:nvSpPr>
+          <p:cNvPr id="5" name="Google Shape;249;p44">
+            <a:extLst>
+              <a:ext uri="{FF2B5EF4-FFF2-40B4-BE49-F238E27FC236}">
+                <a16:creationId xmlns:a16="http://schemas.microsoft.com/office/drawing/2014/main" id="{FF877FF3-8C20-541A-B334-AA81082BA6F3}"/>
+              </a:ext>
+            </a:extLst>
+          </p:cNvPr>
+          <p:cNvSpPr txBox="1">
+            <a:spLocks noGrp="1"/>
+          </p:cNvSpPr>
+          <p:nvPr>
+            <p:ph type="title"/>
+          </p:nvPr>
+        </p:nvSpPr>
+        <p:spPr>
+          <a:xfrm>
+            <a:off x="2054428" y="2125861"/>
+            <a:ext cx="7359805" cy="891778"/>
+          </a:xfrm>
+          <a:noFill/>
+          <a:ln>
+            <a:noFill/>
+          </a:ln>
+        </p:spPr>
+        <p:txBody>
+          <a:bodyPr spcFirstLastPara="1" wrap="square" lIns="91425" tIns="45700" rIns="91425" bIns="45700" anchor="ctr" anchorCtr="0">
+            <a:normAutofit/>
+          </a:bodyPr>
+          <a:lstStyle/>
+          <a:p>
+            <a:pPr lvl="0"/>
+            <a:r>
+              <a:rPr lang="en-US" dirty="0"/>
+              <a:t>Take a 5 minute break</a:t>
+            </a:r>
+          </a:p>
+        </p:txBody>
+      </p:sp>
+    </p:spTree>
+    <p:extLst>
+      <p:ext uri="{BB962C8B-B14F-4D97-AF65-F5344CB8AC3E}">
+        <p14:creationId xmlns:p14="http://schemas.microsoft.com/office/powerpoint/2010/main" val="3383676789"/>
+      </p:ext>
+    </p:extLst>
+  </p:cSld>
+  <p:clrMapOvr>
+    <a:masterClrMapping/>
+  </p:clrMapOvr>
+</p:sld>
+</file>
+
+<file path=ppt/slides/slide19.xml><?xml version="1.0" encoding="utf-8"?>
+<p:sld xmlns:a="http://schemas.openxmlformats.org/drawingml/2006/main" xmlns:r="http://schemas.openxmlformats.org/officeDocument/2006/relationships" xmlns:p="http://schemas.openxmlformats.org/presentationml/2006/main">
+  <p:cSld>
+    <p:spTree>
+      <p:nvGrpSpPr>
+        <p:cNvPr id="1" name="Shape 247">
+          <a:extLst>
+            <a:ext uri="{FF2B5EF4-FFF2-40B4-BE49-F238E27FC236}">
+              <a16:creationId xmlns:a16="http://schemas.microsoft.com/office/drawing/2014/main" id="{580CC921-698A-88A2-BE92-3B6495D491BE}"/>
+            </a:ext>
+          </a:extLst>
+        </p:cNvPr>
+        <p:cNvGrpSpPr/>
+        <p:nvPr/>
+      </p:nvGrpSpPr>
+      <p:grpSpPr>
+        <a:xfrm>
+          <a:off x="0" y="0"/>
+          <a:ext cx="0" cy="0"/>
+          <a:chOff x="0" y="0"/>
+          <a:chExt cx="0" cy="0"/>
+        </a:xfrm>
+      </p:grpSpPr>
+      <p:sp>
+        <p:nvSpPr>
+          <p:cNvPr id="5" name="Google Shape;249;p44">
+            <a:extLst>
+              <a:ext uri="{FF2B5EF4-FFF2-40B4-BE49-F238E27FC236}">
+                <a16:creationId xmlns:a16="http://schemas.microsoft.com/office/drawing/2014/main" id="{E5BECAE6-C8EE-01B1-A7C2-D5D262B17170}"/>
+              </a:ext>
+            </a:extLst>
+          </p:cNvPr>
+          <p:cNvSpPr txBox="1">
+            <a:spLocks noGrp="1"/>
+          </p:cNvSpPr>
+          <p:nvPr>
+            <p:ph type="title"/>
+          </p:nvPr>
+        </p:nvSpPr>
+        <p:spPr>
+          <a:xfrm>
+            <a:off x="627072" y="230154"/>
+            <a:ext cx="7359805" cy="891778"/>
+          </a:xfrm>
+          <a:noFill/>
+          <a:ln>
+            <a:noFill/>
+          </a:ln>
+        </p:spPr>
+        <p:txBody>
+          <a:bodyPr spcFirstLastPara="1" wrap="square" lIns="91425" tIns="45700" rIns="91425" bIns="45700" anchor="ctr" anchorCtr="0">
+            <a:normAutofit/>
+          </a:bodyPr>
+          <a:lstStyle/>
+          <a:p>
+            <a:pPr lvl="0"/>
+            <a:r>
+              <a:rPr lang="en-US" dirty="0"/>
+              <a:t>More environment setup</a:t>
+            </a:r>
+          </a:p>
+        </p:txBody>
+      </p:sp>
+      <p:sp>
+        <p:nvSpPr>
+          <p:cNvPr id="2" name="Content Placeholder 5">
+            <a:extLst>
+              <a:ext uri="{FF2B5EF4-FFF2-40B4-BE49-F238E27FC236}">
+                <a16:creationId xmlns:a16="http://schemas.microsoft.com/office/drawing/2014/main" id="{4407BE67-57F8-9DBF-61E1-778040026A10}"/>
+              </a:ext>
+            </a:extLst>
+          </p:cNvPr>
+          <p:cNvSpPr txBox="1">
+            <a:spLocks/>
+          </p:cNvSpPr>
+          <p:nvPr/>
+        </p:nvSpPr>
+        <p:spPr>
+          <a:xfrm>
+            <a:off x="548640" y="857250"/>
+            <a:ext cx="4023360" cy="3429000"/>
+          </a:xfrm>
+          <a:prstGeom prst="rect">
+            <a:avLst/>
+          </a:prstGeom>
+        </p:spPr>
+        <p:txBody>
+          <a:bodyPr/>
+          <a:lstStyle>
+            <a:lvl1pPr marL="137160" indent="-137160" algn="l" defTabSz="685800" rtl="0" eaLnBrk="1" latinLnBrk="0" hangingPunct="1">
+              <a:lnSpc>
+                <a:spcPct val="95000"/>
+              </a:lnSpc>
+              <a:spcBef>
+                <a:spcPts val="750"/>
+              </a:spcBef>
+              <a:buFont typeface="Arial" panose="020B0604020202020204" pitchFamily="34" charset="0"/>
+              <a:buChar char="▪"/>
+              <a:defRPr sz="1275" kern="1200">
+                <a:solidFill>
+                  <a:schemeClr val="tx1"/>
+                </a:solidFill>
+                <a:latin typeface="+mn-lt"/>
+                <a:ea typeface="+mn-ea"/>
+                <a:cs typeface="+mn-cs"/>
+              </a:defRPr>
+            </a:lvl1pPr>
+            <a:lvl2pPr marL="274320" indent="-137160" algn="l" defTabSz="685800" rtl="0" eaLnBrk="1" latinLnBrk="0" hangingPunct="1">
+              <a:lnSpc>
+                <a:spcPct val="95000"/>
+              </a:lnSpc>
+              <a:spcBef>
+                <a:spcPts val="375"/>
+              </a:spcBef>
+              <a:buFont typeface="Arial" panose="020B0604020202020204" pitchFamily="34" charset="0"/>
+              <a:buChar char="–"/>
+              <a:defRPr sz="1275" kern="1200">
+                <a:solidFill>
+                  <a:schemeClr val="tx1"/>
+                </a:solidFill>
+                <a:latin typeface="+mn-lt"/>
+                <a:ea typeface="+mn-ea"/>
+                <a:cs typeface="+mn-cs"/>
+              </a:defRPr>
+            </a:lvl2pPr>
+            <a:lvl3pPr marL="411480" indent="-137160" algn="l" defTabSz="685800" rtl="0" eaLnBrk="1" latinLnBrk="0" hangingPunct="1">
+              <a:lnSpc>
+                <a:spcPct val="95000"/>
+              </a:lnSpc>
+              <a:spcBef>
+                <a:spcPts val="375"/>
+              </a:spcBef>
+              <a:buFont typeface="Arial" panose="020B0604020202020204" pitchFamily="34" charset="0"/>
+              <a:buChar char="–"/>
+              <a:defRPr sz="1275" kern="1200">
+                <a:solidFill>
+                  <a:schemeClr val="tx1"/>
+                </a:solidFill>
+                <a:latin typeface="+mn-lt"/>
+                <a:ea typeface="+mn-ea"/>
+                <a:cs typeface="+mn-cs"/>
+              </a:defRPr>
+            </a:lvl3pPr>
+            <a:lvl4pPr marL="548640" indent="-137160" algn="l" defTabSz="685800" rtl="0" eaLnBrk="1" latinLnBrk="0" hangingPunct="1">
+              <a:lnSpc>
+                <a:spcPct val="95000"/>
+              </a:lnSpc>
+              <a:spcBef>
+                <a:spcPts val="375"/>
+              </a:spcBef>
+              <a:buFont typeface="Arial" panose="020B0604020202020204" pitchFamily="34" charset="0"/>
+              <a:buChar char="–"/>
+              <a:defRPr sz="1275" kern="1200">
+                <a:solidFill>
+                  <a:schemeClr val="tx1"/>
+                </a:solidFill>
+                <a:latin typeface="+mn-lt"/>
+                <a:ea typeface="+mn-ea"/>
+                <a:cs typeface="+mn-cs"/>
+              </a:defRPr>
+            </a:lvl4pPr>
+            <a:lvl5pPr marL="685800" indent="-137160" algn="l" defTabSz="685800" rtl="0" eaLnBrk="1" latinLnBrk="0" hangingPunct="1">
+              <a:lnSpc>
+                <a:spcPct val="95000"/>
+              </a:lnSpc>
+              <a:spcBef>
+                <a:spcPts val="375"/>
+              </a:spcBef>
+              <a:buFont typeface="Arial" panose="020B0604020202020204" pitchFamily="34" charset="0"/>
+              <a:buChar char="–"/>
+              <a:defRPr sz="1275" kern="1200">
+                <a:solidFill>
+                  <a:schemeClr val="tx1"/>
+                </a:solidFill>
+                <a:latin typeface="+mn-lt"/>
+                <a:ea typeface="+mn-ea"/>
+                <a:cs typeface="+mn-cs"/>
+              </a:defRPr>
+            </a:lvl5pPr>
+            <a:lvl6pPr marL="822960" indent="-137160" algn="l" defTabSz="685800" rtl="0" eaLnBrk="1" latinLnBrk="0" hangingPunct="1">
+              <a:lnSpc>
+                <a:spcPct val="95000"/>
+              </a:lnSpc>
+              <a:spcBef>
+                <a:spcPts val="375"/>
+              </a:spcBef>
+              <a:buFont typeface="Arial" panose="020B0604020202020204" pitchFamily="34" charset="0"/>
+              <a:buChar char="–"/>
+              <a:defRPr sz="1275" kern="1200">
+                <a:solidFill>
+                  <a:schemeClr val="tx1"/>
+                </a:solidFill>
+                <a:latin typeface="+mn-lt"/>
+                <a:ea typeface="+mn-ea"/>
+                <a:cs typeface="+mn-cs"/>
+              </a:defRPr>
+            </a:lvl6pPr>
+            <a:lvl7pPr marL="960120" indent="-137160" algn="l" defTabSz="685800" rtl="0" eaLnBrk="1" latinLnBrk="0" hangingPunct="1">
+              <a:lnSpc>
+                <a:spcPct val="95000"/>
+              </a:lnSpc>
+              <a:spcBef>
+                <a:spcPts val="375"/>
+              </a:spcBef>
+              <a:buFont typeface="Arial" panose="020B0604020202020204" pitchFamily="34" charset="0"/>
+              <a:buChar char="–"/>
+              <a:defRPr sz="1275" kern="1200">
+                <a:solidFill>
+                  <a:schemeClr val="tx1"/>
+                </a:solidFill>
+                <a:latin typeface="+mn-lt"/>
+                <a:ea typeface="+mn-ea"/>
+                <a:cs typeface="+mn-cs"/>
+              </a:defRPr>
+            </a:lvl7pPr>
+            <a:lvl8pPr marL="1097280" indent="-137160" algn="l" defTabSz="685800" rtl="0" eaLnBrk="1" latinLnBrk="0" hangingPunct="1">
+              <a:lnSpc>
+                <a:spcPct val="95000"/>
+              </a:lnSpc>
+              <a:spcBef>
+                <a:spcPts val="375"/>
+              </a:spcBef>
+              <a:buFont typeface="Arial" panose="020B0604020202020204" pitchFamily="34" charset="0"/>
+              <a:buChar char="–"/>
+              <a:defRPr sz="1275" kern="1200">
+                <a:solidFill>
+                  <a:schemeClr val="tx1"/>
+                </a:solidFill>
+                <a:latin typeface="+mn-lt"/>
+                <a:ea typeface="+mn-ea"/>
+                <a:cs typeface="+mn-cs"/>
+              </a:defRPr>
+            </a:lvl8pPr>
+            <a:lvl9pPr marL="1234440" indent="-137160" algn="l" defTabSz="685800" rtl="0" eaLnBrk="1" latinLnBrk="0" hangingPunct="1">
+              <a:lnSpc>
+                <a:spcPct val="95000"/>
+              </a:lnSpc>
+              <a:spcBef>
+                <a:spcPts val="375"/>
+              </a:spcBef>
+              <a:buFont typeface="Arial" panose="020B0604020202020204" pitchFamily="34" charset="0"/>
+              <a:buChar char="–"/>
+              <a:defRPr sz="1275" kern="1200">
+                <a:solidFill>
+                  <a:schemeClr val="tx1"/>
+                </a:solidFill>
+                <a:latin typeface="+mn-lt"/>
+                <a:ea typeface="+mn-ea"/>
+                <a:cs typeface="+mn-cs"/>
+              </a:defRPr>
+            </a:lvl9pPr>
+          </a:lstStyle>
+          <a:p>
+            <a:pPr marL="0" indent="0">
+              <a:buClrTx/>
+              <a:buNone/>
+            </a:pPr>
+            <a:endParaRPr lang="en-US" sz="1600" dirty="0"/>
+          </a:p>
+          <a:p>
+            <a:pPr marL="0" indent="0">
+              <a:buClrTx/>
+              <a:buNone/>
+            </a:pPr>
+            <a:r>
+              <a:rPr lang="en-US" sz="1600" dirty="0"/>
+              <a:t>Open enviroment_setup.md</a:t>
+            </a:r>
+          </a:p>
+          <a:p>
+            <a:pPr marL="0" indent="0">
+              <a:buClrTx/>
+              <a:buNone/>
+            </a:pPr>
+            <a:endParaRPr lang="en-US" sz="1600" dirty="0"/>
+          </a:p>
+          <a:p>
+            <a:pPr marL="0" indent="0">
+              <a:buClrTx/>
+              <a:buNone/>
+            </a:pPr>
+            <a:r>
+              <a:rPr lang="en-US" sz="1600" dirty="0"/>
+              <a:t>Follow steps to download:</a:t>
+            </a:r>
+          </a:p>
+          <a:p>
+            <a:pPr marL="342900" indent="-342900">
+              <a:buClrTx/>
+              <a:buAutoNum type="arabicParenR"/>
+            </a:pPr>
+            <a:r>
+              <a:rPr lang="en-US" sz="1600" dirty="0"/>
+              <a:t>WSL</a:t>
+            </a:r>
+          </a:p>
+          <a:p>
+            <a:pPr marL="342900" indent="-342900">
+              <a:buClrTx/>
+              <a:buAutoNum type="arabicParenR"/>
+            </a:pPr>
+            <a:r>
+              <a:rPr lang="en-US" sz="1600" dirty="0"/>
+              <a:t>Docker Desktop</a:t>
+            </a:r>
+          </a:p>
+          <a:p>
+            <a:pPr marL="342900" indent="-342900">
+              <a:buClrTx/>
+              <a:buAutoNum type="arabicParenR"/>
+            </a:pPr>
+            <a:r>
+              <a:rPr lang="en-US" sz="1600" dirty="0"/>
+              <a:t>Terraform</a:t>
+            </a:r>
+          </a:p>
+          <a:p>
+            <a:pPr marL="342900" indent="-342900">
+              <a:buClrTx/>
+              <a:buAutoNum type="arabicParenR"/>
+            </a:pPr>
+            <a:r>
+              <a:rPr lang="en-US" sz="1600" dirty="0"/>
+              <a:t>Azure CLI</a:t>
+            </a:r>
+          </a:p>
+          <a:p>
+            <a:pPr marL="342900" indent="-342900">
+              <a:buClrTx/>
+              <a:buAutoNum type="arabicParenR"/>
+            </a:pPr>
+            <a:endParaRPr lang="en-US" sz="1600" dirty="0"/>
+          </a:p>
+          <a:p>
+            <a:pPr marL="0" indent="0">
+              <a:buClrTx/>
+              <a:buNone/>
+            </a:pPr>
+            <a:r>
+              <a:rPr lang="en-US" sz="1600" dirty="0"/>
+              <a:t>Set up this account:</a:t>
+            </a:r>
+          </a:p>
+          <a:p>
+            <a:pPr marL="0" indent="0">
+              <a:buClrTx/>
+              <a:buNone/>
+            </a:pPr>
+            <a:r>
+              <a:rPr lang="en-US" sz="1600" dirty="0"/>
+              <a:t>1) Docker Hub</a:t>
+            </a:r>
+          </a:p>
+          <a:p>
+            <a:pPr>
+              <a:buClrTx/>
+            </a:pPr>
+            <a:endParaRPr lang="en-US" sz="1600" dirty="0"/>
+          </a:p>
+        </p:txBody>
+      </p:sp>
+    </p:spTree>
+    <p:extLst>
+      <p:ext uri="{BB962C8B-B14F-4D97-AF65-F5344CB8AC3E}">
+        <p14:creationId xmlns:p14="http://schemas.microsoft.com/office/powerpoint/2010/main" val="2638676293"/>
+      </p:ext>
+    </p:extLst>
+  </p:cSld>
+  <p:clrMapOvr>
+    <a:masterClrMapping/>
+  </p:clrMapOvr>
+</p:sld>
+</file>
+
+<file path=ppt/slides/slide2.xml><?xml version="1.0" encoding="utf-8"?>
+<p:sld xmlns:a="http://schemas.openxmlformats.org/drawingml/2006/main" xmlns:r="http://schemas.openxmlformats.org/officeDocument/2006/relationships" xmlns:p="http://schemas.openxmlformats.org/presentationml/2006/main">
+  <p:cSld>
+    <p:spTree>
+      <p:nvGrpSpPr>
+        <p:cNvPr id="1" name="">
+          <a:extLst>
+            <a:ext uri="{FF2B5EF4-FFF2-40B4-BE49-F238E27FC236}">
+              <a16:creationId xmlns:a16="http://schemas.microsoft.com/office/drawing/2014/main" id="{F6E0A22D-68A3-E9A5-CD56-480007C21458}"/>
+            </a:ext>
+          </a:extLst>
+        </p:cNvPr>
+        <p:cNvGrpSpPr/>
+        <p:nvPr/>
+      </p:nvGrpSpPr>
+      <p:grpSpPr>
+        <a:xfrm>
+          <a:off x="0" y="0"/>
+          <a:ext cx="0" cy="0"/>
+          <a:chOff x="0" y="0"/>
+          <a:chExt cx="0" cy="0"/>
+        </a:xfrm>
+      </p:grpSpPr>
+      <p:sp>
+        <p:nvSpPr>
+          <p:cNvPr id="7" name="Title 6">
+            <a:extLst>
+              <a:ext uri="{FF2B5EF4-FFF2-40B4-BE49-F238E27FC236}">
+                <a16:creationId xmlns:a16="http://schemas.microsoft.com/office/drawing/2014/main" id="{D002F6FC-727C-3EEE-67C4-23B1FD72DD58}"/>
+              </a:ext>
+            </a:extLst>
+          </p:cNvPr>
+          <p:cNvSpPr>
+            <a:spLocks noGrp="1"/>
+          </p:cNvSpPr>
+          <p:nvPr>
+            <p:ph type="ctrTitle"/>
+          </p:nvPr>
+        </p:nvSpPr>
+        <p:spPr/>
+        <p:txBody>
+          <a:bodyPr/>
+          <a:lstStyle/>
+          <a:p>
+            <a:endParaRPr lang="en-US" dirty="0"/>
+          </a:p>
+        </p:txBody>
+      </p:sp>
+      <p:sp>
+        <p:nvSpPr>
+          <p:cNvPr id="8" name="Subtitle 7">
+            <a:extLst>
+              <a:ext uri="{FF2B5EF4-FFF2-40B4-BE49-F238E27FC236}">
+                <a16:creationId xmlns:a16="http://schemas.microsoft.com/office/drawing/2014/main" id="{D10A1340-CE28-C670-A516-F6A70B8050B0}"/>
+              </a:ext>
+            </a:extLst>
+          </p:cNvPr>
+          <p:cNvSpPr>
+            <a:spLocks noGrp="1"/>
+          </p:cNvSpPr>
+          <p:nvPr>
+            <p:ph type="subTitle" idx="1"/>
+          </p:nvPr>
+        </p:nvSpPr>
+        <p:spPr/>
+        <p:txBody>
+          <a:bodyPr/>
+          <a:lstStyle/>
+          <a:p>
+            <a:r>
+              <a:rPr lang="en-US" dirty="0"/>
+              <a:t>Setup</a:t>
+            </a:r>
+          </a:p>
+        </p:txBody>
+      </p:sp>
+      <p:sp>
+        <p:nvSpPr>
+          <p:cNvPr id="5" name="Date Placeholder 4">
+            <a:extLst>
+              <a:ext uri="{FF2B5EF4-FFF2-40B4-BE49-F238E27FC236}">
+                <a16:creationId xmlns:a16="http://schemas.microsoft.com/office/drawing/2014/main" id="{FB4125D7-D447-4FE8-E456-399814B620EB}"/>
+              </a:ext>
+            </a:extLst>
+          </p:cNvPr>
+          <p:cNvSpPr>
+            <a:spLocks noGrp="1"/>
+          </p:cNvSpPr>
+          <p:nvPr>
+            <p:ph type="dt" idx="10"/>
+          </p:nvPr>
+        </p:nvSpPr>
+        <p:spPr/>
+        <p:txBody>
+          <a:bodyPr/>
+          <a:lstStyle/>
+          <a:p>
+            <a:fld id="{334F72C3-CDF3-44A8-B602-1649B1728485}" type="datetime3">
+              <a:rPr lang="en-US" smtClean="0"/>
+              <a:t>1 June 2026</a:t>
+            </a:fld>
+            <a:endParaRPr lang="en-US"/>
+          </a:p>
+        </p:txBody>
+      </p:sp>
+      <p:sp>
+        <p:nvSpPr>
+          <p:cNvPr id="6" name="Slide Number Placeholder 5">
+            <a:extLst>
+              <a:ext uri="{FF2B5EF4-FFF2-40B4-BE49-F238E27FC236}">
+                <a16:creationId xmlns:a16="http://schemas.microsoft.com/office/drawing/2014/main" id="{9C9A08D5-2EB0-4E21-A836-11205D799745}"/>
+              </a:ext>
+            </a:extLst>
+          </p:cNvPr>
+          <p:cNvSpPr>
+            <a:spLocks noGrp="1"/>
+          </p:cNvSpPr>
+          <p:nvPr>
+            <p:ph type="sldNum" idx="12"/>
+          </p:nvPr>
+        </p:nvSpPr>
+        <p:spPr/>
+        <p:txBody>
+          <a:bodyPr/>
+          <a:lstStyle/>
+          <a:p>
+            <a:fld id="{64E5BE4B-2FBF-4174-9E62-85FAD1CB43A6}" type="slidenum">
+              <a:rPr lang="en-US" smtClean="0"/>
+              <a:pPr/>
+              <a:t>2</a:t>
+            </a:fld>
+            <a:endParaRPr lang="en-US"/>
+          </a:p>
+        </p:txBody>
+      </p:sp>
+    </p:spTree>
+    <p:extLst>
+      <p:ext uri="{BB962C8B-B14F-4D97-AF65-F5344CB8AC3E}">
+        <p14:creationId xmlns:p14="http://schemas.microsoft.com/office/powerpoint/2010/main" val="2044865982"/>
+      </p:ext>
+    </p:extLst>
+  </p:cSld>
+  <p:clrMapOvr>
+    <a:masterClrMapping/>
+  </p:clrMapOvr>
+</p:sld>
+</file>
+
+<file path=ppt/slides/slide20.xml><?xml version="1.0" encoding="utf-8"?>
+<p:sld xmlns:a="http://schemas.openxmlformats.org/drawingml/2006/main" xmlns:r="http://schemas.openxmlformats.org/officeDocument/2006/relationships" xmlns:p="http://schemas.openxmlformats.org/presentationml/2006/main">
+  <p:cSld>
+    <p:spTree>
+      <p:nvGrpSpPr>
+        <p:cNvPr id="1" name="">
+          <a:extLst>
+            <a:ext uri="{FF2B5EF4-FFF2-40B4-BE49-F238E27FC236}">
+              <a16:creationId xmlns:a16="http://schemas.microsoft.com/office/drawing/2014/main" id="{42318BF6-7256-D98B-7740-649A92525A30}"/>
+            </a:ext>
+          </a:extLst>
+        </p:cNvPr>
+        <p:cNvGrpSpPr/>
+        <p:nvPr/>
+      </p:nvGrpSpPr>
+      <p:grpSpPr>
+        <a:xfrm>
+          <a:off x="0" y="0"/>
+          <a:ext cx="0" cy="0"/>
+          <a:chOff x="0" y="0"/>
+          <a:chExt cx="0" cy="0"/>
+        </a:xfrm>
+      </p:grpSpPr>
+      <p:sp>
+        <p:nvSpPr>
+          <p:cNvPr id="4" name="Date Placeholder 3">
+            <a:extLst>
+              <a:ext uri="{FF2B5EF4-FFF2-40B4-BE49-F238E27FC236}">
+                <a16:creationId xmlns:a16="http://schemas.microsoft.com/office/drawing/2014/main" id="{9EDD5E67-FC4D-161B-B022-1B8B9941A996}"/>
+              </a:ext>
+            </a:extLst>
+          </p:cNvPr>
+          <p:cNvSpPr>
+            <a:spLocks noGrp="1"/>
+          </p:cNvSpPr>
+          <p:nvPr>
+            <p:ph type="dt" sz="half" idx="49"/>
+          </p:nvPr>
+        </p:nvSpPr>
+        <p:spPr>
+          <a:xfrm>
+            <a:off x="410766" y="4972050"/>
+            <a:ext cx="617934" cy="171450"/>
+          </a:xfrm>
+        </p:spPr>
+        <p:txBody>
+          <a:bodyPr/>
+          <a:lstStyle/>
+          <a:p>
+            <a:endParaRPr lang="en-US"/>
+          </a:p>
+        </p:txBody>
+      </p:sp>
+      <p:sp>
+        <p:nvSpPr>
+          <p:cNvPr id="6" name="Slide Number Placeholder 5">
+            <a:extLst>
+              <a:ext uri="{FF2B5EF4-FFF2-40B4-BE49-F238E27FC236}">
+                <a16:creationId xmlns:a16="http://schemas.microsoft.com/office/drawing/2014/main" id="{EB2E833E-D031-89D4-CFDE-3B077A1FA52F}"/>
+              </a:ext>
+            </a:extLst>
+          </p:cNvPr>
+          <p:cNvSpPr>
+            <a:spLocks noGrp="1"/>
+          </p:cNvSpPr>
+          <p:nvPr>
+            <p:ph type="sldNum" sz="quarter" idx="50"/>
+          </p:nvPr>
+        </p:nvSpPr>
+        <p:spPr>
+          <a:xfrm>
+            <a:off x="8408037" y="4972050"/>
+            <a:ext cx="331501" cy="171450"/>
+          </a:xfrm>
+        </p:spPr>
+        <p:txBody>
+          <a:bodyPr/>
+          <a:lstStyle/>
+          <a:p>
+            <a:pPr lvl="0"/>
+            <a:fld id="{00000000-1234-1234-1234-123412341234}" type="slidenum">
+              <a:rPr lang="en" smtClean="0"/>
+              <a:pPr lvl="0"/>
+              <a:t>20</a:t>
+            </a:fld>
+            <a:endParaRPr lang="en"/>
+          </a:p>
+        </p:txBody>
+      </p:sp>
+      <p:sp>
+        <p:nvSpPr>
+          <p:cNvPr id="22" name="Text Placeholder 21">
+            <a:extLst>
+              <a:ext uri="{FF2B5EF4-FFF2-40B4-BE49-F238E27FC236}">
+                <a16:creationId xmlns:a16="http://schemas.microsoft.com/office/drawing/2014/main" id="{A4DC84C6-922D-BCD5-4D80-22CE18AC2368}"/>
+              </a:ext>
+            </a:extLst>
+          </p:cNvPr>
+          <p:cNvSpPr>
+            <a:spLocks noGrp="1"/>
+          </p:cNvSpPr>
+          <p:nvPr>
+            <p:ph type="body" sz="quarter" idx="39"/>
+          </p:nvPr>
+        </p:nvSpPr>
+        <p:spPr/>
+        <p:txBody>
+          <a:bodyPr/>
+          <a:lstStyle/>
+          <a:p>
+            <a:endParaRPr lang="en-US"/>
+          </a:p>
+        </p:txBody>
+      </p:sp>
+      <p:sp>
+        <p:nvSpPr>
+          <p:cNvPr id="23" name="Text Placeholder 22">
+            <a:extLst>
+              <a:ext uri="{FF2B5EF4-FFF2-40B4-BE49-F238E27FC236}">
+                <a16:creationId xmlns:a16="http://schemas.microsoft.com/office/drawing/2014/main" id="{3ECA9802-9526-6047-E0A5-41674D69689C}"/>
+              </a:ext>
+            </a:extLst>
+          </p:cNvPr>
+          <p:cNvSpPr>
+            <a:spLocks noGrp="1"/>
+          </p:cNvSpPr>
+          <p:nvPr>
+            <p:ph type="body" sz="quarter" idx="40"/>
+          </p:nvPr>
+        </p:nvSpPr>
+        <p:spPr/>
+        <p:txBody>
+          <a:bodyPr/>
+          <a:lstStyle/>
+          <a:p>
+            <a:endParaRPr lang="en-US"/>
+          </a:p>
+        </p:txBody>
+      </p:sp>
+      <p:sp>
+        <p:nvSpPr>
+          <p:cNvPr id="24" name="Text Placeholder 23">
+            <a:extLst>
+              <a:ext uri="{FF2B5EF4-FFF2-40B4-BE49-F238E27FC236}">
+                <a16:creationId xmlns:a16="http://schemas.microsoft.com/office/drawing/2014/main" id="{C69C1CB3-F740-9472-408E-FD84B97E34F3}"/>
+              </a:ext>
+            </a:extLst>
+          </p:cNvPr>
+          <p:cNvSpPr>
+            <a:spLocks noGrp="1"/>
+          </p:cNvSpPr>
+          <p:nvPr>
+            <p:ph type="body" sz="quarter" idx="41"/>
+          </p:nvPr>
+        </p:nvSpPr>
+        <p:spPr/>
+        <p:txBody>
+          <a:bodyPr/>
+          <a:lstStyle/>
+          <a:p>
+            <a:endParaRPr lang="en-US"/>
+          </a:p>
+        </p:txBody>
+      </p:sp>
+      <p:sp>
+        <p:nvSpPr>
+          <p:cNvPr id="25" name="Text Placeholder 24">
+            <a:extLst>
+              <a:ext uri="{FF2B5EF4-FFF2-40B4-BE49-F238E27FC236}">
+                <a16:creationId xmlns:a16="http://schemas.microsoft.com/office/drawing/2014/main" id="{34C5CBE8-F17A-D9A8-AB16-66AFCCE497FA}"/>
+              </a:ext>
+            </a:extLst>
+          </p:cNvPr>
+          <p:cNvSpPr>
+            <a:spLocks noGrp="1"/>
+          </p:cNvSpPr>
+          <p:nvPr>
+            <p:ph type="body" sz="quarter" idx="42"/>
+          </p:nvPr>
+        </p:nvSpPr>
+        <p:spPr/>
+        <p:txBody>
+          <a:bodyPr/>
+          <a:lstStyle/>
+          <a:p>
+            <a:endParaRPr lang="en-US"/>
+          </a:p>
+        </p:txBody>
+      </p:sp>
+      <p:sp>
+        <p:nvSpPr>
+          <p:cNvPr id="26" name="Text Placeholder 25">
+            <a:extLst>
+              <a:ext uri="{FF2B5EF4-FFF2-40B4-BE49-F238E27FC236}">
+                <a16:creationId xmlns:a16="http://schemas.microsoft.com/office/drawing/2014/main" id="{79D7A4E7-BAFD-762A-0E63-4AF1CC2956C1}"/>
+              </a:ext>
+            </a:extLst>
+          </p:cNvPr>
+          <p:cNvSpPr>
+            <a:spLocks noGrp="1"/>
+          </p:cNvSpPr>
+          <p:nvPr>
+            <p:ph type="body" sz="quarter" idx="43"/>
+          </p:nvPr>
+        </p:nvSpPr>
+        <p:spPr/>
+        <p:txBody>
+          <a:bodyPr/>
+          <a:lstStyle/>
+          <a:p>
+            <a:endParaRPr lang="en-US"/>
+          </a:p>
+        </p:txBody>
+      </p:sp>
+      <p:sp>
+        <p:nvSpPr>
+          <p:cNvPr id="27" name="Text Placeholder 26">
+            <a:extLst>
+              <a:ext uri="{FF2B5EF4-FFF2-40B4-BE49-F238E27FC236}">
+                <a16:creationId xmlns:a16="http://schemas.microsoft.com/office/drawing/2014/main" id="{B35FE14A-A815-D8EF-8489-B1F143A62CDB}"/>
+              </a:ext>
+            </a:extLst>
+          </p:cNvPr>
+          <p:cNvSpPr>
+            <a:spLocks noGrp="1"/>
+          </p:cNvSpPr>
+          <p:nvPr>
+            <p:ph type="body" sz="quarter" idx="44"/>
+          </p:nvPr>
+        </p:nvSpPr>
+        <p:spPr/>
+        <p:txBody>
+          <a:bodyPr/>
+          <a:lstStyle/>
+          <a:p>
+            <a:endParaRPr lang="en-US"/>
+          </a:p>
+        </p:txBody>
+      </p:sp>
+      <p:sp>
+        <p:nvSpPr>
+          <p:cNvPr id="28" name="Text Placeholder 27">
+            <a:extLst>
+              <a:ext uri="{FF2B5EF4-FFF2-40B4-BE49-F238E27FC236}">
+                <a16:creationId xmlns:a16="http://schemas.microsoft.com/office/drawing/2014/main" id="{043EEE1A-DCDD-F396-6706-9734DF7B5E57}"/>
+              </a:ext>
+            </a:extLst>
+          </p:cNvPr>
+          <p:cNvSpPr>
+            <a:spLocks noGrp="1"/>
+          </p:cNvSpPr>
+          <p:nvPr>
+            <p:ph type="body" sz="quarter" idx="45"/>
+          </p:nvPr>
+        </p:nvSpPr>
+        <p:spPr/>
+        <p:txBody>
+          <a:bodyPr/>
+          <a:lstStyle/>
+          <a:p>
+            <a:endParaRPr lang="en-US"/>
+          </a:p>
+        </p:txBody>
+      </p:sp>
+      <p:sp>
+        <p:nvSpPr>
+          <p:cNvPr id="29" name="Text Placeholder 28">
+            <a:extLst>
+              <a:ext uri="{FF2B5EF4-FFF2-40B4-BE49-F238E27FC236}">
+                <a16:creationId xmlns:a16="http://schemas.microsoft.com/office/drawing/2014/main" id="{5BF6CCFC-7DFD-1B10-C8B8-26BFEA5077F5}"/>
+              </a:ext>
+            </a:extLst>
+          </p:cNvPr>
+          <p:cNvSpPr>
+            <a:spLocks noGrp="1"/>
+          </p:cNvSpPr>
+          <p:nvPr>
+            <p:ph type="body" sz="quarter" idx="46"/>
+          </p:nvPr>
+        </p:nvSpPr>
+        <p:spPr/>
+        <p:txBody>
+          <a:bodyPr/>
+          <a:lstStyle/>
+          <a:p>
+            <a:endParaRPr lang="en-US"/>
+          </a:p>
+        </p:txBody>
+      </p:sp>
+      <p:sp>
+        <p:nvSpPr>
+          <p:cNvPr id="30" name="Text Placeholder 29">
+            <a:extLst>
+              <a:ext uri="{FF2B5EF4-FFF2-40B4-BE49-F238E27FC236}">
+                <a16:creationId xmlns:a16="http://schemas.microsoft.com/office/drawing/2014/main" id="{B835129B-00FD-424E-E61B-F9AA01CCA6FA}"/>
+              </a:ext>
+            </a:extLst>
+          </p:cNvPr>
+          <p:cNvSpPr>
+            <a:spLocks noGrp="1"/>
+          </p:cNvSpPr>
+          <p:nvPr>
+            <p:ph type="body" sz="quarter" idx="47"/>
+          </p:nvPr>
+        </p:nvSpPr>
+        <p:spPr/>
+        <p:txBody>
+          <a:bodyPr/>
+          <a:lstStyle/>
+          <a:p>
+            <a:endParaRPr lang="en-US"/>
+          </a:p>
+        </p:txBody>
+      </p:sp>
+      <p:sp>
+        <p:nvSpPr>
+          <p:cNvPr id="31" name="Text Placeholder 30">
+            <a:extLst>
+              <a:ext uri="{FF2B5EF4-FFF2-40B4-BE49-F238E27FC236}">
+                <a16:creationId xmlns:a16="http://schemas.microsoft.com/office/drawing/2014/main" id="{903A4F49-DA9D-48F0-E806-6737673914F3}"/>
+              </a:ext>
+            </a:extLst>
+          </p:cNvPr>
+          <p:cNvSpPr>
+            <a:spLocks noGrp="1"/>
+          </p:cNvSpPr>
+          <p:nvPr>
+            <p:ph type="body" sz="quarter" idx="48"/>
+          </p:nvPr>
+        </p:nvSpPr>
+        <p:spPr/>
+        <p:txBody>
+          <a:bodyPr/>
+          <a:lstStyle/>
+          <a:p>
+            <a:endParaRPr lang="en-US"/>
+          </a:p>
+        </p:txBody>
+      </p:sp>
+      <p:sp>
+        <p:nvSpPr>
+          <p:cNvPr id="7" name="Title 6">
+            <a:extLst>
+              <a:ext uri="{FF2B5EF4-FFF2-40B4-BE49-F238E27FC236}">
+                <a16:creationId xmlns:a16="http://schemas.microsoft.com/office/drawing/2014/main" id="{16FB89A0-87A1-ECCF-3E5D-24779C2B37E6}"/>
+              </a:ext>
+            </a:extLst>
+          </p:cNvPr>
+          <p:cNvSpPr>
+            <a:spLocks noGrp="1"/>
+          </p:cNvSpPr>
+          <p:nvPr>
+            <p:ph type="ctrTitle"/>
+          </p:nvPr>
+        </p:nvSpPr>
+        <p:spPr>
+          <a:xfrm>
+            <a:off x="685800" y="1652115"/>
+            <a:ext cx="4822031" cy="994410"/>
+          </a:xfrm>
+        </p:spPr>
+        <p:txBody>
+          <a:bodyPr/>
+          <a:lstStyle/>
+          <a:p>
+            <a:br>
+              <a:rPr lang="en-US" dirty="0"/>
+            </a:br>
+            <a:r>
+              <a:rPr lang="en-US" dirty="0"/>
+              <a:t>intro to python</a:t>
+            </a:r>
+          </a:p>
+        </p:txBody>
+      </p:sp>
+      <p:sp>
+        <p:nvSpPr>
+          <p:cNvPr id="20" name="Subtitle 19">
+            <a:extLst>
+              <a:ext uri="{FF2B5EF4-FFF2-40B4-BE49-F238E27FC236}">
+                <a16:creationId xmlns:a16="http://schemas.microsoft.com/office/drawing/2014/main" id="{D9642238-1C9A-5953-F216-1C626B9BAF86}"/>
+              </a:ext>
+            </a:extLst>
+          </p:cNvPr>
+          <p:cNvSpPr>
+            <a:spLocks noGrp="1"/>
+          </p:cNvSpPr>
+          <p:nvPr>
+            <p:ph type="subTitle" idx="1"/>
+          </p:nvPr>
+        </p:nvSpPr>
+        <p:spPr/>
+        <p:txBody>
+          <a:bodyPr/>
+          <a:lstStyle/>
+          <a:p>
+            <a:endParaRPr lang="en-US"/>
+          </a:p>
+        </p:txBody>
+      </p:sp>
+      <p:sp>
+        <p:nvSpPr>
+          <p:cNvPr id="21" name="Text Placeholder 20">
+            <a:extLst>
+              <a:ext uri="{FF2B5EF4-FFF2-40B4-BE49-F238E27FC236}">
+                <a16:creationId xmlns:a16="http://schemas.microsoft.com/office/drawing/2014/main" id="{FD4AB0C5-5108-4D9D-92D1-D30261CE7FCC}"/>
+              </a:ext>
+            </a:extLst>
+          </p:cNvPr>
+          <p:cNvSpPr>
+            <a:spLocks noGrp="1"/>
+          </p:cNvSpPr>
+          <p:nvPr>
+            <p:ph type="body" sz="quarter" idx="10"/>
+          </p:nvPr>
+        </p:nvSpPr>
+        <p:spPr/>
+        <p:txBody>
+          <a:bodyPr/>
+          <a:lstStyle/>
+          <a:p>
+            <a:endParaRPr lang="en-US"/>
+          </a:p>
+        </p:txBody>
+      </p:sp>
+    </p:spTree>
+    <p:extLst>
+      <p:ext uri="{BB962C8B-B14F-4D97-AF65-F5344CB8AC3E}">
+        <p14:creationId xmlns:p14="http://schemas.microsoft.com/office/powerpoint/2010/main" val="2466734487"/>
+      </p:ext>
+    </p:extLst>
+  </p:cSld>
+  <p:clrMapOvr>
+    <a:masterClrMapping/>
+  </p:clrMapOvr>
+</p:sld>
+</file>
+
+<file path=ppt/slides/slide21.xml><?xml version="1.0" encoding="utf-8"?>
+<p:sld xmlns:a="http://schemas.openxmlformats.org/drawingml/2006/main" xmlns:r="http://schemas.openxmlformats.org/officeDocument/2006/relationships" xmlns:p="http://schemas.openxmlformats.org/presentationml/2006/main">
+  <p:cSld>
+    <p:spTree>
+      <p:nvGrpSpPr>
         <p:cNvPr id="1" name=""/>
         <p:cNvGrpSpPr/>
         <p:nvPr/>
@@ -26940,7 +30436,7 @@
           <a:p>
             <a:fld id="{334F72C3-CDF3-44A8-B602-1649B1728485}" type="datetime3">
               <a:rPr lang="en-US" smtClean="0"/>
-              <a:t>5 May 2026</a:t>
+              <a:t>1 June 2026</a:t>
             </a:fld>
             <a:endParaRPr lang="en-US"/>
           </a:p>
@@ -26970,7 +30466,7 @@
             <a:fld id="{64E5BE4B-2FBF-4174-9E62-85FAD1CB43A6}" type="slidenum">
               <a:rPr lang="en-US" smtClean="0"/>
               <a:pPr/>
-              <a:t>11</a:t>
+              <a:t>21</a:t>
             </a:fld>
             <a:endParaRPr lang="en-US"/>
           </a:p>
@@ -26989,7 +30485,7 @@
 </p:sld>
 </file>
 
-<file path=ppt/slides/slide12.xml><?xml version="1.0" encoding="utf-8"?>
+<file path=ppt/slides/slide22.xml><?xml version="1.0" encoding="utf-8"?>
 <p:sld xmlns:a="http://schemas.openxmlformats.org/drawingml/2006/main" xmlns:r="http://schemas.openxmlformats.org/officeDocument/2006/relationships" xmlns:p="http://schemas.openxmlformats.org/presentationml/2006/main">
   <p:cSld>
     <p:spTree>
@@ -27179,7 +30675,7 @@
 </p:sld>
 </file>
 
-<file path=ppt/slides/slide13.xml><?xml version="1.0" encoding="utf-8"?>
+<file path=ppt/slides/slide23.xml><?xml version="1.0" encoding="utf-8"?>
 <p:sld xmlns:a="http://schemas.openxmlformats.org/drawingml/2006/main" xmlns:r="http://schemas.openxmlformats.org/officeDocument/2006/relationships" xmlns:p="http://schemas.openxmlformats.org/presentationml/2006/main">
   <p:cSld>
     <p:spTree>
@@ -27326,7 +30822,7 @@
 </p:sld>
 </file>
 
-<file path=ppt/slides/slide14.xml><?xml version="1.0" encoding="utf-8"?>
+<file path=ppt/slides/slide24.xml><?xml version="1.0" encoding="utf-8"?>
 <p:sld xmlns:a="http://schemas.openxmlformats.org/drawingml/2006/main" xmlns:r="http://schemas.openxmlformats.org/officeDocument/2006/relationships" xmlns:p="http://schemas.openxmlformats.org/presentationml/2006/main">
   <p:cSld>
     <p:spTree>
@@ -27536,7 +31032,7 @@
           <a:p>
             <a:fld id="{AD622D1A-DF83-41A8-85FF-04D90BF831D3}" type="datetime3">
               <a:rPr lang="en-US" smtClean="0"/>
-              <a:t>5 May 2026</a:t>
+              <a:t>1 June 2026</a:t>
             </a:fld>
             <a:endParaRPr lang="en-US"/>
           </a:p>
@@ -27566,7 +31062,7 @@
             <a:fld id="{64E5BE4B-2FBF-4174-9E62-85FAD1CB43A6}" type="slidenum">
               <a:rPr lang="en-US" smtClean="0"/>
               <a:pPr/>
-              <a:t>14</a:t>
+              <a:t>24</a:t>
             </a:fld>
             <a:endParaRPr lang="en-US"/>
           </a:p>
@@ -27585,7 +31081,7 @@
 </p:sld>
 </file>
 
-<file path=ppt/slides/slide15.xml><?xml version="1.0" encoding="utf-8"?>
+<file path=ppt/slides/slide25.xml><?xml version="1.0" encoding="utf-8"?>
 <p:sld xmlns:a="http://schemas.openxmlformats.org/drawingml/2006/main" xmlns:r="http://schemas.openxmlformats.org/officeDocument/2006/relationships" xmlns:p="http://schemas.openxmlformats.org/presentationml/2006/main">
   <p:cSld>
     <p:spTree>
@@ -27785,7 +31281,7 @@
 </p:sld>
 </file>
 
-<file path=ppt/slides/slide16.xml><?xml version="1.0" encoding="utf-8"?>
+<file path=ppt/slides/slide26.xml><?xml version="1.0" encoding="utf-8"?>
 <p:sld xmlns:a="http://schemas.openxmlformats.org/drawingml/2006/main" xmlns:r="http://schemas.openxmlformats.org/officeDocument/2006/relationships" xmlns:p="http://schemas.openxmlformats.org/presentationml/2006/main">
   <p:cSld>
     <p:spTree>
@@ -27951,7 +31447,7 @@
           <a:p>
             <a:fld id="{334F72C3-CDF3-44A8-B602-1649B1728485}" type="datetime3">
               <a:rPr lang="en-US" smtClean="0"/>
-              <a:t>5 May 2026</a:t>
+              <a:t>1 June 2026</a:t>
             </a:fld>
             <a:endParaRPr lang="en-US"/>
           </a:p>
@@ -27981,7 +31477,7 @@
             <a:fld id="{64E5BE4B-2FBF-4174-9E62-85FAD1CB43A6}" type="slidenum">
               <a:rPr lang="en-US" smtClean="0"/>
               <a:pPr/>
-              <a:t>16</a:t>
+              <a:t>26</a:t>
             </a:fld>
             <a:endParaRPr lang="en-US"/>
           </a:p>
@@ -28180,7 +31676,7 @@
 </p:sld>
 </file>
 
-<file path=ppt/slides/slide17.xml><?xml version="1.0" encoding="utf-8"?>
+<file path=ppt/slides/slide27.xml><?xml version="1.0" encoding="utf-8"?>
 <p:sld xmlns:a="http://schemas.openxmlformats.org/drawingml/2006/main" xmlns:r="http://schemas.openxmlformats.org/officeDocument/2006/relationships" xmlns:p="http://schemas.openxmlformats.org/presentationml/2006/main">
   <p:cSld>
     <p:spTree>
@@ -28346,7 +31842,7 @@
 </p:sld>
 </file>
 
-<file path=ppt/slides/slide18.xml><?xml version="1.0" encoding="utf-8"?>
+<file path=ppt/slides/slide28.xml><?xml version="1.0" encoding="utf-8"?>
 <p:sld xmlns:a="http://schemas.openxmlformats.org/drawingml/2006/main" xmlns:r="http://schemas.openxmlformats.org/officeDocument/2006/relationships" xmlns:p="http://schemas.openxmlformats.org/presentationml/2006/main">
   <p:cSld>
     <p:spTree>
@@ -33110,7 +36606,7 @@
 </p:sld>
 </file>
 
-<file path=ppt/slides/slide19.xml><?xml version="1.0" encoding="utf-8"?>
+<file path=ppt/slides/slide29.xml><?xml version="1.0" encoding="utf-8"?>
 <p:sld xmlns:a="http://schemas.openxmlformats.org/drawingml/2006/main" xmlns:r="http://schemas.openxmlformats.org/officeDocument/2006/relationships" xmlns:p="http://schemas.openxmlformats.org/presentationml/2006/main">
   <p:cSld>
     <p:spTree>
@@ -33260,18 +36756,12 @@
 </p:sld>
 </file>
 
-<file path=ppt/slides/slide2.xml><?xml version="1.0" encoding="utf-8"?>
+<file path=ppt/slides/slide3.xml><?xml version="1.0" encoding="utf-8"?>
 <p:sld xmlns:a="http://schemas.openxmlformats.org/drawingml/2006/main" xmlns:r="http://schemas.openxmlformats.org/officeDocument/2006/relationships" xmlns:p="http://schemas.openxmlformats.org/presentationml/2006/main">
   <p:cSld>
     <p:spTree>
       <p:nvGrpSpPr>
-        <p:cNvPr id="1" name="">
-          <a:extLst>
-            <a:ext uri="{FF2B5EF4-FFF2-40B4-BE49-F238E27FC236}">
-              <a16:creationId xmlns:a16="http://schemas.microsoft.com/office/drawing/2014/main" id="{F6E0A22D-68A3-E9A5-CD56-480007C21458}"/>
-            </a:ext>
-          </a:extLst>
-        </p:cNvPr>
+        <p:cNvPr id="1" name="Shape 203"/>
         <p:cNvGrpSpPr/>
         <p:nvPr/>
       </p:nvGrpSpPr>
@@ -33285,10 +36775,44 @@
       </p:grpSpPr>
       <p:sp>
         <p:nvSpPr>
-          <p:cNvPr id="7" name="Title 6">
+          <p:cNvPr id="204" name="Google Shape;204;p38"/>
+          <p:cNvSpPr txBox="1">
+            <a:spLocks noGrp="1"/>
+          </p:cNvSpPr>
+          <p:nvPr>
+            <p:ph type="title"/>
+          </p:nvPr>
+        </p:nvSpPr>
+        <p:spPr>
+          <a:xfrm>
+            <a:off x="411480" y="308611"/>
+            <a:ext cx="6173470" cy="685800"/>
+          </a:xfrm>
+          <a:noFill/>
+          <a:ln>
+            <a:noFill/>
+          </a:ln>
+        </p:spPr>
+        <p:txBody>
+          <a:bodyPr spcFirstLastPara="1" wrap="square" lIns="91425" tIns="91425" rIns="91425" bIns="91425" anchor="t" anchorCtr="0">
+            <a:normAutofit/>
+          </a:bodyPr>
+          <a:lstStyle/>
+          <a:p>
+            <a:pPr lvl="0"/>
+            <a:r>
+              <a:rPr lang="en-US" dirty="0"/>
+              <a:t>AI2C Technician Cohort 7</a:t>
+            </a:r>
+          </a:p>
+        </p:txBody>
+      </p:sp>
+      <p:sp>
+        <p:nvSpPr>
+          <p:cNvPr id="3" name="Text Placeholder 2">
             <a:extLst>
               <a:ext uri="{FF2B5EF4-FFF2-40B4-BE49-F238E27FC236}">
-                <a16:creationId xmlns:a16="http://schemas.microsoft.com/office/drawing/2014/main" id="{D002F6FC-727C-3EEE-67C4-23B1FD72DD58}"/>
+                <a16:creationId xmlns:a16="http://schemas.microsoft.com/office/drawing/2014/main" id="{40F23F63-0F1F-C732-32C1-147BBBC048D1}"/>
               </a:ext>
             </a:extLst>
           </p:cNvPr>
@@ -33296,111 +36820,28 @@
             <a:spLocks noGrp="1"/>
           </p:cNvSpPr>
           <p:nvPr>
-            <p:ph type="ctrTitle"/>
-          </p:nvPr>
-        </p:nvSpPr>
-        <p:spPr/>
+            <p:ph idx="1"/>
+          </p:nvPr>
+        </p:nvSpPr>
+        <p:spPr>
+          <a:xfrm>
+            <a:off x="411480" y="1200149"/>
+            <a:ext cx="8268694" cy="3429000"/>
+          </a:xfrm>
+        </p:spPr>
         <p:txBody>
           <a:bodyPr/>
           <a:lstStyle/>
           <a:p>
+            <a:r>
+              <a:rPr lang="en" dirty="0"/>
+              <a:t>Lesson 1 – Intro to Python</a:t>
+            </a:r>
             <a:endParaRPr lang="en-US" dirty="0"/>
           </a:p>
         </p:txBody>
       </p:sp>
-      <p:sp>
-        <p:nvSpPr>
-          <p:cNvPr id="8" name="Subtitle 7">
-            <a:extLst>
-              <a:ext uri="{FF2B5EF4-FFF2-40B4-BE49-F238E27FC236}">
-                <a16:creationId xmlns:a16="http://schemas.microsoft.com/office/drawing/2014/main" id="{D10A1340-CE28-C670-A516-F6A70B8050B0}"/>
-              </a:ext>
-            </a:extLst>
-          </p:cNvPr>
-          <p:cNvSpPr>
-            <a:spLocks noGrp="1"/>
-          </p:cNvSpPr>
-          <p:nvPr>
-            <p:ph type="subTitle" idx="1"/>
-          </p:nvPr>
-        </p:nvSpPr>
-        <p:spPr/>
-        <p:txBody>
-          <a:bodyPr/>
-          <a:lstStyle/>
-          <a:p>
-            <a:r>
-              <a:rPr lang="en-US" dirty="0"/>
-              <a:t>Setup</a:t>
-            </a:r>
-          </a:p>
-        </p:txBody>
-      </p:sp>
-      <p:sp>
-        <p:nvSpPr>
-          <p:cNvPr id="5" name="Date Placeholder 4">
-            <a:extLst>
-              <a:ext uri="{FF2B5EF4-FFF2-40B4-BE49-F238E27FC236}">
-                <a16:creationId xmlns:a16="http://schemas.microsoft.com/office/drawing/2014/main" id="{FB4125D7-D447-4FE8-E456-399814B620EB}"/>
-              </a:ext>
-            </a:extLst>
-          </p:cNvPr>
-          <p:cNvSpPr>
-            <a:spLocks noGrp="1"/>
-          </p:cNvSpPr>
-          <p:nvPr>
-            <p:ph type="dt" idx="10"/>
-          </p:nvPr>
-        </p:nvSpPr>
-        <p:spPr/>
-        <p:txBody>
-          <a:bodyPr/>
-          <a:lstStyle/>
-          <a:p>
-            <a:fld id="{334F72C3-CDF3-44A8-B602-1649B1728485}" type="datetime3">
-              <a:rPr lang="en-US" smtClean="0"/>
-              <a:t>5 May 2026</a:t>
-            </a:fld>
-            <a:endParaRPr lang="en-US"/>
-          </a:p>
-        </p:txBody>
-      </p:sp>
-      <p:sp>
-        <p:nvSpPr>
-          <p:cNvPr id="6" name="Slide Number Placeholder 5">
-            <a:extLst>
-              <a:ext uri="{FF2B5EF4-FFF2-40B4-BE49-F238E27FC236}">
-                <a16:creationId xmlns:a16="http://schemas.microsoft.com/office/drawing/2014/main" id="{9C9A08D5-2EB0-4E21-A836-11205D799745}"/>
-              </a:ext>
-            </a:extLst>
-          </p:cNvPr>
-          <p:cNvSpPr>
-            <a:spLocks noGrp="1"/>
-          </p:cNvSpPr>
-          <p:nvPr>
-            <p:ph type="sldNum" idx="12"/>
-          </p:nvPr>
-        </p:nvSpPr>
-        <p:spPr/>
-        <p:txBody>
-          <a:bodyPr/>
-          <a:lstStyle/>
-          <a:p>
-            <a:fld id="{64E5BE4B-2FBF-4174-9E62-85FAD1CB43A6}" type="slidenum">
-              <a:rPr lang="en-US" smtClean="0"/>
-              <a:pPr/>
-              <a:t>2</a:t>
-            </a:fld>
-            <a:endParaRPr lang="en-US"/>
-          </a:p>
-        </p:txBody>
-      </p:sp>
     </p:spTree>
-    <p:extLst>
-      <p:ext uri="{BB962C8B-B14F-4D97-AF65-F5344CB8AC3E}">
-        <p14:creationId xmlns:p14="http://schemas.microsoft.com/office/powerpoint/2010/main" val="2044865982"/>
-      </p:ext>
-    </p:extLst>
   </p:cSld>
   <p:clrMapOvr>
     <a:masterClrMapping/>
@@ -33408,7 +36849,7 @@
 </p:sld>
 </file>
 
-<file path=ppt/slides/slide20.xml><?xml version="1.0" encoding="utf-8"?>
+<file path=ppt/slides/slide30.xml><?xml version="1.0" encoding="utf-8"?>
 <p:sld xmlns:a="http://schemas.openxmlformats.org/drawingml/2006/main" xmlns:r="http://schemas.openxmlformats.org/officeDocument/2006/relationships" xmlns:p="http://schemas.openxmlformats.org/presentationml/2006/main">
   <p:cSld>
     <p:spTree>
@@ -33743,7 +37184,7 @@
 </p:sld>
 </file>
 
-<file path=ppt/slides/slide21.xml><?xml version="1.0" encoding="utf-8"?>
+<file path=ppt/slides/slide31.xml><?xml version="1.0" encoding="utf-8"?>
 <p:sld xmlns:a="http://schemas.openxmlformats.org/drawingml/2006/main" xmlns:r="http://schemas.openxmlformats.org/officeDocument/2006/relationships" xmlns:p="http://schemas.openxmlformats.org/presentationml/2006/main">
   <p:cSld>
     <p:spTree>
@@ -33836,7 +37277,7 @@
           <a:p>
             <a:fld id="{334F72C3-CDF3-44A8-B602-1649B1728485}" type="datetime3">
               <a:rPr lang="en-US" smtClean="0"/>
-              <a:t>5 May 2026</a:t>
+              <a:t>1 June 2026</a:t>
             </a:fld>
             <a:endParaRPr lang="en-US"/>
           </a:p>
@@ -33866,7 +37307,7 @@
             <a:fld id="{64E5BE4B-2FBF-4174-9E62-85FAD1CB43A6}" type="slidenum">
               <a:rPr lang="en-US" smtClean="0"/>
               <a:pPr/>
-              <a:t>21</a:t>
+              <a:t>31</a:t>
             </a:fld>
             <a:endParaRPr lang="en-US"/>
           </a:p>
@@ -33885,7 +37326,7 @@
 </p:sld>
 </file>
 
-<file path=ppt/slides/slide22.xml><?xml version="1.0" encoding="utf-8"?>
+<file path=ppt/slides/slide32.xml><?xml version="1.0" encoding="utf-8"?>
 <p:sld xmlns:a="http://schemas.openxmlformats.org/drawingml/2006/main" xmlns:r="http://schemas.openxmlformats.org/officeDocument/2006/relationships" xmlns:p="http://schemas.openxmlformats.org/presentationml/2006/main">
   <p:cSld>
     <p:spTree>
@@ -34018,7 +37459,7 @@
           <a:p>
             <a:fld id="{AD622D1A-DF83-41A8-85FF-04D90BF831D3}" type="datetime3">
               <a:rPr lang="en-US" smtClean="0"/>
-              <a:t>5 May 2026</a:t>
+              <a:t>1 June 2026</a:t>
             </a:fld>
             <a:endParaRPr lang="en-US"/>
           </a:p>
@@ -34048,7 +37489,7 @@
             <a:fld id="{64E5BE4B-2FBF-4174-9E62-85FAD1CB43A6}" type="slidenum">
               <a:rPr lang="en-US" smtClean="0"/>
               <a:pPr/>
-              <a:t>22</a:t>
+              <a:t>32</a:t>
             </a:fld>
             <a:endParaRPr lang="en-US"/>
           </a:p>
@@ -34780,7 +38221,7 @@
 </p:sld>
 </file>
 
-<file path=ppt/slides/slide23.xml><?xml version="1.0" encoding="utf-8"?>
+<file path=ppt/slides/slide33.xml><?xml version="1.0" encoding="utf-8"?>
 <p:sld xmlns:a="http://schemas.openxmlformats.org/drawingml/2006/main" xmlns:r="http://schemas.openxmlformats.org/officeDocument/2006/relationships" xmlns:p="http://schemas.openxmlformats.org/presentationml/2006/main">
   <p:cSld>
     <p:spTree>
@@ -34930,7 +38371,7 @@
           <a:p>
             <a:fld id="{AD622D1A-DF83-41A8-85FF-04D90BF831D3}" type="datetime3">
               <a:rPr lang="en-US" smtClean="0"/>
-              <a:t>5 May 2026</a:t>
+              <a:t>1 June 2026</a:t>
             </a:fld>
             <a:endParaRPr lang="en-US"/>
           </a:p>
@@ -34960,7 +38401,7 @@
             <a:fld id="{64E5BE4B-2FBF-4174-9E62-85FAD1CB43A6}" type="slidenum">
               <a:rPr lang="en-US" smtClean="0"/>
               <a:pPr/>
-              <a:t>23</a:t>
+              <a:t>33</a:t>
             </a:fld>
             <a:endParaRPr lang="en-US"/>
           </a:p>
@@ -35011,7 +38452,7 @@
 </p:sld>
 </file>
 
-<file path=ppt/slides/slide24.xml><?xml version="1.0" encoding="utf-8"?>
+<file path=ppt/slides/slide34.xml><?xml version="1.0" encoding="utf-8"?>
 <p:sld xmlns:a="http://schemas.openxmlformats.org/drawingml/2006/main" xmlns:r="http://schemas.openxmlformats.org/officeDocument/2006/relationships" xmlns:p="http://schemas.openxmlformats.org/presentationml/2006/main">
   <p:cSld>
     <p:spTree>
@@ -35243,7 +38684,7 @@
 </p:sld>
 </file>
 
-<file path=ppt/slides/slide25.xml><?xml version="1.0" encoding="utf-8"?>
+<file path=ppt/slides/slide35.xml><?xml version="1.0" encoding="utf-8"?>
 <p:sld xmlns:a="http://schemas.openxmlformats.org/drawingml/2006/main" xmlns:r="http://schemas.openxmlformats.org/officeDocument/2006/relationships" xmlns:p="http://schemas.openxmlformats.org/presentationml/2006/main">
   <p:cSld>
     <p:spTree>
@@ -35405,7 +38846,7 @@
 </p:sld>
 </file>
 
-<file path=ppt/slides/slide26.xml><?xml version="1.0" encoding="utf-8"?>
+<file path=ppt/slides/slide36.xml><?xml version="1.0" encoding="utf-8"?>
 <p:sld xmlns:a="http://schemas.openxmlformats.org/drawingml/2006/main" xmlns:r="http://schemas.openxmlformats.org/officeDocument/2006/relationships" xmlns:p="http://schemas.openxmlformats.org/presentationml/2006/main">
   <p:cSld>
     <p:spTree>
@@ -35485,7 +38926,7 @@
 </p:sld>
 </file>
 
-<file path=ppt/slides/slide27.xml><?xml version="1.0" encoding="utf-8"?>
+<file path=ppt/slides/slide37.xml><?xml version="1.0" encoding="utf-8"?>
 <p:sld xmlns:a="http://schemas.openxmlformats.org/drawingml/2006/main" xmlns:r="http://schemas.openxmlformats.org/officeDocument/2006/relationships" xmlns:p="http://schemas.openxmlformats.org/presentationml/2006/main">
   <p:cSld>
     <p:spTree>
@@ -35582,7 +39023,7 @@
 </p:sld>
 </file>
 
-<file path=ppt/slides/slide28.xml><?xml version="1.0" encoding="utf-8"?>
+<file path=ppt/slides/slide38.xml><?xml version="1.0" encoding="utf-8"?>
 <p:sld xmlns:a="http://schemas.openxmlformats.org/drawingml/2006/main" xmlns:r="http://schemas.openxmlformats.org/officeDocument/2006/relationships" xmlns:p="http://schemas.openxmlformats.org/presentationml/2006/main">
   <p:cSld>
     <p:spTree>
@@ -35951,7 +39392,7 @@
 </p:sld>
 </file>
 
-<file path=ppt/slides/slide29.xml><?xml version="1.0" encoding="utf-8"?>
+<file path=ppt/slides/slide39.xml><?xml version="1.0" encoding="utf-8"?>
 <p:sld xmlns:a="http://schemas.openxmlformats.org/drawingml/2006/main" xmlns:r="http://schemas.openxmlformats.org/officeDocument/2006/relationships" xmlns:p="http://schemas.openxmlformats.org/presentationml/2006/main">
   <p:cSld>
     <p:spTree>
@@ -36089,12 +39530,12 @@
 </p:sld>
 </file>
 
-<file path=ppt/slides/slide3.xml><?xml version="1.0" encoding="utf-8"?>
+<file path=ppt/slides/slide4.xml><?xml version="1.0" encoding="utf-8"?>
 <p:sld xmlns:a="http://schemas.openxmlformats.org/drawingml/2006/main" xmlns:r="http://schemas.openxmlformats.org/officeDocument/2006/relationships" xmlns:p="http://schemas.openxmlformats.org/presentationml/2006/main">
   <p:cSld>
     <p:spTree>
       <p:nvGrpSpPr>
-        <p:cNvPr id="1" name="Shape 203"/>
+        <p:cNvPr id="1" name="Shape 209"/>
         <p:cNvGrpSpPr/>
         <p:nvPr/>
       </p:nvGrpSpPr>
@@ -36108,7 +39549,7 @@
       </p:grpSpPr>
       <p:sp>
         <p:nvSpPr>
-          <p:cNvPr id="204" name="Google Shape;204;p38"/>
+          <p:cNvPr id="210" name="Google Shape;210;p39"/>
           <p:cNvSpPr txBox="1">
             <a:spLocks noGrp="1"/>
           </p:cNvSpPr>
@@ -36127,29 +39568,23 @@
           </a:ln>
         </p:spPr>
         <p:txBody>
-          <a:bodyPr spcFirstLastPara="1" wrap="square" lIns="91425" tIns="91425" rIns="91425" bIns="91425" anchor="t" anchorCtr="0">
+          <a:bodyPr spcFirstLastPara="1" wrap="square" lIns="91425" tIns="45700" rIns="91425" bIns="45700" anchor="ctr" anchorCtr="0">
             <a:normAutofit/>
           </a:bodyPr>
           <a:lstStyle/>
           <a:p>
             <a:pPr lvl="0"/>
             <a:r>
-              <a:rPr lang="en-US" dirty="0"/>
-              <a:t>AI2C Technician Cohort 7</a:t>
-            </a:r>
-          </a:p>
-        </p:txBody>
-      </p:sp>
-      <p:sp>
-        <p:nvSpPr>
-          <p:cNvPr id="3" name="Text Placeholder 2">
-            <a:extLst>
-              <a:ext uri="{FF2B5EF4-FFF2-40B4-BE49-F238E27FC236}">
-                <a16:creationId xmlns:a16="http://schemas.microsoft.com/office/drawing/2014/main" id="{40F23F63-0F1F-C732-32C1-147BBBC048D1}"/>
-              </a:ext>
-            </a:extLst>
-          </p:cNvPr>
-          <p:cNvSpPr>
+              <a:rPr lang="en-US"/>
+              <a:t>Let’s download Python</a:t>
+            </a:r>
+          </a:p>
+        </p:txBody>
+      </p:sp>
+      <p:sp>
+        <p:nvSpPr>
+          <p:cNvPr id="211" name="Google Shape;211;p39"/>
+          <p:cNvSpPr txBox="1">
             <a:spLocks noGrp="1"/>
           </p:cNvSpPr>
           <p:nvPr>
@@ -36161,19 +39596,68 @@
             <a:off x="411480" y="1200149"/>
             <a:ext cx="8268694" cy="3429000"/>
           </a:xfrm>
+          <a:noFill/>
+          <a:ln>
+            <a:noFill/>
+          </a:ln>
         </p:spPr>
         <p:txBody>
-          <a:bodyPr/>
+          <a:bodyPr spcFirstLastPara="1" wrap="square" lIns="91425" tIns="45700" rIns="91425" bIns="45700" anchor="t" anchorCtr="0">
+            <a:normAutofit/>
+          </a:bodyPr>
           <a:lstStyle/>
           <a:p>
-            <a:r>
-              <a:rPr lang="en" dirty="0"/>
-              <a:t>Lesson 1 – Intro to Python</a:t>
-            </a:r>
+            <a:pPr lvl="0"/>
+            <a:r>
+              <a:rPr lang="en-US" dirty="0"/>
+              <a:t>If you haven’t already… go to </a:t>
+            </a:r>
+            <a:r>
+              <a:rPr lang="en-US" dirty="0" err="1"/>
+              <a:t>python.org</a:t>
+            </a:r>
+            <a:r>
+              <a:rPr lang="en-US" dirty="0"/>
+              <a:t> and download the latest release of Python</a:t>
+            </a:r>
+          </a:p>
+          <a:p>
+            <a:pPr lvl="0"/>
             <a:endParaRPr lang="en-US" dirty="0"/>
           </a:p>
-        </p:txBody>
-      </p:sp>
+          <a:p>
+            <a:pPr lvl="0"/>
+            <a:endParaRPr lang="en-US" dirty="0"/>
+          </a:p>
+        </p:txBody>
+      </p:sp>
+      <p:pic>
+        <p:nvPicPr>
+          <p:cNvPr id="212" name="Google Shape;212;p39"/>
+          <p:cNvPicPr preferRelativeResize="0"/>
+          <p:nvPr/>
+        </p:nvPicPr>
+        <p:blipFill rotWithShape="1">
+          <a:blip r:embed="rId3">
+            <a:alphaModFix/>
+          </a:blip>
+          <a:srcRect/>
+          <a:stretch/>
+        </p:blipFill>
+        <p:spPr>
+          <a:xfrm>
+            <a:off x="1306868" y="2220998"/>
+            <a:ext cx="6530264" cy="2613891"/>
+          </a:xfrm>
+          <a:prstGeom prst="rect">
+            <a:avLst/>
+          </a:prstGeom>
+          <a:noFill/>
+          <a:ln>
+            <a:noFill/>
+          </a:ln>
+        </p:spPr>
+      </p:pic>
     </p:spTree>
   </p:cSld>
   <p:clrMapOvr>
@@ -36182,7 +39666,7 @@
 </p:sld>
 </file>
 
-<file path=ppt/slides/slide30.xml><?xml version="1.0" encoding="utf-8"?>
+<file path=ppt/slides/slide40.xml><?xml version="1.0" encoding="utf-8"?>
 <p:sld xmlns:a="http://schemas.openxmlformats.org/drawingml/2006/main" xmlns:r="http://schemas.openxmlformats.org/officeDocument/2006/relationships" xmlns:p="http://schemas.openxmlformats.org/presentationml/2006/main">
   <p:cSld>
     <p:spTree>
@@ -36325,7 +39809,7 @@
           <a:p>
             <a:fld id="{334F72C3-CDF3-44A8-B602-1649B1728485}" type="datetime3">
               <a:rPr lang="en-US" smtClean="0"/>
-              <a:t>5 May 2026</a:t>
+              <a:t>1 June 2026</a:t>
             </a:fld>
             <a:endParaRPr lang="en-US"/>
           </a:p>
@@ -36355,7 +39839,7 @@
             <a:fld id="{64E5BE4B-2FBF-4174-9E62-85FAD1CB43A6}" type="slidenum">
               <a:rPr lang="en-US" smtClean="0"/>
               <a:pPr/>
-              <a:t>30</a:t>
+              <a:t>40</a:t>
             </a:fld>
             <a:endParaRPr lang="en-US"/>
           </a:p>
@@ -36506,7 +39990,7 @@
 </p:sld>
 </file>
 
-<file path=ppt/slides/slide31.xml><?xml version="1.0" encoding="utf-8"?>
+<file path=ppt/slides/slide41.xml><?xml version="1.0" encoding="utf-8"?>
 <p:sld xmlns:a="http://schemas.openxmlformats.org/drawingml/2006/main" xmlns:r="http://schemas.openxmlformats.org/officeDocument/2006/relationships" xmlns:p="http://schemas.openxmlformats.org/presentationml/2006/main">
   <p:cSld>
     <p:spTree>
@@ -36675,7 +40159,7 @@
 </p:sld>
 </file>
 
-<file path=ppt/slides/slide32.xml><?xml version="1.0" encoding="utf-8"?>
+<file path=ppt/slides/slide42.xml><?xml version="1.0" encoding="utf-8"?>
 <p:sld xmlns:a="http://schemas.openxmlformats.org/drawingml/2006/main" xmlns:r="http://schemas.openxmlformats.org/officeDocument/2006/relationships" xmlns:p="http://schemas.openxmlformats.org/presentationml/2006/main">
   <p:cSld>
     <p:spTree>
@@ -36768,7 +40252,7 @@
           <a:p>
             <a:fld id="{AD622D1A-DF83-41A8-85FF-04D90BF831D3}" type="datetime3">
               <a:rPr lang="en-US" smtClean="0"/>
-              <a:t>5 May 2026</a:t>
+              <a:t>1 June 2026</a:t>
             </a:fld>
             <a:endParaRPr lang="en-US"/>
           </a:p>
@@ -36798,7 +40282,7 @@
             <a:fld id="{64E5BE4B-2FBF-4174-9E62-85FAD1CB43A6}" type="slidenum">
               <a:rPr lang="en-US" smtClean="0"/>
               <a:pPr/>
-              <a:t>32</a:t>
+              <a:t>42</a:t>
             </a:fld>
             <a:endParaRPr lang="en-US"/>
           </a:p>
@@ -36810,142 +40294,6 @@
         <p14:creationId xmlns:p14="http://schemas.microsoft.com/office/powerpoint/2010/main" val="3952093329"/>
       </p:ext>
     </p:extLst>
-  </p:cSld>
-  <p:clrMapOvr>
-    <a:masterClrMapping/>
-  </p:clrMapOvr>
-</p:sld>
-</file>
-
-<file path=ppt/slides/slide4.xml><?xml version="1.0" encoding="utf-8"?>
-<p:sld xmlns:a="http://schemas.openxmlformats.org/drawingml/2006/main" xmlns:r="http://schemas.openxmlformats.org/officeDocument/2006/relationships" xmlns:p="http://schemas.openxmlformats.org/presentationml/2006/main">
-  <p:cSld>
-    <p:spTree>
-      <p:nvGrpSpPr>
-        <p:cNvPr id="1" name="Shape 209"/>
-        <p:cNvGrpSpPr/>
-        <p:nvPr/>
-      </p:nvGrpSpPr>
-      <p:grpSpPr>
-        <a:xfrm>
-          <a:off x="0" y="0"/>
-          <a:ext cx="0" cy="0"/>
-          <a:chOff x="0" y="0"/>
-          <a:chExt cx="0" cy="0"/>
-        </a:xfrm>
-      </p:grpSpPr>
-      <p:sp>
-        <p:nvSpPr>
-          <p:cNvPr id="210" name="Google Shape;210;p39"/>
-          <p:cNvSpPr txBox="1">
-            <a:spLocks noGrp="1"/>
-          </p:cNvSpPr>
-          <p:nvPr>
-            <p:ph type="title"/>
-          </p:nvPr>
-        </p:nvSpPr>
-        <p:spPr>
-          <a:xfrm>
-            <a:off x="411480" y="308611"/>
-            <a:ext cx="6173470" cy="685800"/>
-          </a:xfrm>
-          <a:noFill/>
-          <a:ln>
-            <a:noFill/>
-          </a:ln>
-        </p:spPr>
-        <p:txBody>
-          <a:bodyPr spcFirstLastPara="1" wrap="square" lIns="91425" tIns="45700" rIns="91425" bIns="45700" anchor="ctr" anchorCtr="0">
-            <a:normAutofit/>
-          </a:bodyPr>
-          <a:lstStyle/>
-          <a:p>
-            <a:pPr lvl="0"/>
-            <a:r>
-              <a:rPr lang="en-US"/>
-              <a:t>Let’s download Python</a:t>
-            </a:r>
-          </a:p>
-        </p:txBody>
-      </p:sp>
-      <p:sp>
-        <p:nvSpPr>
-          <p:cNvPr id="211" name="Google Shape;211;p39"/>
-          <p:cNvSpPr txBox="1">
-            <a:spLocks noGrp="1"/>
-          </p:cNvSpPr>
-          <p:nvPr>
-            <p:ph idx="1"/>
-          </p:nvPr>
-        </p:nvSpPr>
-        <p:spPr>
-          <a:xfrm>
-            <a:off x="411480" y="1200149"/>
-            <a:ext cx="8268694" cy="3429000"/>
-          </a:xfrm>
-          <a:noFill/>
-          <a:ln>
-            <a:noFill/>
-          </a:ln>
-        </p:spPr>
-        <p:txBody>
-          <a:bodyPr spcFirstLastPara="1" wrap="square" lIns="91425" tIns="45700" rIns="91425" bIns="45700" anchor="t" anchorCtr="0">
-            <a:normAutofit/>
-          </a:bodyPr>
-          <a:lstStyle/>
-          <a:p>
-            <a:pPr lvl="0"/>
-            <a:r>
-              <a:rPr lang="en-US" dirty="0"/>
-              <a:t>If you haven’t already… go to </a:t>
-            </a:r>
-            <a:r>
-              <a:rPr lang="en-US" dirty="0" err="1"/>
-              <a:t>python.org</a:t>
-            </a:r>
-            <a:r>
-              <a:rPr lang="en-US" dirty="0"/>
-              <a:t> and download the latest release of Python</a:t>
-            </a:r>
-          </a:p>
-          <a:p>
-            <a:pPr lvl="0"/>
-            <a:endParaRPr lang="en-US" dirty="0"/>
-          </a:p>
-          <a:p>
-            <a:pPr lvl="0"/>
-            <a:endParaRPr lang="en-US" dirty="0"/>
-          </a:p>
-        </p:txBody>
-      </p:sp>
-      <p:pic>
-        <p:nvPicPr>
-          <p:cNvPr id="212" name="Google Shape;212;p39"/>
-          <p:cNvPicPr preferRelativeResize="0"/>
-          <p:nvPr/>
-        </p:nvPicPr>
-        <p:blipFill rotWithShape="1">
-          <a:blip r:embed="rId3">
-            <a:alphaModFix/>
-          </a:blip>
-          <a:srcRect/>
-          <a:stretch/>
-        </p:blipFill>
-        <p:spPr>
-          <a:xfrm>
-            <a:off x="1306868" y="2220998"/>
-            <a:ext cx="6530264" cy="2613891"/>
-          </a:xfrm>
-          <a:prstGeom prst="rect">
-            <a:avLst/>
-          </a:prstGeom>
-          <a:noFill/>
-          <a:ln>
-            <a:noFill/>
-          </a:ln>
-        </p:spPr>
-      </p:pic>
-    </p:spTree>
   </p:cSld>
   <p:clrMapOvr>
     <a:masterClrMapping/>
@@ -37786,7 +41134,19 @@
           <a:p>
             <a:r>
               <a:rPr lang="en-US" dirty="0"/>
-              <a:t>Give a quick tutorial on using the terminal in VS Code</a:t>
+              <a:t>Give a quick tutorial on VS Code:</a:t>
+            </a:r>
+          </a:p>
+          <a:p>
+            <a:r>
+              <a:rPr lang="en-US" dirty="0"/>
+              <a:t>	- File Explorer</a:t>
+            </a:r>
+          </a:p>
+          <a:p>
+            <a:r>
+              <a:rPr lang="en-US" dirty="0"/>
+              <a:t>	- Terminal in VS Code</a:t>
             </a:r>
           </a:p>
         </p:txBody>
